--- a/apresentacao_criciuma.pptx
+++ b/apresentacao_criciuma.pptx
@@ -4,6 +4,9 @@
   <p:sldMasterIdLst>
     <p:sldMasterId id="2147483648" r:id="rId1"/>
   </p:sldMasterIdLst>
+  <p:notesMasterIdLst>
+    <p:notesMasterId r:id="rId13"/>
+  </p:notesMasterIdLst>
   <p:sldIdLst>
     <p:sldId id="256" r:id="rId2"/>
     <p:sldId id="257" r:id="rId3"/>
@@ -17,9 +20,6 @@
     <p:sldId id="265" r:id="rId11"/>
     <p:sldId id="266" r:id="rId12"/>
   </p:sldIdLst>
-  <p:notesMasterIdLst>
-    <p:notesMasterId r:id="rId13"/>
-  </p:notesMasterIdLst>
   <p:sldSz cx="12192000" cy="6858000"/>
   <p:notesSz cx="6858000" cy="12192000"/>
   <p:defaultTextStyle>
@@ -114,13 +114,28 @@
       </a:defRPr>
     </a:lvl9pPr>
   </p:defaultTextStyle>
+  <p:extLst>
+    <p:ext uri="{EFAFB233-063F-42B5-8137-9DF3F51BA10A}">
+      <p15:sldGuideLst xmlns:p15="http://schemas.microsoft.com/office/powerpoint/2012/main"/>
+    </p:ext>
+  </p:extLst>
 </p:presentation>
 </file>
 
+<file path=ppt/revisionInfo.xml><?xml version="1.0" encoding="utf-8"?>
+<p1510:revInfo xmlns:a="http://schemas.openxmlformats.org/drawingml/2006/main" xmlns:r="http://schemas.openxmlformats.org/officeDocument/2006/relationships" xmlns:p1510="http://schemas.microsoft.com/office/powerpoint/2015/10/main">
+  <p1510:revLst>
+    <p1510:client id="{1A32C34C-EDBF-351E-1BA1-427DBA2B9601}" v="31" dt="2026-06-21T12:39:21.776"/>
+  </p1510:revLst>
+</p1510:revInfo>
+</file>
+
 <file path=ppt/charts/chart1.xml><?xml version="1.0" encoding="utf-8"?>
-<c:chartSpace xmlns:c="http://schemas.openxmlformats.org/drawingml/2006/chart" xmlns:a="http://schemas.openxmlformats.org/drawingml/2006/main" xmlns:r="http://schemas.openxmlformats.org/officeDocument/2006/relationships">
+<c:chartSpace xmlns:c="http://schemas.openxmlformats.org/drawingml/2006/chart" xmlns:a="http://schemas.openxmlformats.org/drawingml/2006/main" xmlns:r="http://schemas.openxmlformats.org/officeDocument/2006/relationships" xmlns:c16r2="http://schemas.microsoft.com/office/drawing/2015/06/chart">
   <c:date1904 val="0"/>
+  <c:lang val="pt-BR"/>
   <c:roundedCorners val="1"/>
+  <c:style val="2"/>
   <c:chart>
     <c:autoTitleDeleted val="1"/>
     <c:plotArea>
@@ -152,18 +167,26 @@
           <c:invertIfNegative val="0"/>
           <c:dLbls>
             <c:numFmt formatCode="#,##0" sourceLinked="0"/>
+            <c:spPr>
+              <a:noFill/>
+              <a:ln>
+                <a:noFill/>
+              </a:ln>
+              <a:effectLst/>
+            </c:spPr>
             <c:txPr>
               <a:bodyPr/>
               <a:lstStyle/>
               <a:p>
                 <a:pPr>
-                  <a:defRPr b="0" i="0" strike="noStrike" sz="900" u="none">
+                  <a:defRPr sz="900" b="0" i="0" u="none" strike="noStrike">
                     <a:solidFill>
                       <a:srgbClr val="1E293B"/>
                     </a:solidFill>
                     <a:latin typeface="Arial"/>
                   </a:defRPr>
                 </a:pPr>
+                <a:endParaRPr lang="pt-BR"/>
               </a:p>
             </c:txPr>
             <c:showLegendKey val="0"/>
@@ -173,34 +196,37 @@
             <c:showPercent val="0"/>
             <c:showBubbleSize val="0"/>
             <c:showLeaderLines val="0"/>
+            <c:extLst>
+              <c:ext xmlns:c15="http://schemas.microsoft.com/office/drawing/2012/chart" uri="{CE6537A1-D6FC-4f65-9D91-7224C49458BB}">
+                <c15:showLeaderLines val="0"/>
+              </c:ext>
+            </c:extLst>
           </c:dLbls>
           <c:cat>
-            <c:multiLvlStrRef>
+            <c:strRef>
               <c:f>Sheet1!$A$2:$A$7</c:f>
-              <c:multiLvlStrCache>
+              <c:strCache>
                 <c:ptCount val="6"/>
-                <c:lvl>
-                  <c:pt idx="0">
-                    <c:v>Agente Político</c:v>
-                  </c:pt>
-                  <c:pt idx="1">
-                    <c:v>Cessão (comissão)</c:v>
-                  </c:pt>
-                  <c:pt idx="2">
-                    <c:v>Servidor Não Efetivo</c:v>
-                  </c:pt>
-                  <c:pt idx="3">
-                    <c:v>Conselheiro Tutelar</c:v>
-                  </c:pt>
-                  <c:pt idx="4">
-                    <c:v>Cessão (efetivo)</c:v>
-                  </c:pt>
-                  <c:pt idx="5">
-                    <c:v>Estatutário</c:v>
-                  </c:pt>
-                </c:lvl>
-              </c:multiLvlStrCache>
-            </c:multiLvlStrRef>
+                <c:pt idx="0">
+                  <c:v>Agente Político</c:v>
+                </c:pt>
+                <c:pt idx="1">
+                  <c:v>Cessão (comissão)</c:v>
+                </c:pt>
+                <c:pt idx="2">
+                  <c:v>Servidor Não Efetivo</c:v>
+                </c:pt>
+                <c:pt idx="3">
+                  <c:v>Conselheiro Tutelar</c:v>
+                </c:pt>
+                <c:pt idx="4">
+                  <c:v>Cessão (efetivo)</c:v>
+                </c:pt>
+                <c:pt idx="5">
+                  <c:v>Estatutário</c:v>
+                </c:pt>
+              </c:strCache>
+            </c:strRef>
           </c:cat>
           <c:val>
             <c:numRef>
@@ -229,36 +255,23 @@
               </c:numCache>
             </c:numRef>
           </c:val>
+          <c:extLst>
+            <c:ext xmlns:c16="http://schemas.microsoft.com/office/drawing/2014/chart" uri="{C3380CC4-5D6E-409C-BE32-E72D297353CC}">
+              <c16:uniqueId val="{00000000-A6B6-4B31-BAF1-40843D7D8E53}"/>
+            </c:ext>
+          </c:extLst>
         </c:ser>
         <c:dLbls>
-          <c:numFmt formatCode="#,##0" sourceLinked="0"/>
-          <c:txPr>
-            <a:bodyPr/>
-            <a:lstStyle/>
-            <a:p>
-              <a:pPr>
-                <a:defRPr b="0" i="0" strike="noStrike" sz="900" u="none">
-                  <a:solidFill>
-                    <a:srgbClr val="1E293B"/>
-                  </a:solidFill>
-                  <a:latin typeface="Arial"/>
-                </a:defRPr>
-              </a:pPr>
-            </a:p>
-          </c:txPr>
           <c:showLegendKey val="0"/>
           <c:showVal val="1"/>
           <c:showCatName val="0"/>
           <c:showSerName val="0"/>
           <c:showPercent val="0"/>
           <c:showBubbleSize val="0"/>
-          <c:showLeaderLines val="0"/>
         </c:dLbls>
         <c:gapWidth val="150"/>
-        <c:overlap val="0"/>
         <c:axId val="2094734554"/>
         <c:axId val="2094734552"/>
-        <c:axId val="2094734556"/>
       </c:barChart>
       <c:catAx>
         <c:axId val="2094734554"/>
@@ -299,6 +312,7 @@
         <c:crosses val="autoZero"/>
         <c:auto val="1"/>
         <c:lblAlgn val="ctr"/>
+        <c:lblOffset val="100"/>
         <c:noMultiLvlLbl val="1"/>
       </c:catAx>
       <c:valAx>
@@ -361,6 +375,7 @@
     </c:plotArea>
     <c:plotVisOnly val="1"/>
     <c:dispBlanksAs val="span"/>
+    <c:showDLblsOverMax val="1"/>
   </c:chart>
   <c:spPr>
     <a:solidFill>
@@ -378,9 +393,11 @@
 </file>
 
 <file path=ppt/charts/chart2.xml><?xml version="1.0" encoding="utf-8"?>
-<c:chartSpace xmlns:c="http://schemas.openxmlformats.org/drawingml/2006/chart" xmlns:a="http://schemas.openxmlformats.org/drawingml/2006/main" xmlns:r="http://schemas.openxmlformats.org/officeDocument/2006/relationships">
+<c:chartSpace xmlns:c="http://schemas.openxmlformats.org/drawingml/2006/chart" xmlns:a="http://schemas.openxmlformats.org/drawingml/2006/main" xmlns:r="http://schemas.openxmlformats.org/officeDocument/2006/relationships" xmlns:c16r2="http://schemas.microsoft.com/office/drawing/2015/06/chart">
   <c:date1904 val="0"/>
+  <c:lang val="pt-BR"/>
   <c:roundedCorners val="1"/>
+  <c:style val="2"/>
   <c:chart>
     <c:title>
       <c:tx>
@@ -408,13 +425,13 @@
           </a:p>
         </c:rich>
       </c:tx>
-      <c:layout/>
       <c:overlay val="0"/>
     </c:title>
     <c:autoTitleDeleted val="0"/>
     <c:plotArea>
       <c:layout/>
       <c:lineChart>
+        <c:grouping val="standard"/>
         <c:varyColors val="0"/>
         <c:ser>
           <c:idx val="0"/>
@@ -431,9 +448,6 @@
             </c:strRef>
           </c:tx>
           <c:spPr>
-            <a:solidFill>
-              <a:srgbClr val="1E2761"/>
-            </a:solidFill>
             <a:ln w="38100" cap="flat">
               <a:solidFill>
                 <a:srgbClr val="1E2761"/>
@@ -443,31 +457,6 @@
             </a:ln>
             <a:effectLst/>
           </c:spPr>
-          <c:invertIfNegative val="0"/>
-          <c:dLbls>
-            <c:numFmt formatCode="#,##0" sourceLinked="0"/>
-            <c:txPr>
-              <a:bodyPr/>
-              <a:lstStyle/>
-              <a:p>
-                <a:pPr>
-                  <a:defRPr b="0" i="0" strike="noStrike" sz="1200" u="none">
-                    <a:solidFill>
-                      <a:srgbClr val="000000"/>
-                    </a:solidFill>
-                    <a:latin typeface="Arial"/>
-                  </a:defRPr>
-                </a:pPr>
-              </a:p>
-            </c:txPr>
-            <c:showLegendKey val="0"/>
-            <c:showVal val="0"/>
-            <c:showCatName val="0"/>
-            <c:showSerName val="0"/>
-            <c:showPercent val="0"/>
-            <c:showBubbleSize val="0"/>
-            <c:showLeaderLines val="0"/>
-          </c:dLbls>
           <c:marker>
             <c:symbol val="circle"/>
             <c:size val="6"/>
@@ -486,35 +475,33 @@
             </c:spPr>
           </c:marker>
           <c:cat>
-            <c:multiLvlStrRef>
+            <c:strRef>
               <c:f>Sheet1!$A$2:$A$8</c:f>
-              <c:multiLvlStrCache>
+              <c:strCache>
                 <c:ptCount val="7"/>
-                <c:lvl>
-                  <c:pt idx="0">
-                    <c:v>2020</c:v>
-                  </c:pt>
-                  <c:pt idx="1">
-                    <c:v>2021</c:v>
-                  </c:pt>
-                  <c:pt idx="2">
-                    <c:v>2022</c:v>
-                  </c:pt>
-                  <c:pt idx="3">
-                    <c:v>2023</c:v>
-                  </c:pt>
-                  <c:pt idx="4">
-                    <c:v>2024</c:v>
-                  </c:pt>
-                  <c:pt idx="5">
-                    <c:v>2025</c:v>
-                  </c:pt>
-                  <c:pt idx="6">
-                    <c:v>2026</c:v>
-                  </c:pt>
-                </c:lvl>
-              </c:multiLvlStrCache>
-            </c:multiLvlStrRef>
+                <c:pt idx="0">
+                  <c:v>2020</c:v>
+                </c:pt>
+                <c:pt idx="1">
+                  <c:v>2021</c:v>
+                </c:pt>
+                <c:pt idx="2">
+                  <c:v>2022</c:v>
+                </c:pt>
+                <c:pt idx="3">
+                  <c:v>2023</c:v>
+                </c:pt>
+                <c:pt idx="4">
+                  <c:v>2024</c:v>
+                </c:pt>
+                <c:pt idx="5">
+                  <c:v>2025</c:v>
+                </c:pt>
+                <c:pt idx="6">
+                  <c:v>2026</c:v>
+                </c:pt>
+              </c:strCache>
+            </c:strRef>
           </c:cat>
           <c:val>
             <c:numRef>
@@ -547,35 +534,24 @@
             </c:numRef>
           </c:val>
           <c:smooth val="0"/>
+          <c:extLst>
+            <c:ext xmlns:c16="http://schemas.microsoft.com/office/drawing/2014/chart" uri="{C3380CC4-5D6E-409C-BE32-E72D297353CC}">
+              <c16:uniqueId val="{00000000-2DD9-42D2-8157-EA88E961A46E}"/>
+            </c:ext>
+          </c:extLst>
         </c:ser>
         <c:dLbls>
-          <c:numFmt formatCode="#,##0" sourceLinked="0"/>
-          <c:txPr>
-            <a:bodyPr/>
-            <a:lstStyle/>
-            <a:p>
-              <a:pPr>
-                <a:defRPr b="0" i="0" strike="noStrike" sz="1200" u="none">
-                  <a:solidFill>
-                    <a:srgbClr val="000000"/>
-                  </a:solidFill>
-                  <a:latin typeface="Arial"/>
-                </a:defRPr>
-              </a:pPr>
-            </a:p>
-          </c:txPr>
           <c:showLegendKey val="0"/>
           <c:showVal val="0"/>
           <c:showCatName val="0"/>
           <c:showSerName val="0"/>
           <c:showPercent val="0"/>
           <c:showBubbleSize val="0"/>
-          <c:showLeaderLines val="0"/>
         </c:dLbls>
         <c:marker val="1"/>
+        <c:smooth val="0"/>
         <c:axId val="2094734554"/>
         <c:axId val="2094734552"/>
-        <c:axId val="2094734556"/>
       </c:lineChart>
       <c:catAx>
         <c:axId val="2094734554"/>
@@ -616,6 +592,7 @@
         <c:crosses val="autoZero"/>
         <c:auto val="1"/>
         <c:lblAlgn val="ctr"/>
+        <c:lblOffset val="100"/>
         <c:noMultiLvlLbl val="1"/>
       </c:catAx>
       <c:valAx>
@@ -678,6 +655,7 @@
     </c:plotArea>
     <c:plotVisOnly val="1"/>
     <c:dispBlanksAs val="span"/>
+    <c:showDLblsOverMax val="1"/>
   </c:chart>
   <c:spPr>
     <a:solidFill>
@@ -718,7 +696,7 @@
       </p:grpSpPr>
       <p:sp>
         <p:nvSpPr>
-          <p:cNvPr id="2" name="Header Placeholder 1"/>
+          <p:cNvPr id="2" name="Espaço Reservado para Cabeçalho 1"/>
           <p:cNvSpPr>
             <a:spLocks noGrp="1"/>
           </p:cNvSpPr>
@@ -729,7 +707,7 @@
         <p:spPr>
           <a:xfrm>
             <a:off x="0" y="0"/>
-            <a:ext cx="2971800" cy="458788"/>
+            <a:ext cx="2971800" cy="611188"/>
           </a:xfrm>
           <a:prstGeom prst="rect">
             <a:avLst/>
@@ -743,13 +721,13 @@
             </a:lvl1pPr>
           </a:lstStyle>
           <a:p>
-            <a:endParaRPr lang="en-US"/>
-          </a:p>
-        </p:txBody>
-      </p:sp>
-      <p:sp>
-        <p:nvSpPr>
-          <p:cNvPr id="3" name="Date Placeholder 2"/>
+            <a:endParaRPr lang="pt-BR"/>
+          </a:p>
+        </p:txBody>
+      </p:sp>
+      <p:sp>
+        <p:nvSpPr>
+          <p:cNvPr id="3" name="Espaço Reservado para Data 2"/>
           <p:cNvSpPr>
             <a:spLocks noGrp="1"/>
           </p:cNvSpPr>
@@ -760,7 +738,7 @@
         <p:spPr>
           <a:xfrm>
             <a:off x="3884613" y="0"/>
-            <a:ext cx="2971800" cy="458788"/>
+            <a:ext cx="2971800" cy="611188"/>
           </a:xfrm>
           <a:prstGeom prst="rect">
             <a:avLst/>
@@ -774,17 +752,16 @@
             </a:lvl1pPr>
           </a:lstStyle>
           <a:p>
-            <a:fld id="{5282F153-3F37-0F45-9E97-73ACFA13230C}" type="datetimeFigureOut">
-              <a:rPr lang="en-US"/>
-              <a:t>7/23/19</a:t>
+            <a:fld id="{E965112C-8425-49D1-8574-4C33E7C540B3}" type="datetimeFigureOut">
+              <a:t>21/06/2026</a:t>
             </a:fld>
-            <a:endParaRPr lang="en-US"/>
-          </a:p>
-        </p:txBody>
-      </p:sp>
-      <p:sp>
-        <p:nvSpPr>
-          <p:cNvPr id="4" name="Slide Image Placeholder 3"/>
+            <a:endParaRPr lang="pt-BR"/>
+          </a:p>
+        </p:txBody>
+      </p:sp>
+      <p:sp>
+        <p:nvSpPr>
+          <p:cNvPr id="4" name="Espaço Reservado para Imagem de Slide 3"/>
           <p:cNvSpPr>
             <a:spLocks noGrp="1" noRot="1" noChangeAspect="1"/>
           </p:cNvSpPr>
@@ -794,8 +771,8 @@
         </p:nvSpPr>
         <p:spPr>
           <a:xfrm>
-            <a:off x="685800" y="1143000"/>
-            <a:ext cx="5486400" cy="3086100"/>
+            <a:off x="-228600" y="1524000"/>
+            <a:ext cx="7315200" cy="4114800"/>
           </a:xfrm>
           <a:prstGeom prst="rect">
             <a:avLst/>
@@ -811,13 +788,13 @@
           <a:bodyPr vert="horz" lIns="91440" tIns="45720" rIns="91440" bIns="45720" rtlCol="0" anchor="ctr"/>
           <a:lstStyle/>
           <a:p>
-            <a:endParaRPr lang="en-US"/>
-          </a:p>
-        </p:txBody>
-      </p:sp>
-      <p:sp>
-        <p:nvSpPr>
-          <p:cNvPr id="5" name="Notes Placeholder 4"/>
+            <a:endParaRPr lang="pt-BR"/>
+          </a:p>
+        </p:txBody>
+      </p:sp>
+      <p:sp>
+        <p:nvSpPr>
+          <p:cNvPr id="5" name="Espaço Reservado para Anotações 4"/>
           <p:cNvSpPr>
             <a:spLocks noGrp="1"/>
           </p:cNvSpPr>
@@ -827,8 +804,8 @@
         </p:nvSpPr>
         <p:spPr>
           <a:xfrm>
-            <a:off x="685800" y="4400550"/>
-            <a:ext cx="5486400" cy="3600450"/>
+            <a:off x="685800" y="5867400"/>
+            <a:ext cx="5486400" cy="4800600"/>
           </a:xfrm>
           <a:prstGeom prst="rect">
             <a:avLst/>
@@ -840,43 +817,43 @@
           <a:p>
             <a:pPr lvl="0"/>
             <a:r>
-              <a:rPr lang="en-US"/>
-              <a:t>Click to edit Master text styles</a:t>
+              <a:rPr lang="pt-BR"/>
+              <a:t>Clique para editar os estilos de texto Mestres</a:t>
             </a:r>
           </a:p>
           <a:p>
             <a:pPr lvl="1"/>
             <a:r>
-              <a:rPr lang="en-US"/>
-              <a:t>Second level</a:t>
+              <a:rPr lang="pt-BR"/>
+              <a:t>Segundo nível</a:t>
             </a:r>
           </a:p>
           <a:p>
             <a:pPr lvl="2"/>
             <a:r>
-              <a:rPr lang="en-US"/>
-              <a:t>Third level</a:t>
+              <a:rPr lang="pt-BR"/>
+              <a:t>Terceiro nível</a:t>
             </a:r>
           </a:p>
           <a:p>
             <a:pPr lvl="3"/>
             <a:r>
-              <a:rPr lang="en-US"/>
-              <a:t>Fourth level</a:t>
+              <a:rPr lang="pt-BR"/>
+              <a:t>Quarto nível</a:t>
             </a:r>
           </a:p>
           <a:p>
             <a:pPr lvl="4"/>
             <a:r>
-              <a:rPr lang="en-US"/>
-              <a:t>Fifth level</a:t>
-            </a:r>
-          </a:p>
-        </p:txBody>
-      </p:sp>
-      <p:sp>
-        <p:nvSpPr>
-          <p:cNvPr id="6" name="Footer Placeholder 5"/>
+              <a:rPr lang="pt-BR"/>
+              <a:t>Quinto nível</a:t>
+            </a:r>
+          </a:p>
+        </p:txBody>
+      </p:sp>
+      <p:sp>
+        <p:nvSpPr>
+          <p:cNvPr id="6" name="Espaço Reservado para Rodapé 5"/>
           <p:cNvSpPr>
             <a:spLocks noGrp="1"/>
           </p:cNvSpPr>
@@ -886,8 +863,8 @@
         </p:nvSpPr>
         <p:spPr>
           <a:xfrm>
-            <a:off x="0" y="8685213"/>
-            <a:ext cx="2971800" cy="458787"/>
+            <a:off x="0" y="11580813"/>
+            <a:ext cx="2971800" cy="611187"/>
           </a:xfrm>
           <a:prstGeom prst="rect">
             <a:avLst/>
@@ -901,13 +878,13 @@
             </a:lvl1pPr>
           </a:lstStyle>
           <a:p>
-            <a:endParaRPr lang="en-US"/>
-          </a:p>
-        </p:txBody>
-      </p:sp>
-      <p:sp>
-        <p:nvSpPr>
-          <p:cNvPr id="7" name="Slide Number Placeholder 6"/>
+            <a:endParaRPr lang="pt-BR"/>
+          </a:p>
+        </p:txBody>
+      </p:sp>
+      <p:sp>
+        <p:nvSpPr>
+          <p:cNvPr id="7" name="Espaço Reservado para Número de Slide 6"/>
           <p:cNvSpPr>
             <a:spLocks noGrp="1"/>
           </p:cNvSpPr>
@@ -917,8 +894,8 @@
         </p:nvSpPr>
         <p:spPr>
           <a:xfrm>
-            <a:off x="3884613" y="8685213"/>
-            <a:ext cx="2971800" cy="458787"/>
+            <a:off x="3884613" y="11580813"/>
+            <a:ext cx="2971800" cy="611187"/>
           </a:xfrm>
           <a:prstGeom prst="rect">
             <a:avLst/>
@@ -932,18 +909,17 @@
             </a:lvl1pPr>
           </a:lstStyle>
           <a:p>
-            <a:fld id="{CE5E9CC1-C706-0F49-92D6-E571CC5EEA8F}" type="slidenum">
-              <a:rPr lang="en-US"/>
-              <a:t>‹#›</a:t>
+            <a:fld id="{8945A23A-F8D2-4539-98A9-3427205046E5}" type="slidenum">
+              <a:t>‹nº›</a:t>
             </a:fld>
-            <a:endParaRPr lang="en-US"/>
+            <a:endParaRPr lang="pt-BR"/>
           </a:p>
         </p:txBody>
       </p:sp>
     </p:spTree>
     <p:extLst>
       <p:ext uri="{BB962C8B-B14F-4D97-AF65-F5344CB8AC3E}">
-        <p14:creationId xmlns:p14="http://schemas.microsoft.com/office/powerpoint/2010/main" val="1024086991"/>
+        <p14:creationId xmlns:p14="http://schemas.microsoft.com/office/powerpoint/2010/main" val="3041422176"/>
       </p:ext>
     </p:extLst>
   </p:cSld>
@@ -1087,10 +1063,6 @@
           <a:bodyPr/>
           <a:lstStyle/>
           <a:p>
-            <a:r>
-              <a:rPr lang="en-US" dirty="0"/>
-              <a:t/>
-            </a:r>
             <a:endParaRPr lang="en-US" dirty="0"/>
           </a:p>
         </p:txBody>
@@ -1175,10 +1147,6 @@
           <a:bodyPr/>
           <a:lstStyle/>
           <a:p>
-            <a:r>
-              <a:rPr lang="en-US" dirty="0"/>
-              <a:t/>
-            </a:r>
             <a:endParaRPr lang="en-US" dirty="0"/>
           </a:p>
         </p:txBody>
@@ -1263,10 +1231,6 @@
           <a:bodyPr/>
           <a:lstStyle/>
           <a:p>
-            <a:r>
-              <a:rPr lang="en-US" dirty="0"/>
-              <a:t/>
-            </a:r>
             <a:endParaRPr lang="en-US" dirty="0"/>
           </a:p>
         </p:txBody>
@@ -1351,10 +1315,6 @@
           <a:bodyPr/>
           <a:lstStyle/>
           <a:p>
-            <a:r>
-              <a:rPr lang="en-US" dirty="0"/>
-              <a:t/>
-            </a:r>
             <a:endParaRPr lang="en-US" dirty="0"/>
           </a:p>
         </p:txBody>
@@ -1439,10 +1399,6 @@
           <a:bodyPr/>
           <a:lstStyle/>
           <a:p>
-            <a:r>
-              <a:rPr lang="en-US" dirty="0"/>
-              <a:t/>
-            </a:r>
             <a:endParaRPr lang="en-US" dirty="0"/>
           </a:p>
         </p:txBody>
@@ -1527,10 +1483,6 @@
           <a:bodyPr/>
           <a:lstStyle/>
           <a:p>
-            <a:r>
-              <a:rPr lang="en-US" dirty="0"/>
-              <a:t/>
-            </a:r>
             <a:endParaRPr lang="en-US" dirty="0"/>
           </a:p>
         </p:txBody>
@@ -1615,10 +1567,6 @@
           <a:bodyPr/>
           <a:lstStyle/>
           <a:p>
-            <a:r>
-              <a:rPr lang="en-US" dirty="0"/>
-              <a:t/>
-            </a:r>
             <a:endParaRPr lang="en-US" dirty="0"/>
           </a:p>
         </p:txBody>
@@ -1703,10 +1651,6 @@
           <a:bodyPr/>
           <a:lstStyle/>
           <a:p>
-            <a:r>
-              <a:rPr lang="en-US" dirty="0"/>
-              <a:t/>
-            </a:r>
             <a:endParaRPr lang="en-US" dirty="0"/>
           </a:p>
         </p:txBody>
@@ -1791,10 +1735,6 @@
           <a:bodyPr/>
           <a:lstStyle/>
           <a:p>
-            <a:r>
-              <a:rPr lang="en-US" dirty="0"/>
-              <a:t/>
-            </a:r>
             <a:endParaRPr lang="en-US" dirty="0"/>
           </a:p>
         </p:txBody>
@@ -1879,10 +1819,6 @@
           <a:bodyPr/>
           <a:lstStyle/>
           <a:p>
-            <a:r>
-              <a:rPr lang="en-US" dirty="0"/>
-              <a:t/>
-            </a:r>
             <a:endParaRPr lang="en-US" dirty="0"/>
           </a:p>
         </p:txBody>
@@ -1967,10 +1903,6 @@
           <a:bodyPr/>
           <a:lstStyle/>
           <a:p>
-            <a:r>
-              <a:rPr lang="en-US" dirty="0"/>
-              <a:t/>
-            </a:r>
             <a:endParaRPr lang="en-US" dirty="0"/>
           </a:p>
         </p:txBody>
@@ -2044,6 +1976,11 @@
 <file path=ppt/slideMasters/slideMaster1.xml><?xml version="1.0" encoding="utf-8"?>
 <p:sldMaster xmlns:a="http://schemas.openxmlformats.org/drawingml/2006/main" xmlns:r="http://schemas.openxmlformats.org/officeDocument/2006/relationships" xmlns:p="http://schemas.openxmlformats.org/presentationml/2006/main">
   <p:cSld>
+    <p:bg>
+      <p:bgRef idx="1001">
+        <a:schemeClr val="bg1"/>
+      </p:bgRef>
+    </p:bg>
     <p:spTree>
       <p:nvGrpSpPr>
         <p:cNvPr id="1" name=""/>
@@ -2326,6 +2263,7 @@
         <a:solidFill>
           <a:srgbClr val="151B4A"/>
         </a:solidFill>
+        <a:effectLst/>
       </p:bgPr>
     </p:bg>
     <p:spTree>
@@ -2408,11 +2346,11 @@
           <a:bodyPr wrap="square" lIns="0" tIns="0" rIns="0" bIns="0" rtlCol="0" anchor="ctr"/>
           <a:lstStyle/>
           <a:p>
-            <a:pPr indent="0" marL="0">
-              <a:buNone/>
-            </a:pPr>
-            <a:r>
-              <a:rPr lang="en-US" sz="1400" b="1" spc="300" kern="0" dirty="0">
+            <a:pPr marL="0" indent="0">
+              <a:buNone/>
+            </a:pPr>
+            <a:r>
+              <a:rPr lang="en-US" sz="1400" b="1" kern="0" spc="300" dirty="0">
                 <a:solidFill>
                   <a:srgbClr val="D4AF37"/>
                 </a:solidFill>
@@ -2447,7 +2385,7 @@
           <a:bodyPr wrap="square" lIns="0" tIns="0" rIns="0" bIns="0" rtlCol="0" anchor="ctr"/>
           <a:lstStyle/>
           <a:p>
-            <a:pPr indent="0" marL="0">
+            <a:pPr marL="0" indent="0">
               <a:lnSpc>
                 <a:spcPct val="105000"/>
               </a:lnSpc>
@@ -2467,7 +2405,7 @@
             <a:endParaRPr lang="en-US" sz="3800" dirty="0"/>
           </a:p>
           <a:p>
-            <a:pPr indent="0" marL="0">
+            <a:pPr marL="0" indent="0">
               <a:lnSpc>
                 <a:spcPct val="105000"/>
               </a:lnSpc>
@@ -2509,7 +2447,7 @@
           <a:bodyPr wrap="square" lIns="0" tIns="0" rIns="0" bIns="0" rtlCol="0" anchor="ctr"/>
           <a:lstStyle/>
           <a:p>
-            <a:pPr indent="0" marL="0">
+            <a:pPr marL="0" indent="0">
               <a:buNone/>
             </a:pPr>
             <a:r>
@@ -2558,20 +2496,20 @@
         </p:nvSpPr>
         <p:spPr>
           <a:xfrm>
-            <a:off x="640080" y="4617720"/>
-            <a:ext cx="7315200" cy="365760"/>
-          </a:xfrm>
-          <a:prstGeom prst="rect">
-            <a:avLst/>
-          </a:prstGeom>
-          <a:noFill/>
-          <a:ln/>
-        </p:spPr>
-        <p:txBody>
-          <a:bodyPr wrap="square" lIns="0" tIns="0" rIns="0" bIns="0" rtlCol="0" anchor="ctr"/>
-          <a:lstStyle/>
-          <a:p>
-            <a:pPr indent="0" marL="0">
+            <a:off x="640080" y="4666566"/>
+            <a:ext cx="7315200" cy="277838"/>
+          </a:xfrm>
+          <a:prstGeom prst="rect">
+            <a:avLst/>
+          </a:prstGeom>
+          <a:noFill/>
+          <a:ln/>
+        </p:spPr>
+        <p:txBody>
+          <a:bodyPr wrap="square" lIns="0" tIns="0" rIns="0" bIns="0" rtlCol="0" anchor="ctr"/>
+          <a:lstStyle/>
+          <a:p>
+            <a:pPr marL="0" indent="0">
               <a:buNone/>
             </a:pPr>
             <a:r>
@@ -2579,13 +2517,87 @@
                 <a:solidFill>
                   <a:srgbClr val="CADCFC"/>
                 </a:solidFill>
-                <a:latin typeface="Calibri" pitchFamily="34" charset="0"/>
-                <a:ea typeface="Calibri" pitchFamily="34" charset="-122"/>
-                <a:cs typeface="Calibri" pitchFamily="34" charset="-120"/>
-              </a:rPr>
-              <a:t>Base analisada: 17.604 registros de remuneração · 2020–2026</a:t>
-            </a:r>
-            <a:endParaRPr lang="en-US" sz="1200" dirty="0"/>
+                <a:latin typeface="Calibri"/>
+                <a:ea typeface="Calibri"/>
+                <a:cs typeface="Calibri"/>
+              </a:rPr>
+              <a:t>Base </a:t>
+            </a:r>
+            <a:r>
+              <a:rPr lang="en-US" sz="1200" dirty="0" err="1">
+                <a:solidFill>
+                  <a:srgbClr val="CADCFC"/>
+                </a:solidFill>
+                <a:latin typeface="Calibri"/>
+                <a:ea typeface="Calibri"/>
+                <a:cs typeface="Calibri"/>
+              </a:rPr>
+              <a:t>analisada</a:t>
+            </a:r>
+            <a:r>
+              <a:rPr lang="en-US" sz="1200" dirty="0">
+                <a:solidFill>
+                  <a:srgbClr val="CADCFC"/>
+                </a:solidFill>
+                <a:latin typeface="Calibri"/>
+                <a:ea typeface="Calibri"/>
+                <a:cs typeface="Calibri"/>
+              </a:rPr>
+              <a:t>: 17.604 </a:t>
+            </a:r>
+            <a:r>
+              <a:rPr lang="en-US" sz="1200" dirty="0" err="1">
+                <a:solidFill>
+                  <a:srgbClr val="CADCFC"/>
+                </a:solidFill>
+                <a:latin typeface="Calibri"/>
+                <a:ea typeface="Calibri"/>
+                <a:cs typeface="Calibri"/>
+              </a:rPr>
+              <a:t>registros</a:t>
+            </a:r>
+            <a:r>
+              <a:rPr lang="en-US" sz="1200" dirty="0">
+                <a:solidFill>
+                  <a:srgbClr val="CADCFC"/>
+                </a:solidFill>
+                <a:latin typeface="Calibri"/>
+                <a:ea typeface="Calibri"/>
+                <a:cs typeface="Calibri"/>
+              </a:rPr>
+              <a:t> de </a:t>
+            </a:r>
+            <a:r>
+              <a:rPr lang="en-US" sz="1200" dirty="0" err="1">
+                <a:solidFill>
+                  <a:srgbClr val="CADCFC"/>
+                </a:solidFill>
+                <a:latin typeface="Calibri"/>
+                <a:ea typeface="Calibri"/>
+                <a:cs typeface="Calibri"/>
+              </a:rPr>
+              <a:t>remuneração</a:t>
+            </a:r>
+            <a:r>
+              <a:rPr lang="en-US" sz="1200" dirty="0">
+                <a:solidFill>
+                  <a:srgbClr val="CADCFC"/>
+                </a:solidFill>
+                <a:latin typeface="Calibri"/>
+                <a:ea typeface="Calibri"/>
+                <a:cs typeface="Calibri"/>
+              </a:rPr>
+              <a:t> · 2020–2026</a:t>
+            </a:r>
+          </a:p>
+          <a:p>
+            <a:endParaRPr lang="en-US" sz="1200" dirty="0">
+              <a:solidFill>
+                <a:srgbClr val="CADCFC"/>
+              </a:solidFill>
+              <a:ea typeface="Calibri"/>
+              <a:cs typeface="Calibri"/>
+            </a:endParaRPr>
           </a:p>
         </p:txBody>
       </p:sp>
@@ -2610,7 +2622,7 @@
           <a:bodyPr wrap="square" lIns="0" tIns="0" rIns="0" bIns="0" rtlCol="0" anchor="ctr"/>
           <a:lstStyle/>
           <a:p>
-            <a:pPr algn="l" indent="0" marL="0">
+            <a:pPr marL="0" indent="0" algn="l">
               <a:buNone/>
             </a:pPr>
             <a:r>
@@ -2649,7 +2661,7 @@
           <a:bodyPr wrap="square" lIns="0" tIns="0" rIns="0" bIns="0" rtlCol="0" anchor="ctr"/>
           <a:lstStyle/>
           <a:p>
-            <a:pPr algn="r" indent="0" marL="0">
+            <a:pPr marL="0" indent="0" algn="r">
               <a:buNone/>
             </a:pPr>
             <a:r>
@@ -2664,6 +2676,78 @@
               <a:t>1</a:t>
             </a:r>
             <a:endParaRPr lang="en-US" sz="900" dirty="0"/>
+          </a:p>
+        </p:txBody>
+      </p:sp>
+      <p:sp>
+        <p:nvSpPr>
+          <p:cNvPr id="11" name="Text 6">
+            <a:extLst>
+              <a:ext uri="{FF2B5EF4-FFF2-40B4-BE49-F238E27FC236}">
+                <a16:creationId xmlns:a16="http://schemas.microsoft.com/office/drawing/2014/main" id="{F1645D27-EE06-6C75-B89A-59CFC31327C6}"/>
+              </a:ext>
+            </a:extLst>
+          </p:cNvPr>
+          <p:cNvSpPr/>
+          <p:nvPr/>
+        </p:nvSpPr>
+        <p:spPr>
+          <a:xfrm>
+            <a:off x="640080" y="4940104"/>
+            <a:ext cx="7315200" cy="277838"/>
+          </a:xfrm>
+          <a:prstGeom prst="rect">
+            <a:avLst/>
+          </a:prstGeom>
+          <a:noFill/>
+          <a:ln/>
+        </p:spPr>
+        <p:txBody>
+          <a:bodyPr wrap="square" lIns="0" tIns="0" rIns="0" bIns="0" rtlCol="0" anchor="ctr"/>
+          <a:lstStyle/>
+          <a:p>
+            <a:r>
+              <a:rPr lang="en-US" sz="1200" dirty="0">
+                <a:solidFill>
+                  <a:srgbClr val="CADCFC"/>
+                </a:solidFill>
+                <a:latin typeface="Calibri"/>
+                <a:ea typeface="Calibri"/>
+                <a:cs typeface="Calibri"/>
+              </a:rPr>
+              <a:t>Gabriel Casagrande, Guilherme Carrer, Pedro Canto e Filipe </a:t>
+            </a:r>
+            <a:r>
+              <a:rPr lang="en-US" sz="1200" dirty="0" err="1">
+                <a:solidFill>
+                  <a:srgbClr val="CADCFC"/>
+                </a:solidFill>
+                <a:latin typeface="Calibri"/>
+                <a:ea typeface="Calibri"/>
+                <a:cs typeface="Calibri"/>
+              </a:rPr>
+              <a:t>Guizzo</a:t>
+            </a:r>
+            <a:r>
+              <a:rPr lang="en-US" sz="1200" dirty="0">
+                <a:solidFill>
+                  <a:srgbClr val="CADCFC"/>
+                </a:solidFill>
+                <a:latin typeface="Calibri"/>
+                <a:ea typeface="Calibri"/>
+                <a:cs typeface="Calibri"/>
+              </a:rPr>
+              <a:t> </a:t>
+            </a:r>
+          </a:p>
+          <a:p>
+            <a:endParaRPr lang="en-US" sz="1200" dirty="0">
+              <a:solidFill>
+                <a:srgbClr val="CADCFC"/>
+              </a:solidFill>
+              <a:ea typeface="Calibri"/>
+              <a:cs typeface="Calibri"/>
+            </a:endParaRPr>
           </a:p>
         </p:txBody>
       </p:sp>
@@ -2683,6 +2767,7 @@
         <a:solidFill>
           <a:srgbClr val="FFFFFF"/>
         </a:solidFill>
+        <a:effectLst/>
       </p:bgPr>
     </p:bg>
     <p:spTree>
@@ -2720,11 +2805,11 @@
           <a:bodyPr wrap="square" lIns="0" tIns="0" rIns="0" bIns="0" rtlCol="0" anchor="ctr"/>
           <a:lstStyle/>
           <a:p>
-            <a:pPr indent="0" marL="0">
-              <a:buNone/>
-            </a:pPr>
-            <a:r>
-              <a:rPr lang="en-US" sz="1300" b="1" spc="200" kern="0" dirty="0">
+            <a:pPr marL="0" indent="0">
+              <a:buNone/>
+            </a:pPr>
+            <a:r>
+              <a:rPr lang="en-US" sz="1300" b="1" kern="0" spc="200" dirty="0">
                 <a:solidFill>
                   <a:srgbClr val="1E2761"/>
                 </a:solidFill>
@@ -2759,7 +2844,7 @@
           <a:bodyPr wrap="square" lIns="0" tIns="0" rIns="0" bIns="0" rtlCol="0" anchor="ctr"/>
           <a:lstStyle/>
           <a:p>
-            <a:pPr indent="0" marL="0">
+            <a:pPr marL="0" indent="0">
               <a:buNone/>
             </a:pPr>
             <a:r>
@@ -2820,11 +2905,11 @@
           <a:bodyPr wrap="square" lIns="0" tIns="0" rIns="0" bIns="0" rtlCol="0" anchor="ctr"/>
           <a:lstStyle/>
           <a:p>
-            <a:pPr indent="0" marL="0">
-              <a:buNone/>
-            </a:pPr>
-            <a:r>
-              <a:rPr lang="en-US" sz="1100" b="1" spc="100" kern="0" dirty="0">
+            <a:pPr marL="0" indent="0">
+              <a:buNone/>
+            </a:pPr>
+            <a:r>
+              <a:rPr lang="en-US" sz="1100" b="1" kern="0" spc="100" dirty="0">
                 <a:solidFill>
                   <a:srgbClr val="64748B"/>
                 </a:solidFill>
@@ -2859,7 +2944,7 @@
           <a:bodyPr wrap="square" lIns="0" tIns="0" rIns="0" bIns="0" rtlCol="0" anchor="ctr"/>
           <a:lstStyle/>
           <a:p>
-            <a:pPr indent="0" marL="0">
+            <a:pPr marL="0" indent="0">
               <a:buNone/>
             </a:pPr>
             <a:r>
@@ -2898,7 +2983,7 @@
           <a:bodyPr wrap="square" lIns="0" tIns="0" rIns="0" bIns="0" rtlCol="0" anchor="ctr"/>
           <a:lstStyle/>
           <a:p>
-            <a:pPr indent="0" marL="0">
+            <a:pPr marL="0" indent="0">
               <a:buNone/>
             </a:pPr>
             <a:r>
@@ -2937,7 +3022,7 @@
           <a:bodyPr wrap="square" lIns="0" tIns="0" rIns="0" bIns="0" rtlCol="0" anchor="ctr"/>
           <a:lstStyle/>
           <a:p>
-            <a:pPr indent="0" marL="0">
+            <a:pPr marL="0" indent="0">
               <a:buNone/>
             </a:pPr>
             <a:r>
@@ -2998,11 +3083,11 @@
           <a:bodyPr wrap="square" lIns="0" tIns="0" rIns="0" bIns="0" rtlCol="0" anchor="ctr"/>
           <a:lstStyle/>
           <a:p>
-            <a:pPr indent="0" marL="0">
-              <a:buNone/>
-            </a:pPr>
-            <a:r>
-              <a:rPr lang="en-US" sz="1100" b="1" spc="100" kern="0" dirty="0">
+            <a:pPr marL="0" indent="0">
+              <a:buNone/>
+            </a:pPr>
+            <a:r>
+              <a:rPr lang="en-US" sz="1100" b="1" kern="0" spc="100" dirty="0">
                 <a:solidFill>
                   <a:srgbClr val="64748B"/>
                 </a:solidFill>
@@ -3037,7 +3122,7 @@
           <a:bodyPr wrap="square" lIns="0" tIns="0" rIns="0" bIns="0" rtlCol="0" anchor="ctr"/>
           <a:lstStyle/>
           <a:p>
-            <a:pPr indent="0" marL="0">
+            <a:pPr marL="0" indent="0">
               <a:buNone/>
             </a:pPr>
             <a:r>
@@ -3076,7 +3161,7 @@
           <a:bodyPr wrap="square" lIns="0" tIns="0" rIns="0" bIns="0" rtlCol="0" anchor="ctr"/>
           <a:lstStyle/>
           <a:p>
-            <a:pPr indent="0" marL="0">
+            <a:pPr marL="0" indent="0">
               <a:buNone/>
             </a:pPr>
             <a:r>
@@ -3115,7 +3200,7 @@
           <a:bodyPr wrap="square" lIns="0" tIns="0" rIns="0" bIns="0" rtlCol="0" anchor="ctr"/>
           <a:lstStyle/>
           <a:p>
-            <a:pPr indent="0" marL="0">
+            <a:pPr marL="0" indent="0">
               <a:buNone/>
             </a:pPr>
             <a:r>
@@ -3154,7 +3239,7 @@
           </a:solidFill>
           <a:ln/>
           <a:effectLst>
-            <a:outerShdw sx="100000" sy="100000" kx="0" ky="0" algn="bl" rotWithShape="0" blurRad="101600" dist="38100" dir="5400000">
+            <a:outerShdw blurRad="101600" dist="38100" dir="5400000" algn="bl" rotWithShape="0">
               <a:srgbClr val="000000">
                 <a:alpha val="12000"/>
               </a:srgbClr>
@@ -3183,11 +3268,11 @@
           <a:bodyPr wrap="square" lIns="0" tIns="0" rIns="0" bIns="0" rtlCol="0" anchor="ctr"/>
           <a:lstStyle/>
           <a:p>
-            <a:pPr indent="0" marL="0">
-              <a:buNone/>
-            </a:pPr>
-            <a:r>
-              <a:rPr lang="en-US" sz="1100" b="1" spc="100" kern="0" dirty="0">
+            <a:pPr marL="0" indent="0">
+              <a:buNone/>
+            </a:pPr>
+            <a:r>
+              <a:rPr lang="en-US" sz="1100" b="1" kern="0" spc="100" dirty="0">
                 <a:solidFill>
                   <a:srgbClr val="D4AF37"/>
                 </a:solidFill>
@@ -3222,7 +3307,7 @@
           <a:bodyPr wrap="square" lIns="0" tIns="0" rIns="0" bIns="0" rtlCol="0" anchor="ctr"/>
           <a:lstStyle/>
           <a:p>
-            <a:pPr indent="0" marL="0">
+            <a:pPr marL="0" indent="0">
               <a:buNone/>
             </a:pPr>
             <a:r>
@@ -3261,7 +3346,7 @@
           <a:bodyPr wrap="square" lIns="0" tIns="0" rIns="0" bIns="0" rtlCol="0" anchor="ctr"/>
           <a:lstStyle/>
           <a:p>
-            <a:pPr indent="0" marL="0">
+            <a:pPr marL="0" indent="0">
               <a:buNone/>
             </a:pPr>
             <a:r>
@@ -3300,7 +3385,7 @@
           <a:bodyPr wrap="square" lIns="0" tIns="0" rIns="0" bIns="0" rtlCol="0" anchor="ctr"/>
           <a:lstStyle/>
           <a:p>
-            <a:pPr indent="0" marL="0">
+            <a:pPr marL="0" indent="0">
               <a:buNone/>
             </a:pPr>
             <a:r>
@@ -3361,11 +3446,11 @@
           <a:bodyPr wrap="square" lIns="0" tIns="0" rIns="0" bIns="0" rtlCol="0" anchor="ctr"/>
           <a:lstStyle/>
           <a:p>
-            <a:pPr indent="0" marL="0">
-              <a:buNone/>
-            </a:pPr>
-            <a:r>
-              <a:rPr lang="en-US" sz="1100" b="1" spc="100" kern="0" dirty="0">
+            <a:pPr marL="0" indent="0">
+              <a:buNone/>
+            </a:pPr>
+            <a:r>
+              <a:rPr lang="en-US" sz="1100" b="1" kern="0" spc="100" dirty="0">
                 <a:solidFill>
                   <a:srgbClr val="64748B"/>
                 </a:solidFill>
@@ -3400,7 +3485,7 @@
           <a:bodyPr wrap="square" lIns="0" tIns="0" rIns="0" bIns="0" rtlCol="0" anchor="ctr"/>
           <a:lstStyle/>
           <a:p>
-            <a:pPr indent="0" marL="0">
+            <a:pPr marL="0" indent="0">
               <a:buNone/>
             </a:pPr>
             <a:r>
@@ -3439,7 +3524,7 @@
           <a:bodyPr wrap="square" lIns="0" tIns="0" rIns="0" bIns="0" rtlCol="0" anchor="ctr"/>
           <a:lstStyle/>
           <a:p>
-            <a:pPr indent="0" marL="0">
+            <a:pPr marL="0" indent="0">
               <a:buNone/>
             </a:pPr>
             <a:r>
@@ -3478,7 +3563,7 @@
           <a:bodyPr wrap="square" lIns="0" tIns="0" rIns="0" bIns="0" rtlCol="0" anchor="ctr"/>
           <a:lstStyle/>
           <a:p>
-            <a:pPr indent="0" marL="0">
+            <a:pPr marL="0" indent="0">
               <a:buNone/>
             </a:pPr>
             <a:r>
@@ -3540,14 +3625,14 @@
       </p:sp>
       <p:pic>
         <p:nvPicPr>
-          <p:cNvPr id="26" name="Image 0" descr="assets/icon_balance_navy.png">    </p:cNvPr>
+          <p:cNvPr id="26" name="Image 0" descr="assets/icon_balance_navy.png"/>
           <p:cNvPicPr>
             <a:picLocks noChangeAspect="1"/>
           </p:cNvPicPr>
           <p:nvPr/>
         </p:nvPicPr>
         <p:blipFill>
-          <a:blip r:embed="rId1"/>
+          <a:blip r:embed="rId3"/>
           <a:stretch>
             <a:fillRect/>
           </a:stretch>
@@ -3583,11 +3668,11 @@
           <a:bodyPr wrap="square" lIns="0" tIns="0" rIns="0" bIns="0" rtlCol="0" anchor="ctr"/>
           <a:lstStyle/>
           <a:p>
-            <a:pPr indent="0" marL="0">
-              <a:buNone/>
-            </a:pPr>
-            <a:r>
-              <a:rPr lang="en-US" sz="1100" b="1" spc="50" kern="0" dirty="0">
+            <a:pPr marL="0" indent="0">
+              <a:buNone/>
+            </a:pPr>
+            <a:r>
+              <a:rPr lang="en-US" sz="1100" b="1" kern="0" spc="50" dirty="0">
                 <a:solidFill>
                   <a:srgbClr val="64748B"/>
                 </a:solidFill>
@@ -3622,7 +3707,7 @@
           <a:bodyPr wrap="square" lIns="0" tIns="0" rIns="0" bIns="0" rtlCol="0" anchor="ctr"/>
           <a:lstStyle/>
           <a:p>
-            <a:pPr indent="0" marL="0">
+            <a:pPr marL="0" indent="0">
               <a:buNone/>
             </a:pPr>
             <a:r>
@@ -3661,7 +3746,7 @@
           <a:bodyPr wrap="square" lIns="0" tIns="0" rIns="0" bIns="0" rtlCol="0" anchor="ctr"/>
           <a:lstStyle/>
           <a:p>
-            <a:pPr indent="0" marL="0">
+            <a:pPr marL="0" indent="0">
               <a:lnSpc>
                 <a:spcPct val="120000"/>
               </a:lnSpc>
@@ -3725,11 +3810,11 @@
           <a:bodyPr wrap="square" lIns="0" tIns="0" rIns="0" bIns="0" rtlCol="0" anchor="ctr"/>
           <a:lstStyle/>
           <a:p>
-            <a:pPr indent="0" marL="0">
-              <a:buNone/>
-            </a:pPr>
-            <a:r>
-              <a:rPr lang="en-US" sz="1100" b="1" spc="100" kern="0" dirty="0">
+            <a:pPr marL="0" indent="0">
+              <a:buNone/>
+            </a:pPr>
+            <a:r>
+              <a:rPr lang="en-US" sz="1100" b="1" kern="0" spc="100" dirty="0">
                 <a:solidFill>
                   <a:srgbClr val="D4AF37"/>
                 </a:solidFill>
@@ -3764,7 +3849,7 @@
           <a:bodyPr wrap="square" lIns="0" tIns="0" rIns="0" bIns="0" rtlCol="0" anchor="t"/>
           <a:lstStyle/>
           <a:p>
-            <a:pPr indent="0" marL="0">
+            <a:pPr marL="0" indent="0">
               <a:lnSpc>
                 <a:spcPct val="125000"/>
               </a:lnSpc>
@@ -3806,7 +3891,7 @@
           <a:bodyPr wrap="square" lIns="0" tIns="0" rIns="0" bIns="0" rtlCol="0" anchor="ctr"/>
           <a:lstStyle/>
           <a:p>
-            <a:pPr algn="l" indent="0" marL="0">
+            <a:pPr marL="0" indent="0" algn="l">
               <a:buNone/>
             </a:pPr>
             <a:r>
@@ -3845,7 +3930,7 @@
           <a:bodyPr wrap="square" lIns="0" tIns="0" rIns="0" bIns="0" rtlCol="0" anchor="ctr"/>
           <a:lstStyle/>
           <a:p>
-            <a:pPr algn="r" indent="0" marL="0">
+            <a:pPr marL="0" indent="0" algn="r">
               <a:buNone/>
             </a:pPr>
             <a:r>
@@ -3879,6 +3964,7 @@
         <a:solidFill>
           <a:srgbClr val="151B4A"/>
         </a:solidFill>
+        <a:effectLst/>
       </p:bgPr>
     </p:bg>
     <p:spTree>
@@ -3916,11 +4002,11 @@
           <a:bodyPr wrap="square" lIns="0" tIns="0" rIns="0" bIns="0" rtlCol="0" anchor="ctr"/>
           <a:lstStyle/>
           <a:p>
-            <a:pPr indent="0" marL="0">
-              <a:buNone/>
-            </a:pPr>
-            <a:r>
-              <a:rPr lang="en-US" sz="1300" b="1" spc="200" kern="0" dirty="0">
+            <a:pPr marL="0" indent="0">
+              <a:buNone/>
+            </a:pPr>
+            <a:r>
+              <a:rPr lang="en-US" sz="1300" b="1" kern="0" spc="200" dirty="0">
                 <a:solidFill>
                   <a:srgbClr val="D4AF37"/>
                 </a:solidFill>
@@ -3955,7 +4041,7 @@
           <a:bodyPr wrap="square" lIns="0" tIns="0" rIns="0" bIns="0" rtlCol="0" anchor="ctr"/>
           <a:lstStyle/>
           <a:p>
-            <a:pPr indent="0" marL="0">
+            <a:pPr marL="0" indent="0">
               <a:buNone/>
             </a:pPr>
             <a:r>
@@ -4017,307 +4103,7 @@
       </p:sp>
       <p:pic>
         <p:nvPicPr>
-          <p:cNvPr id="6" name="Image 0" descr="assets/icon_balance.png">    </p:cNvPr>
-          <p:cNvPicPr>
-            <a:picLocks noChangeAspect="1"/>
-          </p:cNvPicPr>
-          <p:nvPr/>
-        </p:nvPicPr>
-        <p:blipFill>
-          <a:blip r:embed="rId1"/>
-          <a:stretch>
-            <a:fillRect/>
-          </a:stretch>
-        </p:blipFill>
-        <p:spPr>
-          <a:xfrm>
-            <a:off x="977494" y="2029054"/>
-            <a:ext cx="285293" cy="285293"/>
-          </a:xfrm>
-          <a:prstGeom prst="rect">
-            <a:avLst/>
-          </a:prstGeom>
-        </p:spPr>
-      </p:pic>
-      <p:sp>
-        <p:nvSpPr>
-          <p:cNvPr id="7" name="Text 4"/>
-          <p:cNvSpPr/>
-          <p:nvPr/>
-        </p:nvSpPr>
-        <p:spPr>
-          <a:xfrm>
-            <a:off x="822960" y="2606040"/>
-            <a:ext cx="2971800" cy="594360"/>
-          </a:xfrm>
-          <a:prstGeom prst="rect">
-            <a:avLst/>
-          </a:prstGeom>
-          <a:noFill/>
-          <a:ln/>
-        </p:spPr>
-        <p:txBody>
-          <a:bodyPr wrap="square" lIns="0" tIns="0" rIns="0" bIns="0" rtlCol="0" anchor="ctr"/>
-          <a:lstStyle/>
-          <a:p>
-            <a:pPr indent="0" marL="0">
-              <a:lnSpc>
-                <a:spcPct val="110000"/>
-              </a:lnSpc>
-              <a:buNone/>
-            </a:pPr>
-            <a:r>
-              <a:rPr lang="en-US" sz="1450" b="1" dirty="0">
-                <a:solidFill>
-                  <a:srgbClr val="FFFFFF"/>
-                </a:solidFill>
-                <a:latin typeface="Calibri" pitchFamily="34" charset="0"/>
-                <a:ea typeface="Calibri" pitchFamily="34" charset="-122"/>
-                <a:cs typeface="Calibri" pitchFamily="34" charset="-120"/>
-              </a:rPr>
-              <a:t>Normalidade estatística ≠ qualidade do dado</a:t>
-            </a:r>
-            <a:endParaRPr lang="en-US" sz="1450" dirty="0"/>
-          </a:p>
-        </p:txBody>
-      </p:sp>
-      <p:sp>
-        <p:nvSpPr>
-          <p:cNvPr id="8" name="Text 5"/>
-          <p:cNvSpPr/>
-          <p:nvPr/>
-        </p:nvSpPr>
-        <p:spPr>
-          <a:xfrm>
-            <a:off x="822960" y="3200400"/>
-            <a:ext cx="2971800" cy="640080"/>
-          </a:xfrm>
-          <a:prstGeom prst="rect">
-            <a:avLst/>
-          </a:prstGeom>
-          <a:noFill/>
-          <a:ln/>
-        </p:spPr>
-        <p:txBody>
-          <a:bodyPr wrap="square" lIns="0" tIns="0" rIns="0" bIns="0" rtlCol="0" anchor="ctr"/>
-          <a:lstStyle/>
-          <a:p>
-            <a:pPr indent="0" marL="0">
-              <a:lnSpc>
-                <a:spcPct val="120000"/>
-              </a:lnSpc>
-              <a:buNone/>
-            </a:pPr>
-            <a:r>
-              <a:rPr lang="en-US" sz="1100" dirty="0">
-                <a:solidFill>
-                  <a:srgbClr val="CADCFC"/>
-                </a:solidFill>
-                <a:latin typeface="Calibri" pitchFamily="34" charset="0"/>
-                <a:ea typeface="Calibri" pitchFamily="34" charset="-122"/>
-                <a:cs typeface="Calibri" pitchFamily="34" charset="-120"/>
-              </a:rPr>
-              <a:t>Com bases grandes, testes formais (KS, Shapiro) tendem a rejeitar H₀ mesmo quando a forma da distribuição já é praticamente normal.</a:t>
-            </a:r>
-            <a:endParaRPr lang="en-US" sz="1100" dirty="0"/>
-          </a:p>
-        </p:txBody>
-      </p:sp>
-      <p:sp>
-        <p:nvSpPr>
-          <p:cNvPr id="9" name="Shape 6"/>
-          <p:cNvSpPr/>
-          <p:nvPr/>
-        </p:nvSpPr>
-        <p:spPr>
-          <a:xfrm>
-            <a:off x="4297680" y="1600200"/>
-            <a:ext cx="3520440" cy="2286000"/>
-          </a:xfrm>
-          <a:prstGeom prst="roundRect">
-            <a:avLst>
-              <a:gd name="adj" fmla="val 3200"/>
-            </a:avLst>
-          </a:prstGeom>
-          <a:solidFill>
-            <a:srgbClr val="1E2761"/>
-          </a:solidFill>
-          <a:ln/>
-        </p:spPr>
-      </p:sp>
-      <p:sp>
-        <p:nvSpPr>
-          <p:cNvPr id="10" name="Shape 7"/>
-          <p:cNvSpPr/>
-          <p:nvPr/>
-        </p:nvSpPr>
-        <p:spPr>
-          <a:xfrm>
-            <a:off x="4572000" y="1874520"/>
-            <a:ext cx="594360" cy="594360"/>
-          </a:xfrm>
-          <a:prstGeom prst="ellipse">
-            <a:avLst/>
-          </a:prstGeom>
-          <a:solidFill>
-            <a:srgbClr val="D4AF37"/>
-          </a:solidFill>
-          <a:ln/>
-        </p:spPr>
-      </p:sp>
-      <p:pic>
-        <p:nvPicPr>
-          <p:cNvPr id="11" name="Image 1" descr="assets/icon_calc.png">    </p:cNvPr>
-          <p:cNvPicPr>
-            <a:picLocks noChangeAspect="1"/>
-          </p:cNvPicPr>
-          <p:nvPr/>
-        </p:nvPicPr>
-        <p:blipFill>
-          <a:blip r:embed="rId2"/>
-          <a:stretch>
-            <a:fillRect/>
-          </a:stretch>
-        </p:blipFill>
-        <p:spPr>
-          <a:xfrm>
-            <a:off x="4726534" y="2029054"/>
-            <a:ext cx="285293" cy="285293"/>
-          </a:xfrm>
-          <a:prstGeom prst="rect">
-            <a:avLst/>
-          </a:prstGeom>
-        </p:spPr>
-      </p:pic>
-      <p:sp>
-        <p:nvSpPr>
-          <p:cNvPr id="12" name="Text 8"/>
-          <p:cNvSpPr/>
-          <p:nvPr/>
-        </p:nvSpPr>
-        <p:spPr>
-          <a:xfrm>
-            <a:off x="4572000" y="2606040"/>
-            <a:ext cx="2971800" cy="594360"/>
-          </a:xfrm>
-          <a:prstGeom prst="rect">
-            <a:avLst/>
-          </a:prstGeom>
-          <a:noFill/>
-          <a:ln/>
-        </p:spPr>
-        <p:txBody>
-          <a:bodyPr wrap="square" lIns="0" tIns="0" rIns="0" bIns="0" rtlCol="0" anchor="ctr"/>
-          <a:lstStyle/>
-          <a:p>
-            <a:pPr indent="0" marL="0">
-              <a:lnSpc>
-                <a:spcPct val="110000"/>
-              </a:lnSpc>
-              <a:buNone/>
-            </a:pPr>
-            <a:r>
-              <a:rPr lang="en-US" sz="1450" b="1" dirty="0">
-                <a:solidFill>
-                  <a:srgbClr val="FFFFFF"/>
-                </a:solidFill>
-                <a:latin typeface="Calibri" pitchFamily="34" charset="0"/>
-                <a:ea typeface="Calibri" pitchFamily="34" charset="-122"/>
-                <a:cs typeface="Calibri" pitchFamily="34" charset="-120"/>
-              </a:rPr>
-              <a:t>Box-Cox reduziu a assimetria em 98%</a:t>
-            </a:r>
-            <a:endParaRPr lang="en-US" sz="1450" dirty="0"/>
-          </a:p>
-        </p:txBody>
-      </p:sp>
-      <p:sp>
-        <p:nvSpPr>
-          <p:cNvPr id="13" name="Text 9"/>
-          <p:cNvSpPr/>
-          <p:nvPr/>
-        </p:nvSpPr>
-        <p:spPr>
-          <a:xfrm>
-            <a:off x="4572000" y="3200400"/>
-            <a:ext cx="2971800" cy="640080"/>
-          </a:xfrm>
-          <a:prstGeom prst="rect">
-            <a:avLst/>
-          </a:prstGeom>
-          <a:noFill/>
-          <a:ln/>
-        </p:spPr>
-        <p:txBody>
-          <a:bodyPr wrap="square" lIns="0" tIns="0" rIns="0" bIns="0" rtlCol="0" anchor="ctr"/>
-          <a:lstStyle/>
-          <a:p>
-            <a:pPr indent="0" marL="0">
-              <a:lnSpc>
-                <a:spcPct val="120000"/>
-              </a:lnSpc>
-              <a:buNone/>
-            </a:pPr>
-            <a:r>
-              <a:rPr lang="en-US" sz="1100" dirty="0">
-                <a:solidFill>
-                  <a:srgbClr val="CADCFC"/>
-                </a:solidFill>
-                <a:latin typeface="Calibri" pitchFamily="34" charset="0"/>
-                <a:ea typeface="Calibri" pitchFamily="34" charset="-122"/>
-                <a:cs typeface="Calibri" pitchFamily="34" charset="-120"/>
-              </a:rPr>
-              <a:t>De 4,07 para -0,09 — prova que a transformação foi tecnicamente bem-sucedida, mesmo sem 'aprovar' o teste de hipótese.</a:t>
-            </a:r>
-            <a:endParaRPr lang="en-US" sz="1100" dirty="0"/>
-          </a:p>
-        </p:txBody>
-      </p:sp>
-      <p:sp>
-        <p:nvSpPr>
-          <p:cNvPr id="14" name="Shape 10"/>
-          <p:cNvSpPr/>
-          <p:nvPr/>
-        </p:nvSpPr>
-        <p:spPr>
-          <a:xfrm>
-            <a:off x="8046720" y="1600200"/>
-            <a:ext cx="3520440" cy="2286000"/>
-          </a:xfrm>
-          <a:prstGeom prst="roundRect">
-            <a:avLst>
-              <a:gd name="adj" fmla="val 3200"/>
-            </a:avLst>
-          </a:prstGeom>
-          <a:solidFill>
-            <a:srgbClr val="1E2761"/>
-          </a:solidFill>
-          <a:ln/>
-        </p:spPr>
-      </p:sp>
-      <p:sp>
-        <p:nvSpPr>
-          <p:cNvPr id="15" name="Shape 11"/>
-          <p:cNvSpPr/>
-          <p:nvPr/>
-        </p:nvSpPr>
-        <p:spPr>
-          <a:xfrm>
-            <a:off x="8321040" y="1874520"/>
-            <a:ext cx="594360" cy="594360"/>
-          </a:xfrm>
-          <a:prstGeom prst="ellipse">
-            <a:avLst/>
-          </a:prstGeom>
-          <a:solidFill>
-            <a:srgbClr val="D4AF37"/>
-          </a:solidFill>
-          <a:ln/>
-        </p:spPr>
-      </p:sp>
-      <p:pic>
-        <p:nvPicPr>
-          <p:cNvPr id="16" name="Image 2" descr="assets/icon_chart.png">    </p:cNvPr>
+          <p:cNvPr id="6" name="Image 0" descr="assets/icon_balance.png"/>
           <p:cNvPicPr>
             <a:picLocks noChangeAspect="1"/>
           </p:cNvPicPr>
@@ -4331,7 +4117,7 @@
         </p:blipFill>
         <p:spPr>
           <a:xfrm>
-            <a:off x="8475574" y="2029054"/>
+            <a:off x="977494" y="2029054"/>
             <a:ext cx="285293" cy="285293"/>
           </a:xfrm>
           <a:prstGeom prst="rect">
@@ -4341,13 +4127,13 @@
       </p:pic>
       <p:sp>
         <p:nvSpPr>
-          <p:cNvPr id="17" name="Text 12"/>
-          <p:cNvSpPr/>
-          <p:nvPr/>
-        </p:nvSpPr>
-        <p:spPr>
-          <a:xfrm>
-            <a:off x="8321040" y="2606040"/>
+          <p:cNvPr id="7" name="Text 4"/>
+          <p:cNvSpPr/>
+          <p:nvPr/>
+        </p:nvSpPr>
+        <p:spPr>
+          <a:xfrm>
+            <a:off x="822960" y="2606040"/>
             <a:ext cx="2971800" cy="594360"/>
           </a:xfrm>
           <a:prstGeom prst="rect">
@@ -4360,7 +4146,7 @@
           <a:bodyPr wrap="square" lIns="0" tIns="0" rIns="0" bIns="0" rtlCol="0" anchor="ctr"/>
           <a:lstStyle/>
           <a:p>
-            <a:pPr indent="0" marL="0">
+            <a:pPr marL="0" indent="0">
               <a:lnSpc>
                 <a:spcPct val="110000"/>
               </a:lnSpc>
@@ -4375,7 +4161,7 @@
                 <a:ea typeface="Calibri" pitchFamily="34" charset="-122"/>
                 <a:cs typeface="Calibri" pitchFamily="34" charset="-120"/>
               </a:rPr>
-              <a:t>A desigualdade salarial é estrutural</a:t>
+              <a:t>Normalidade estatística ≠ qualidade do dado</a:t>
             </a:r>
             <a:endParaRPr lang="en-US" sz="1450" dirty="0"/>
           </a:p>
@@ -4383,13 +4169,13 @@
       </p:sp>
       <p:sp>
         <p:nvSpPr>
-          <p:cNvPr id="18" name="Text 13"/>
-          <p:cNvSpPr/>
-          <p:nvPr/>
-        </p:nvSpPr>
-        <p:spPr>
-          <a:xfrm>
-            <a:off x="8321040" y="3200400"/>
+          <p:cNvPr id="8" name="Text 5"/>
+          <p:cNvSpPr/>
+          <p:nvPr/>
+        </p:nvSpPr>
+        <p:spPr>
+          <a:xfrm>
+            <a:off x="822960" y="3200400"/>
             <a:ext cx="2971800" cy="640080"/>
           </a:xfrm>
           <a:prstGeom prst="rect">
@@ -4402,7 +4188,7 @@
           <a:bodyPr wrap="square" lIns="0" tIns="0" rIns="0" bIns="0" rtlCol="0" anchor="ctr"/>
           <a:lstStyle/>
           <a:p>
-            <a:pPr indent="0" marL="0">
+            <a:pPr marL="0" indent="0">
               <a:lnSpc>
                 <a:spcPct val="120000"/>
               </a:lnSpc>
@@ -4417,7 +4203,7 @@
                 <a:ea typeface="Calibri" pitchFamily="34" charset="-122"/>
                 <a:cs typeface="Calibri" pitchFamily="34" charset="-120"/>
               </a:rPr>
-              <a:t>Gini de 0,48 e concentração de 35% do gasto nos 10% mais bem remunerados não são outliers — são o padrão real da folha.</a:t>
+              <a:t>Com bases grandes, testes formais (KS, Shapiro) tendem a rejeitar H₀ mesmo quando a forma da distribuição já é praticamente normal.</a:t>
             </a:r>
             <a:endParaRPr lang="en-US" sz="1100" dirty="0"/>
           </a:p>
@@ -4425,88 +4211,49 @@
       </p:sp>
       <p:sp>
         <p:nvSpPr>
-          <p:cNvPr id="19" name="Shape 14"/>
-          <p:cNvSpPr/>
-          <p:nvPr/>
-        </p:nvSpPr>
-        <p:spPr>
-          <a:xfrm>
-            <a:off x="548640" y="4160520"/>
-            <a:ext cx="11064240" cy="2011680"/>
+          <p:cNvPr id="9" name="Shape 6"/>
+          <p:cNvSpPr/>
+          <p:nvPr/>
+        </p:nvSpPr>
+        <p:spPr>
+          <a:xfrm>
+            <a:off x="4297680" y="1600200"/>
+            <a:ext cx="3520440" cy="2286000"/>
           </a:xfrm>
           <a:prstGeom prst="roundRect">
             <a:avLst>
-              <a:gd name="adj" fmla="val 3636"/>
+              <a:gd name="adj" fmla="val 3200"/>
             </a:avLst>
           </a:prstGeom>
           <a:solidFill>
-            <a:srgbClr val="EEF3FC"/>
+            <a:srgbClr val="1E2761"/>
           </a:solidFill>
           <a:ln/>
         </p:spPr>
       </p:sp>
       <p:sp>
         <p:nvSpPr>
-          <p:cNvPr id="20" name="Text 15"/>
-          <p:cNvSpPr/>
-          <p:nvPr/>
-        </p:nvSpPr>
-        <p:spPr>
-          <a:xfrm>
-            <a:off x="868680" y="4315968"/>
-            <a:ext cx="10424160" cy="274320"/>
-          </a:xfrm>
-          <a:prstGeom prst="rect">
-            <a:avLst/>
-          </a:prstGeom>
-          <a:noFill/>
-          <a:ln/>
-        </p:spPr>
-        <p:txBody>
-          <a:bodyPr wrap="square" lIns="0" tIns="0" rIns="0" bIns="0" rtlCol="0" anchor="ctr"/>
-          <a:lstStyle/>
-          <a:p>
-            <a:pPr indent="0" marL="0">
-              <a:buNone/>
-            </a:pPr>
-            <a:r>
-              <a:rPr lang="en-US" sz="1200" b="1" spc="100" kern="0" dirty="0">
-                <a:solidFill>
-                  <a:srgbClr val="1E2761"/>
-                </a:solidFill>
-                <a:latin typeface="Calibri" pitchFamily="34" charset="0"/>
-                <a:ea typeface="Calibri" pitchFamily="34" charset="-122"/>
-                <a:cs typeface="Calibri" pitchFamily="34" charset="-120"/>
-              </a:rPr>
-              <a:t>SUGESTÕES AOS STAKEHOLDERS</a:t>
-            </a:r>
-            <a:endParaRPr lang="en-US" sz="1200" dirty="0"/>
-          </a:p>
-        </p:txBody>
-      </p:sp>
-      <p:sp>
-        <p:nvSpPr>
-          <p:cNvPr id="21" name="Shape 16"/>
-          <p:cNvSpPr/>
-          <p:nvPr/>
-        </p:nvSpPr>
-        <p:spPr>
-          <a:xfrm>
-            <a:off x="868680" y="4736592"/>
-            <a:ext cx="320040" cy="320040"/>
+          <p:cNvPr id="10" name="Shape 7"/>
+          <p:cNvSpPr/>
+          <p:nvPr/>
+        </p:nvSpPr>
+        <p:spPr>
+          <a:xfrm>
+            <a:off x="4572000" y="1874520"/>
+            <a:ext cx="594360" cy="594360"/>
           </a:xfrm>
           <a:prstGeom prst="ellipse">
             <a:avLst/>
           </a:prstGeom>
           <a:solidFill>
-            <a:srgbClr val="CADCFC"/>
+            <a:srgbClr val="D4AF37"/>
           </a:solidFill>
           <a:ln/>
         </p:spPr>
       </p:sp>
       <p:pic>
         <p:nvPicPr>
-          <p:cNvPr id="22" name="Image 3" descr="assets/icon_check_navy.png">    </p:cNvPr>
+          <p:cNvPr id="11" name="Image 1" descr="assets/icon_calc.png"/>
           <p:cNvPicPr>
             <a:picLocks noChangeAspect="1"/>
           </p:cNvPicPr>
@@ -4520,8 +4267,8 @@
         </p:blipFill>
         <p:spPr>
           <a:xfrm>
-            <a:off x="951890" y="4819802"/>
-            <a:ext cx="153619" cy="153619"/>
+            <a:off x="4726534" y="2029054"/>
+            <a:ext cx="285293" cy="285293"/>
           </a:xfrm>
           <a:prstGeom prst="rect">
             <a:avLst/>
@@ -4530,66 +4277,133 @@
       </p:pic>
       <p:sp>
         <p:nvSpPr>
-          <p:cNvPr id="23" name="Text 17"/>
-          <p:cNvSpPr/>
-          <p:nvPr/>
-        </p:nvSpPr>
-        <p:spPr>
-          <a:xfrm>
-            <a:off x="1325880" y="4690872"/>
-            <a:ext cx="10058400" cy="411480"/>
-          </a:xfrm>
-          <a:prstGeom prst="rect">
-            <a:avLst/>
-          </a:prstGeom>
-          <a:noFill/>
-          <a:ln/>
-        </p:spPr>
-        <p:txBody>
-          <a:bodyPr wrap="square" lIns="0" tIns="0" rIns="0" bIns="0" rtlCol="0" anchor="ctr"/>
-          <a:lstStyle/>
-          <a:p>
-            <a:pPr indent="0" marL="0">
-              <a:buNone/>
-            </a:pPr>
-            <a:r>
-              <a:rPr lang="en-US" sz="1250" dirty="0">
-                <a:solidFill>
-                  <a:srgbClr val="1E293B"/>
-                </a:solidFill>
-                <a:latin typeface="Calibri" pitchFamily="34" charset="0"/>
-                <a:ea typeface="Calibri" pitchFamily="34" charset="-122"/>
-                <a:cs typeface="Calibri" pitchFamily="34" charset="-120"/>
-              </a:rPr>
-              <a:t>Usar o índice de Gini como métrica anual de acompanhamento da equidade salarial interna</a:t>
-            </a:r>
-            <a:endParaRPr lang="en-US" sz="1250" dirty="0"/>
-          </a:p>
-        </p:txBody>
-      </p:sp>
-      <p:sp>
-        <p:nvSpPr>
-          <p:cNvPr id="24" name="Shape 18"/>
-          <p:cNvSpPr/>
-          <p:nvPr/>
-        </p:nvSpPr>
-        <p:spPr>
-          <a:xfrm>
-            <a:off x="868680" y="5193792"/>
-            <a:ext cx="320040" cy="320040"/>
+          <p:cNvPr id="12" name="Text 8"/>
+          <p:cNvSpPr/>
+          <p:nvPr/>
+        </p:nvSpPr>
+        <p:spPr>
+          <a:xfrm>
+            <a:off x="4572000" y="2606040"/>
+            <a:ext cx="2971800" cy="594360"/>
+          </a:xfrm>
+          <a:prstGeom prst="rect">
+            <a:avLst/>
+          </a:prstGeom>
+          <a:noFill/>
+          <a:ln/>
+        </p:spPr>
+        <p:txBody>
+          <a:bodyPr wrap="square" lIns="0" tIns="0" rIns="0" bIns="0" rtlCol="0" anchor="ctr"/>
+          <a:lstStyle/>
+          <a:p>
+            <a:pPr marL="0" indent="0">
+              <a:lnSpc>
+                <a:spcPct val="110000"/>
+              </a:lnSpc>
+              <a:buNone/>
+            </a:pPr>
+            <a:r>
+              <a:rPr lang="en-US" sz="1450" b="1" dirty="0">
+                <a:solidFill>
+                  <a:srgbClr val="FFFFFF"/>
+                </a:solidFill>
+                <a:latin typeface="Calibri" pitchFamily="34" charset="0"/>
+                <a:ea typeface="Calibri" pitchFamily="34" charset="-122"/>
+                <a:cs typeface="Calibri" pitchFamily="34" charset="-120"/>
+              </a:rPr>
+              <a:t>Box-Cox reduziu a assimetria em 98%</a:t>
+            </a:r>
+            <a:endParaRPr lang="en-US" sz="1450" dirty="0"/>
+          </a:p>
+        </p:txBody>
+      </p:sp>
+      <p:sp>
+        <p:nvSpPr>
+          <p:cNvPr id="13" name="Text 9"/>
+          <p:cNvSpPr/>
+          <p:nvPr/>
+        </p:nvSpPr>
+        <p:spPr>
+          <a:xfrm>
+            <a:off x="4572000" y="3200400"/>
+            <a:ext cx="2971800" cy="640080"/>
+          </a:xfrm>
+          <a:prstGeom prst="rect">
+            <a:avLst/>
+          </a:prstGeom>
+          <a:noFill/>
+          <a:ln/>
+        </p:spPr>
+        <p:txBody>
+          <a:bodyPr wrap="square" lIns="0" tIns="0" rIns="0" bIns="0" rtlCol="0" anchor="ctr"/>
+          <a:lstStyle/>
+          <a:p>
+            <a:pPr marL="0" indent="0">
+              <a:lnSpc>
+                <a:spcPct val="120000"/>
+              </a:lnSpc>
+              <a:buNone/>
+            </a:pPr>
+            <a:r>
+              <a:rPr lang="en-US" sz="1100" dirty="0">
+                <a:solidFill>
+                  <a:srgbClr val="CADCFC"/>
+                </a:solidFill>
+                <a:latin typeface="Calibri" pitchFamily="34" charset="0"/>
+                <a:ea typeface="Calibri" pitchFamily="34" charset="-122"/>
+                <a:cs typeface="Calibri" pitchFamily="34" charset="-120"/>
+              </a:rPr>
+              <a:t>De 4,07 para -0,09 — prova que a transformação foi tecnicamente bem-sucedida, mesmo sem 'aprovar' o teste de hipótese.</a:t>
+            </a:r>
+            <a:endParaRPr lang="en-US" sz="1100" dirty="0"/>
+          </a:p>
+        </p:txBody>
+      </p:sp>
+      <p:sp>
+        <p:nvSpPr>
+          <p:cNvPr id="14" name="Shape 10"/>
+          <p:cNvSpPr/>
+          <p:nvPr/>
+        </p:nvSpPr>
+        <p:spPr>
+          <a:xfrm>
+            <a:off x="8046720" y="1600200"/>
+            <a:ext cx="3520440" cy="2286000"/>
+          </a:xfrm>
+          <a:prstGeom prst="roundRect">
+            <a:avLst>
+              <a:gd name="adj" fmla="val 3200"/>
+            </a:avLst>
+          </a:prstGeom>
+          <a:solidFill>
+            <a:srgbClr val="1E2761"/>
+          </a:solidFill>
+          <a:ln/>
+        </p:spPr>
+      </p:sp>
+      <p:sp>
+        <p:nvSpPr>
+          <p:cNvPr id="15" name="Shape 11"/>
+          <p:cNvSpPr/>
+          <p:nvPr/>
+        </p:nvSpPr>
+        <p:spPr>
+          <a:xfrm>
+            <a:off x="8321040" y="1874520"/>
+            <a:ext cx="594360" cy="594360"/>
           </a:xfrm>
           <a:prstGeom prst="ellipse">
             <a:avLst/>
           </a:prstGeom>
           <a:solidFill>
-            <a:srgbClr val="CADCFC"/>
+            <a:srgbClr val="D4AF37"/>
           </a:solidFill>
           <a:ln/>
         </p:spPr>
       </p:sp>
       <p:pic>
         <p:nvPicPr>
-          <p:cNvPr id="25" name="Image 4" descr="assets/icon_check_navy.png">    </p:cNvPr>
+          <p:cNvPr id="16" name="Image 2" descr="assets/icon_chart.png"/>
           <p:cNvPicPr>
             <a:picLocks noChangeAspect="1"/>
           </p:cNvPicPr>
@@ -4603,8 +4417,8 @@
         </p:blipFill>
         <p:spPr>
           <a:xfrm>
-            <a:off x="951890" y="5277002"/>
-            <a:ext cx="153619" cy="153619"/>
+            <a:off x="8475574" y="2029054"/>
+            <a:ext cx="285293" cy="285293"/>
           </a:xfrm>
           <a:prstGeom prst="rect">
             <a:avLst/>
@@ -4613,52 +4427,158 @@
       </p:pic>
       <p:sp>
         <p:nvSpPr>
-          <p:cNvPr id="26" name="Text 19"/>
-          <p:cNvSpPr/>
-          <p:nvPr/>
-        </p:nvSpPr>
-        <p:spPr>
-          <a:xfrm>
-            <a:off x="1325880" y="5148072"/>
-            <a:ext cx="10058400" cy="411480"/>
-          </a:xfrm>
-          <a:prstGeom prst="rect">
-            <a:avLst/>
-          </a:prstGeom>
-          <a:noFill/>
-          <a:ln/>
-        </p:spPr>
-        <p:txBody>
-          <a:bodyPr wrap="square" lIns="0" tIns="0" rIns="0" bIns="0" rtlCol="0" anchor="ctr"/>
-          <a:lstStyle/>
-          <a:p>
-            <a:pPr indent="0" marL="0">
-              <a:buNone/>
-            </a:pPr>
-            <a:r>
-              <a:rPr lang="en-US" sz="1250" dirty="0">
-                <a:solidFill>
-                  <a:srgbClr val="1E293B"/>
-                </a:solidFill>
-                <a:latin typeface="Calibri" pitchFamily="34" charset="0"/>
-                <a:ea typeface="Calibri" pitchFamily="34" charset="-122"/>
-                <a:cs typeface="Calibri" pitchFamily="34" charset="-120"/>
-              </a:rPr>
-              <a:t>Monitorar a concentração de gastos por vínculo antes de novos editais de contratação</a:t>
-            </a:r>
-            <a:endParaRPr lang="en-US" sz="1250" dirty="0"/>
-          </a:p>
-        </p:txBody>
-      </p:sp>
-      <p:sp>
-        <p:nvSpPr>
-          <p:cNvPr id="27" name="Shape 20"/>
-          <p:cNvSpPr/>
-          <p:nvPr/>
-        </p:nvSpPr>
-        <p:spPr>
-          <a:xfrm>
-            <a:off x="868680" y="5650992"/>
+          <p:cNvPr id="17" name="Text 12"/>
+          <p:cNvSpPr/>
+          <p:nvPr/>
+        </p:nvSpPr>
+        <p:spPr>
+          <a:xfrm>
+            <a:off x="8321040" y="2606040"/>
+            <a:ext cx="2971800" cy="594360"/>
+          </a:xfrm>
+          <a:prstGeom prst="rect">
+            <a:avLst/>
+          </a:prstGeom>
+          <a:noFill/>
+          <a:ln/>
+        </p:spPr>
+        <p:txBody>
+          <a:bodyPr wrap="square" lIns="0" tIns="0" rIns="0" bIns="0" rtlCol="0" anchor="ctr"/>
+          <a:lstStyle/>
+          <a:p>
+            <a:pPr marL="0" indent="0">
+              <a:lnSpc>
+                <a:spcPct val="110000"/>
+              </a:lnSpc>
+              <a:buNone/>
+            </a:pPr>
+            <a:r>
+              <a:rPr lang="en-US" sz="1450" b="1" dirty="0">
+                <a:solidFill>
+                  <a:srgbClr val="FFFFFF"/>
+                </a:solidFill>
+                <a:latin typeface="Calibri" pitchFamily="34" charset="0"/>
+                <a:ea typeface="Calibri" pitchFamily="34" charset="-122"/>
+                <a:cs typeface="Calibri" pitchFamily="34" charset="-120"/>
+              </a:rPr>
+              <a:t>A desigualdade salarial é estrutural</a:t>
+            </a:r>
+            <a:endParaRPr lang="en-US" sz="1450" dirty="0"/>
+          </a:p>
+        </p:txBody>
+      </p:sp>
+      <p:sp>
+        <p:nvSpPr>
+          <p:cNvPr id="18" name="Text 13"/>
+          <p:cNvSpPr/>
+          <p:nvPr/>
+        </p:nvSpPr>
+        <p:spPr>
+          <a:xfrm>
+            <a:off x="8321040" y="3200400"/>
+            <a:ext cx="2971800" cy="640080"/>
+          </a:xfrm>
+          <a:prstGeom prst="rect">
+            <a:avLst/>
+          </a:prstGeom>
+          <a:noFill/>
+          <a:ln/>
+        </p:spPr>
+        <p:txBody>
+          <a:bodyPr wrap="square" lIns="0" tIns="0" rIns="0" bIns="0" rtlCol="0" anchor="ctr"/>
+          <a:lstStyle/>
+          <a:p>
+            <a:pPr marL="0" indent="0">
+              <a:lnSpc>
+                <a:spcPct val="120000"/>
+              </a:lnSpc>
+              <a:buNone/>
+            </a:pPr>
+            <a:r>
+              <a:rPr lang="en-US" sz="1100" dirty="0">
+                <a:solidFill>
+                  <a:srgbClr val="CADCFC"/>
+                </a:solidFill>
+                <a:latin typeface="Calibri" pitchFamily="34" charset="0"/>
+                <a:ea typeface="Calibri" pitchFamily="34" charset="-122"/>
+                <a:cs typeface="Calibri" pitchFamily="34" charset="-120"/>
+              </a:rPr>
+              <a:t>Gini de 0,48 e concentração de 35% do gasto nos 10% mais bem remunerados não são outliers — são o padrão real da folha.</a:t>
+            </a:r>
+            <a:endParaRPr lang="en-US" sz="1100" dirty="0"/>
+          </a:p>
+        </p:txBody>
+      </p:sp>
+      <p:sp>
+        <p:nvSpPr>
+          <p:cNvPr id="19" name="Shape 14"/>
+          <p:cNvSpPr/>
+          <p:nvPr/>
+        </p:nvSpPr>
+        <p:spPr>
+          <a:xfrm>
+            <a:off x="548640" y="4160520"/>
+            <a:ext cx="11064240" cy="2011680"/>
+          </a:xfrm>
+          <a:prstGeom prst="roundRect">
+            <a:avLst>
+              <a:gd name="adj" fmla="val 3636"/>
+            </a:avLst>
+          </a:prstGeom>
+          <a:solidFill>
+            <a:srgbClr val="EEF3FC"/>
+          </a:solidFill>
+          <a:ln/>
+        </p:spPr>
+      </p:sp>
+      <p:sp>
+        <p:nvSpPr>
+          <p:cNvPr id="20" name="Text 15"/>
+          <p:cNvSpPr/>
+          <p:nvPr/>
+        </p:nvSpPr>
+        <p:spPr>
+          <a:xfrm>
+            <a:off x="868680" y="4315968"/>
+            <a:ext cx="10424160" cy="274320"/>
+          </a:xfrm>
+          <a:prstGeom prst="rect">
+            <a:avLst/>
+          </a:prstGeom>
+          <a:noFill/>
+          <a:ln/>
+        </p:spPr>
+        <p:txBody>
+          <a:bodyPr wrap="square" lIns="0" tIns="0" rIns="0" bIns="0" rtlCol="0" anchor="ctr"/>
+          <a:lstStyle/>
+          <a:p>
+            <a:pPr marL="0" indent="0">
+              <a:buNone/>
+            </a:pPr>
+            <a:r>
+              <a:rPr lang="en-US" sz="1200" b="1" kern="0" spc="100" dirty="0">
+                <a:solidFill>
+                  <a:srgbClr val="1E2761"/>
+                </a:solidFill>
+                <a:latin typeface="Calibri" pitchFamily="34" charset="0"/>
+                <a:ea typeface="Calibri" pitchFamily="34" charset="-122"/>
+                <a:cs typeface="Calibri" pitchFamily="34" charset="-120"/>
+              </a:rPr>
+              <a:t>SUGESTÕES AOS STAKEHOLDERS</a:t>
+            </a:r>
+            <a:endParaRPr lang="en-US" sz="1200" dirty="0"/>
+          </a:p>
+        </p:txBody>
+      </p:sp>
+      <p:sp>
+        <p:nvSpPr>
+          <p:cNvPr id="21" name="Shape 16"/>
+          <p:cNvSpPr/>
+          <p:nvPr/>
+        </p:nvSpPr>
+        <p:spPr>
+          <a:xfrm>
+            <a:off x="868680" y="4736592"/>
             <a:ext cx="320040" cy="320040"/>
           </a:xfrm>
           <a:prstGeom prst="ellipse">
@@ -4672,7 +4592,7 @@
       </p:sp>
       <p:pic>
         <p:nvPicPr>
-          <p:cNvPr id="28" name="Image 5" descr="assets/icon_check_navy.png">    </p:cNvPr>
+          <p:cNvPr id="22" name="Image 3" descr="assets/icon_check_navy.png"/>
           <p:cNvPicPr>
             <a:picLocks noChangeAspect="1"/>
           </p:cNvPicPr>
@@ -4686,6 +4606,172 @@
         </p:blipFill>
         <p:spPr>
           <a:xfrm>
+            <a:off x="951890" y="4819802"/>
+            <a:ext cx="153619" cy="153619"/>
+          </a:xfrm>
+          <a:prstGeom prst="rect">
+            <a:avLst/>
+          </a:prstGeom>
+        </p:spPr>
+      </p:pic>
+      <p:sp>
+        <p:nvSpPr>
+          <p:cNvPr id="23" name="Text 17"/>
+          <p:cNvSpPr/>
+          <p:nvPr/>
+        </p:nvSpPr>
+        <p:spPr>
+          <a:xfrm>
+            <a:off x="1325880" y="4690872"/>
+            <a:ext cx="10058400" cy="411480"/>
+          </a:xfrm>
+          <a:prstGeom prst="rect">
+            <a:avLst/>
+          </a:prstGeom>
+          <a:noFill/>
+          <a:ln/>
+        </p:spPr>
+        <p:txBody>
+          <a:bodyPr wrap="square" lIns="0" tIns="0" rIns="0" bIns="0" rtlCol="0" anchor="ctr"/>
+          <a:lstStyle/>
+          <a:p>
+            <a:pPr marL="0" indent="0">
+              <a:buNone/>
+            </a:pPr>
+            <a:r>
+              <a:rPr lang="en-US" sz="1250" dirty="0">
+                <a:solidFill>
+                  <a:srgbClr val="1E293B"/>
+                </a:solidFill>
+                <a:latin typeface="Calibri" pitchFamily="34" charset="0"/>
+                <a:ea typeface="Calibri" pitchFamily="34" charset="-122"/>
+                <a:cs typeface="Calibri" pitchFamily="34" charset="-120"/>
+              </a:rPr>
+              <a:t>Usar o índice de Gini como métrica anual de acompanhamento da equidade salarial interna</a:t>
+            </a:r>
+            <a:endParaRPr lang="en-US" sz="1250" dirty="0"/>
+          </a:p>
+        </p:txBody>
+      </p:sp>
+      <p:sp>
+        <p:nvSpPr>
+          <p:cNvPr id="24" name="Shape 18"/>
+          <p:cNvSpPr/>
+          <p:nvPr/>
+        </p:nvSpPr>
+        <p:spPr>
+          <a:xfrm>
+            <a:off x="868680" y="5193792"/>
+            <a:ext cx="320040" cy="320040"/>
+          </a:xfrm>
+          <a:prstGeom prst="ellipse">
+            <a:avLst/>
+          </a:prstGeom>
+          <a:solidFill>
+            <a:srgbClr val="CADCFC"/>
+          </a:solidFill>
+          <a:ln/>
+        </p:spPr>
+      </p:sp>
+      <p:pic>
+        <p:nvPicPr>
+          <p:cNvPr id="25" name="Image 4" descr="assets/icon_check_navy.png"/>
+          <p:cNvPicPr>
+            <a:picLocks noChangeAspect="1"/>
+          </p:cNvPicPr>
+          <p:nvPr/>
+        </p:nvPicPr>
+        <p:blipFill>
+          <a:blip r:embed="rId6"/>
+          <a:stretch>
+            <a:fillRect/>
+          </a:stretch>
+        </p:blipFill>
+        <p:spPr>
+          <a:xfrm>
+            <a:off x="951890" y="5277002"/>
+            <a:ext cx="153619" cy="153619"/>
+          </a:xfrm>
+          <a:prstGeom prst="rect">
+            <a:avLst/>
+          </a:prstGeom>
+        </p:spPr>
+      </p:pic>
+      <p:sp>
+        <p:nvSpPr>
+          <p:cNvPr id="26" name="Text 19"/>
+          <p:cNvSpPr/>
+          <p:nvPr/>
+        </p:nvSpPr>
+        <p:spPr>
+          <a:xfrm>
+            <a:off x="1325880" y="5148072"/>
+            <a:ext cx="10058400" cy="411480"/>
+          </a:xfrm>
+          <a:prstGeom prst="rect">
+            <a:avLst/>
+          </a:prstGeom>
+          <a:noFill/>
+          <a:ln/>
+        </p:spPr>
+        <p:txBody>
+          <a:bodyPr wrap="square" lIns="0" tIns="0" rIns="0" bIns="0" rtlCol="0" anchor="ctr"/>
+          <a:lstStyle/>
+          <a:p>
+            <a:pPr marL="0" indent="0">
+              <a:buNone/>
+            </a:pPr>
+            <a:r>
+              <a:rPr lang="en-US" sz="1250" dirty="0">
+                <a:solidFill>
+                  <a:srgbClr val="1E293B"/>
+                </a:solidFill>
+                <a:latin typeface="Calibri" pitchFamily="34" charset="0"/>
+                <a:ea typeface="Calibri" pitchFamily="34" charset="-122"/>
+                <a:cs typeface="Calibri" pitchFamily="34" charset="-120"/>
+              </a:rPr>
+              <a:t>Monitorar a concentração de gastos por vínculo antes de novos editais de contratação</a:t>
+            </a:r>
+            <a:endParaRPr lang="en-US" sz="1250" dirty="0"/>
+          </a:p>
+        </p:txBody>
+      </p:sp>
+      <p:sp>
+        <p:nvSpPr>
+          <p:cNvPr id="27" name="Shape 20"/>
+          <p:cNvSpPr/>
+          <p:nvPr/>
+        </p:nvSpPr>
+        <p:spPr>
+          <a:xfrm>
+            <a:off x="868680" y="5650992"/>
+            <a:ext cx="320040" cy="320040"/>
+          </a:xfrm>
+          <a:prstGeom prst="ellipse">
+            <a:avLst/>
+          </a:prstGeom>
+          <a:solidFill>
+            <a:srgbClr val="CADCFC"/>
+          </a:solidFill>
+          <a:ln/>
+        </p:spPr>
+      </p:sp>
+      <p:pic>
+        <p:nvPicPr>
+          <p:cNvPr id="28" name="Image 5" descr="assets/icon_check_navy.png"/>
+          <p:cNvPicPr>
+            <a:picLocks noChangeAspect="1"/>
+          </p:cNvPicPr>
+          <p:nvPr/>
+        </p:nvPicPr>
+        <p:blipFill>
+          <a:blip r:embed="rId6"/>
+          <a:stretch>
+            <a:fillRect/>
+          </a:stretch>
+        </p:blipFill>
+        <p:spPr>
+          <a:xfrm>
             <a:off x="951890" y="5734202"/>
             <a:ext cx="153619" cy="153619"/>
           </a:xfrm>
@@ -4715,7 +4801,7 @@
           <a:bodyPr wrap="square" lIns="0" tIns="0" rIns="0" bIns="0" rtlCol="0" anchor="ctr"/>
           <a:lstStyle/>
           <a:p>
-            <a:pPr indent="0" marL="0">
+            <a:pPr marL="0" indent="0">
               <a:buNone/>
             </a:pPr>
             <a:r>
@@ -4754,7 +4840,7 @@
           <a:bodyPr wrap="square" lIns="0" tIns="0" rIns="0" bIns="0" rtlCol="0" anchor="ctr"/>
           <a:lstStyle/>
           <a:p>
-            <a:pPr algn="l" indent="0" marL="0">
+            <a:pPr marL="0" indent="0" algn="l">
               <a:buNone/>
             </a:pPr>
             <a:r>
@@ -4793,7 +4879,7 @@
           <a:bodyPr wrap="square" lIns="0" tIns="0" rIns="0" bIns="0" rtlCol="0" anchor="ctr"/>
           <a:lstStyle/>
           <a:p>
-            <a:pPr algn="r" indent="0" marL="0">
+            <a:pPr marL="0" indent="0" algn="r">
               <a:buNone/>
             </a:pPr>
             <a:r>
@@ -4827,6 +4913,7 @@
         <a:solidFill>
           <a:srgbClr val="FFFFFF"/>
         </a:solidFill>
+        <a:effectLst/>
       </p:bgPr>
     </p:bg>
     <p:spTree>
@@ -4864,11 +4951,11 @@
           <a:bodyPr wrap="square" lIns="0" tIns="0" rIns="0" bIns="0" rtlCol="0" anchor="ctr"/>
           <a:lstStyle/>
           <a:p>
-            <a:pPr indent="0" marL="0">
-              <a:buNone/>
-            </a:pPr>
-            <a:r>
-              <a:rPr lang="en-US" sz="1300" b="1" spc="200" kern="0" dirty="0">
+            <a:pPr marL="0" indent="0">
+              <a:buNone/>
+            </a:pPr>
+            <a:r>
+              <a:rPr lang="en-US" sz="1300" b="1" kern="0" spc="200" dirty="0">
                 <a:solidFill>
                   <a:srgbClr val="1E2761"/>
                 </a:solidFill>
@@ -4904,14 +4991,14 @@
       </p:sp>
       <p:pic>
         <p:nvPicPr>
-          <p:cNvPr id="4" name="Image 0" descr="assets/icon_question.png">    </p:cNvPr>
+          <p:cNvPr id="4" name="Image 0" descr="assets/icon_question.png"/>
           <p:cNvPicPr>
             <a:picLocks noChangeAspect="1"/>
           </p:cNvPicPr>
           <p:nvPr/>
         </p:nvPicPr>
         <p:blipFill>
-          <a:blip r:embed="rId1"/>
+          <a:blip r:embed="rId3"/>
           <a:stretch>
             <a:fillRect/>
           </a:stretch>
@@ -4947,7 +5034,7 @@
           </a:solidFill>
           <a:ln/>
           <a:effectLst>
-            <a:outerShdw sx="100000" sy="100000" kx="0" ky="0" algn="bl" rotWithShape="0" blurRad="101600" dist="38100" dir="5400000">
+            <a:outerShdw blurRad="101600" dist="38100" dir="5400000" algn="bl" rotWithShape="0">
               <a:srgbClr val="000000">
                 <a:alpha val="8000"/>
               </a:srgbClr>
@@ -4976,7 +5063,7 @@
           <a:bodyPr wrap="square" lIns="0" tIns="0" rIns="0" bIns="0" rtlCol="0" anchor="t"/>
           <a:lstStyle/>
           <a:p>
-            <a:pPr indent="0" marL="0">
+            <a:pPr marL="0" indent="0">
               <a:lnSpc>
                 <a:spcPct val="120000"/>
               </a:lnSpc>
@@ -5018,11 +5105,11 @@
           <a:bodyPr wrap="square" lIns="0" tIns="0" rIns="0" bIns="0" rtlCol="0" anchor="ctr"/>
           <a:lstStyle/>
           <a:p>
-            <a:pPr indent="0" marL="0">
-              <a:buNone/>
-            </a:pPr>
-            <a:r>
-              <a:rPr lang="en-US" sz="1100" b="1" spc="100" kern="0" dirty="0">
+            <a:pPr marL="0" indent="0">
+              <a:buNone/>
+            </a:pPr>
+            <a:r>
+              <a:rPr lang="en-US" sz="1100" b="1" kern="0" spc="100" dirty="0">
                 <a:solidFill>
                   <a:srgbClr val="64748B"/>
                 </a:solidFill>
@@ -5062,7 +5149,7 @@
             <a:prstDash val="solid"/>
           </a:ln>
           <a:effectLst>
-            <a:outerShdw sx="100000" sy="100000" kx="0" ky="0" algn="bl" rotWithShape="0" blurRad="76200" dist="25400" dir="5400000">
+            <a:outerShdw blurRad="76200" dist="25400" dir="5400000" algn="bl" rotWithShape="0">
               <a:srgbClr val="000000">
                 <a:alpha val="6000"/>
               </a:srgbClr>
@@ -5092,14 +5179,14 @@
       </p:sp>
       <p:pic>
         <p:nvPicPr>
-          <p:cNvPr id="10" name="Image 1" descr="assets/icon_chart_navy.png">    </p:cNvPr>
+          <p:cNvPr id="10" name="Image 1" descr="assets/icon_chart_navy.png"/>
           <p:cNvPicPr>
             <a:picLocks noChangeAspect="1"/>
           </p:cNvPicPr>
           <p:nvPr/>
         </p:nvPicPr>
         <p:blipFill>
-          <a:blip r:embed="rId2"/>
+          <a:blip r:embed="rId4"/>
           <a:stretch>
             <a:fillRect/>
           </a:stretch>
@@ -5135,7 +5222,7 @@
           <a:bodyPr wrap="square" lIns="0" tIns="0" rIns="0" bIns="0" rtlCol="0" anchor="ctr"/>
           <a:lstStyle/>
           <a:p>
-            <a:pPr indent="0" marL="0">
+            <a:pPr marL="0" indent="0">
               <a:buNone/>
             </a:pPr>
             <a:r>
@@ -5174,7 +5261,7 @@
           <a:bodyPr wrap="square" lIns="0" tIns="0" rIns="0" bIns="0" rtlCol="0" anchor="ctr"/>
           <a:lstStyle/>
           <a:p>
-            <a:pPr indent="0" marL="0">
+            <a:pPr marL="0" indent="0">
               <a:lnSpc>
                 <a:spcPct val="115000"/>
               </a:lnSpc>
@@ -5221,7 +5308,7 @@
             <a:prstDash val="solid"/>
           </a:ln>
           <a:effectLst>
-            <a:outerShdw sx="100000" sy="100000" kx="0" ky="0" algn="bl" rotWithShape="0" blurRad="76200" dist="25400" dir="5400000">
+            <a:outerShdw blurRad="76200" dist="25400" dir="5400000" algn="bl" rotWithShape="0">
               <a:srgbClr val="000000">
                 <a:alpha val="6000"/>
               </a:srgbClr>
@@ -5251,14 +5338,14 @@
       </p:sp>
       <p:pic>
         <p:nvPicPr>
-          <p:cNvPr id="15" name="Image 2" descr="assets/icon_chartline_navy.png">    </p:cNvPr>
+          <p:cNvPr id="15" name="Image 2" descr="assets/icon_chartline_navy.png"/>
           <p:cNvPicPr>
             <a:picLocks noChangeAspect="1"/>
           </p:cNvPicPr>
           <p:nvPr/>
         </p:nvPicPr>
         <p:blipFill>
-          <a:blip r:embed="rId3"/>
+          <a:blip r:embed="rId5"/>
           <a:stretch>
             <a:fillRect/>
           </a:stretch>
@@ -5294,7 +5381,7 @@
           <a:bodyPr wrap="square" lIns="0" tIns="0" rIns="0" bIns="0" rtlCol="0" anchor="ctr"/>
           <a:lstStyle/>
           <a:p>
-            <a:pPr indent="0" marL="0">
+            <a:pPr marL="0" indent="0">
               <a:buNone/>
             </a:pPr>
             <a:r>
@@ -5333,7 +5420,7 @@
           <a:bodyPr wrap="square" lIns="0" tIns="0" rIns="0" bIns="0" rtlCol="0" anchor="ctr"/>
           <a:lstStyle/>
           <a:p>
-            <a:pPr indent="0" marL="0">
+            <a:pPr marL="0" indent="0">
               <a:lnSpc>
                 <a:spcPct val="115000"/>
               </a:lnSpc>
@@ -5375,7 +5462,7 @@
           <a:bodyPr wrap="square" lIns="0" tIns="0" rIns="0" bIns="0" rtlCol="0" anchor="ctr"/>
           <a:lstStyle/>
           <a:p>
-            <a:pPr algn="l" indent="0" marL="0">
+            <a:pPr marL="0" indent="0" algn="l">
               <a:buNone/>
             </a:pPr>
             <a:r>
@@ -5414,7 +5501,7 @@
           <a:bodyPr wrap="square" lIns="0" tIns="0" rIns="0" bIns="0" rtlCol="0" anchor="ctr"/>
           <a:lstStyle/>
           <a:p>
-            <a:pPr algn="r" indent="0" marL="0">
+            <a:pPr marL="0" indent="0" algn="r">
               <a:buNone/>
             </a:pPr>
             <a:r>
@@ -5448,6 +5535,7 @@
         <a:solidFill>
           <a:srgbClr val="FFFFFF"/>
         </a:solidFill>
+        <a:effectLst/>
       </p:bgPr>
     </p:bg>
     <p:spTree>
@@ -5485,11 +5573,11 @@
           <a:bodyPr wrap="square" lIns="0" tIns="0" rIns="0" bIns="0" rtlCol="0" anchor="ctr"/>
           <a:lstStyle/>
           <a:p>
-            <a:pPr indent="0" marL="0">
-              <a:buNone/>
-            </a:pPr>
-            <a:r>
-              <a:rPr lang="en-US" sz="1300" b="1" spc="200" kern="0" dirty="0">
+            <a:pPr marL="0" indent="0">
+              <a:buNone/>
+            </a:pPr>
+            <a:r>
+              <a:rPr lang="en-US" sz="1300" b="1" kern="0" spc="200" dirty="0">
                 <a:solidFill>
                   <a:srgbClr val="1E2761"/>
                 </a:solidFill>
@@ -5524,7 +5612,7 @@
           <a:bodyPr wrap="square" lIns="0" tIns="0" rIns="0" bIns="0" rtlCol="0" anchor="ctr"/>
           <a:lstStyle/>
           <a:p>
-            <a:pPr indent="0" marL="0">
+            <a:pPr marL="0" indent="0">
               <a:buNone/>
             </a:pPr>
             <a:r>
@@ -5587,335 +5675,7 @@
       </p:sp>
       <p:pic>
         <p:nvPicPr>
-          <p:cNvPr id="6" name="Image 0" descr="assets/icon_search.png">    </p:cNvPr>
-          <p:cNvPicPr>
-            <a:picLocks noChangeAspect="1"/>
-          </p:cNvPicPr>
-          <p:nvPr/>
-        </p:nvPicPr>
-        <p:blipFill>
-          <a:blip r:embed="rId1"/>
-          <a:stretch>
-            <a:fillRect/>
-          </a:stretch>
-        </p:blipFill>
-        <p:spPr>
-          <a:xfrm>
-            <a:off x="738835" y="2659075"/>
-            <a:ext cx="351130" cy="351130"/>
-          </a:xfrm>
-          <a:prstGeom prst="rect">
-            <a:avLst/>
-          </a:prstGeom>
-        </p:spPr>
-      </p:pic>
-      <p:sp>
-        <p:nvSpPr>
-          <p:cNvPr id="7" name="Text 4"/>
-          <p:cNvSpPr/>
-          <p:nvPr/>
-        </p:nvSpPr>
-        <p:spPr>
-          <a:xfrm>
-            <a:off x="548640" y="2148840"/>
-            <a:ext cx="731520" cy="274320"/>
-          </a:xfrm>
-          <a:prstGeom prst="rect">
-            <a:avLst/>
-          </a:prstGeom>
-          <a:noFill/>
-          <a:ln/>
-        </p:spPr>
-        <p:txBody>
-          <a:bodyPr wrap="square" lIns="0" tIns="0" rIns="0" bIns="0" rtlCol="0" anchor="ctr"/>
-          <a:lstStyle/>
-          <a:p>
-            <a:pPr algn="ctr" indent="0" marL="0">
-              <a:buNone/>
-            </a:pPr>
-            <a:r>
-              <a:rPr lang="en-US" sz="1100" b="1" dirty="0">
-                <a:solidFill>
-                  <a:srgbClr val="64748B"/>
-                </a:solidFill>
-                <a:latin typeface="Calibri" pitchFamily="34" charset="0"/>
-                <a:ea typeface="Calibri" pitchFamily="34" charset="-122"/>
-                <a:cs typeface="Calibri" pitchFamily="34" charset="-120"/>
-              </a:rPr>
-              <a:t>1</a:t>
-            </a:r>
-            <a:endParaRPr lang="en-US" sz="1100" dirty="0"/>
-          </a:p>
-        </p:txBody>
-      </p:sp>
-      <p:sp>
-        <p:nvSpPr>
-          <p:cNvPr id="8" name="Text 5"/>
-          <p:cNvSpPr/>
-          <p:nvPr/>
-        </p:nvSpPr>
-        <p:spPr>
-          <a:xfrm>
-            <a:off x="45720" y="3337560"/>
-            <a:ext cx="1737360" cy="320040"/>
-          </a:xfrm>
-          <a:prstGeom prst="rect">
-            <a:avLst/>
-          </a:prstGeom>
-          <a:noFill/>
-          <a:ln/>
-        </p:spPr>
-        <p:txBody>
-          <a:bodyPr wrap="square" lIns="0" tIns="0" rIns="0" bIns="0" rtlCol="0" anchor="ctr"/>
-          <a:lstStyle/>
-          <a:p>
-            <a:pPr algn="ctr" indent="0" marL="0">
-              <a:buNone/>
-            </a:pPr>
-            <a:r>
-              <a:rPr lang="en-US" sz="1300" b="1" dirty="0">
-                <a:solidFill>
-                  <a:srgbClr val="1E2761"/>
-                </a:solidFill>
-                <a:latin typeface="Calibri" pitchFamily="34" charset="0"/>
-                <a:ea typeface="Calibri" pitchFamily="34" charset="-122"/>
-                <a:cs typeface="Calibri" pitchFamily="34" charset="-120"/>
-              </a:rPr>
-              <a:t>Limpeza</a:t>
-            </a:r>
-            <a:endParaRPr lang="en-US" sz="1300" dirty="0"/>
-          </a:p>
-        </p:txBody>
-      </p:sp>
-      <p:sp>
-        <p:nvSpPr>
-          <p:cNvPr id="9" name="Text 6"/>
-          <p:cNvSpPr/>
-          <p:nvPr/>
-        </p:nvSpPr>
-        <p:spPr>
-          <a:xfrm>
-            <a:off x="45720" y="3675888"/>
-            <a:ext cx="1737360" cy="868680"/>
-          </a:xfrm>
-          <a:prstGeom prst="rect">
-            <a:avLst/>
-          </a:prstGeom>
-          <a:noFill/>
-          <a:ln/>
-        </p:spPr>
-        <p:txBody>
-          <a:bodyPr wrap="square" lIns="0" tIns="0" rIns="0" bIns="0" rtlCol="0" anchor="ctr"/>
-          <a:lstStyle/>
-          <a:p>
-            <a:pPr algn="ctr" indent="0" marL="0">
-              <a:lnSpc>
-                <a:spcPct val="110000"/>
-              </a:lnSpc>
-              <a:buNone/>
-            </a:pPr>
-            <a:r>
-              <a:rPr lang="en-US" sz="1000" dirty="0">
-                <a:solidFill>
-                  <a:srgbClr val="64748B"/>
-                </a:solidFill>
-                <a:latin typeface="Calibri" pitchFamily="34" charset="0"/>
-                <a:ea typeface="Calibri" pitchFamily="34" charset="-122"/>
-                <a:cs typeface="Calibri" pitchFamily="34" charset="-120"/>
-              </a:rPr>
-              <a:t>Conversão monetária e remoção de nulos/zeros</a:t>
-            </a:r>
-            <a:endParaRPr lang="en-US" sz="1000" dirty="0"/>
-          </a:p>
-        </p:txBody>
-      </p:sp>
-      <p:sp>
-        <p:nvSpPr>
-          <p:cNvPr id="10" name="Shape 7"/>
-          <p:cNvSpPr/>
-          <p:nvPr/>
-        </p:nvSpPr>
-        <p:spPr>
-          <a:xfrm>
-            <a:off x="2615184" y="2468880"/>
-            <a:ext cx="731520" cy="731520"/>
-          </a:xfrm>
-          <a:prstGeom prst="ellipse">
-            <a:avLst/>
-          </a:prstGeom>
-          <a:solidFill>
-            <a:srgbClr val="1E2761"/>
-          </a:solidFill>
-          <a:ln/>
-        </p:spPr>
-      </p:sp>
-      <p:pic>
-        <p:nvPicPr>
-          <p:cNvPr id="11" name="Image 1" descr="assets/icon_chart.png">    </p:cNvPr>
-          <p:cNvPicPr>
-            <a:picLocks noChangeAspect="1"/>
-          </p:cNvPicPr>
-          <p:nvPr/>
-        </p:nvPicPr>
-        <p:blipFill>
-          <a:blip r:embed="rId2"/>
-          <a:stretch>
-            <a:fillRect/>
-          </a:stretch>
-        </p:blipFill>
-        <p:spPr>
-          <a:xfrm>
-            <a:off x="2805379" y="2659075"/>
-            <a:ext cx="351130" cy="351130"/>
-          </a:xfrm>
-          <a:prstGeom prst="rect">
-            <a:avLst/>
-          </a:prstGeom>
-        </p:spPr>
-      </p:pic>
-      <p:sp>
-        <p:nvSpPr>
-          <p:cNvPr id="12" name="Text 8"/>
-          <p:cNvSpPr/>
-          <p:nvPr/>
-        </p:nvSpPr>
-        <p:spPr>
-          <a:xfrm>
-            <a:off x="2615184" y="2148840"/>
-            <a:ext cx="731520" cy="274320"/>
-          </a:xfrm>
-          <a:prstGeom prst="rect">
-            <a:avLst/>
-          </a:prstGeom>
-          <a:noFill/>
-          <a:ln/>
-        </p:spPr>
-        <p:txBody>
-          <a:bodyPr wrap="square" lIns="0" tIns="0" rIns="0" bIns="0" rtlCol="0" anchor="ctr"/>
-          <a:lstStyle/>
-          <a:p>
-            <a:pPr algn="ctr" indent="0" marL="0">
-              <a:buNone/>
-            </a:pPr>
-            <a:r>
-              <a:rPr lang="en-US" sz="1100" b="1" dirty="0">
-                <a:solidFill>
-                  <a:srgbClr val="64748B"/>
-                </a:solidFill>
-                <a:latin typeface="Calibri" pitchFamily="34" charset="0"/>
-                <a:ea typeface="Calibri" pitchFamily="34" charset="-122"/>
-                <a:cs typeface="Calibri" pitchFamily="34" charset="-120"/>
-              </a:rPr>
-              <a:t>2</a:t>
-            </a:r>
-            <a:endParaRPr lang="en-US" sz="1100" dirty="0"/>
-          </a:p>
-        </p:txBody>
-      </p:sp>
-      <p:sp>
-        <p:nvSpPr>
-          <p:cNvPr id="13" name="Text 9"/>
-          <p:cNvSpPr/>
-          <p:nvPr/>
-        </p:nvSpPr>
-        <p:spPr>
-          <a:xfrm>
-            <a:off x="2112264" y="3337560"/>
-            <a:ext cx="1737360" cy="320040"/>
-          </a:xfrm>
-          <a:prstGeom prst="rect">
-            <a:avLst/>
-          </a:prstGeom>
-          <a:noFill/>
-          <a:ln/>
-        </p:spPr>
-        <p:txBody>
-          <a:bodyPr wrap="square" lIns="0" tIns="0" rIns="0" bIns="0" rtlCol="0" anchor="ctr"/>
-          <a:lstStyle/>
-          <a:p>
-            <a:pPr algn="ctr" indent="0" marL="0">
-              <a:buNone/>
-            </a:pPr>
-            <a:r>
-              <a:rPr lang="en-US" sz="1300" b="1" dirty="0">
-                <a:solidFill>
-                  <a:srgbClr val="1E2761"/>
-                </a:solidFill>
-                <a:latin typeface="Calibri" pitchFamily="34" charset="0"/>
-                <a:ea typeface="Calibri" pitchFamily="34" charset="-122"/>
-                <a:cs typeface="Calibri" pitchFamily="34" charset="-120"/>
-              </a:rPr>
-              <a:t>Exploração</a:t>
-            </a:r>
-            <a:endParaRPr lang="en-US" sz="1300" dirty="0"/>
-          </a:p>
-        </p:txBody>
-      </p:sp>
-      <p:sp>
-        <p:nvSpPr>
-          <p:cNvPr id="14" name="Text 10"/>
-          <p:cNvSpPr/>
-          <p:nvPr/>
-        </p:nvSpPr>
-        <p:spPr>
-          <a:xfrm>
-            <a:off x="2112264" y="3675888"/>
-            <a:ext cx="1737360" cy="868680"/>
-          </a:xfrm>
-          <a:prstGeom prst="rect">
-            <a:avLst/>
-          </a:prstGeom>
-          <a:noFill/>
-          <a:ln/>
-        </p:spPr>
-        <p:txBody>
-          <a:bodyPr wrap="square" lIns="0" tIns="0" rIns="0" bIns="0" rtlCol="0" anchor="ctr"/>
-          <a:lstStyle/>
-          <a:p>
-            <a:pPr algn="ctr" indent="0" marL="0">
-              <a:lnSpc>
-                <a:spcPct val="110000"/>
-              </a:lnSpc>
-              <a:buNone/>
-            </a:pPr>
-            <a:r>
-              <a:rPr lang="en-US" sz="1000" dirty="0">
-                <a:solidFill>
-                  <a:srgbClr val="64748B"/>
-                </a:solidFill>
-                <a:latin typeface="Calibri" pitchFamily="34" charset="0"/>
-                <a:ea typeface="Calibri" pitchFamily="34" charset="-122"/>
-                <a:cs typeface="Calibri" pitchFamily="34" charset="-120"/>
-              </a:rPr>
-              <a:t>Curva de Gauss, média, desvio-padrão</a:t>
-            </a:r>
-            <a:endParaRPr lang="en-US" sz="1000" dirty="0"/>
-          </a:p>
-        </p:txBody>
-      </p:sp>
-      <p:sp>
-        <p:nvSpPr>
-          <p:cNvPr id="15" name="Shape 11"/>
-          <p:cNvSpPr/>
-          <p:nvPr/>
-        </p:nvSpPr>
-        <p:spPr>
-          <a:xfrm>
-            <a:off x="4681728" y="2468880"/>
-            <a:ext cx="731520" cy="731520"/>
-          </a:xfrm>
-          <a:prstGeom prst="ellipse">
-            <a:avLst/>
-          </a:prstGeom>
-          <a:solidFill>
-            <a:srgbClr val="1E2761"/>
-          </a:solidFill>
-          <a:ln/>
-        </p:spPr>
-      </p:sp>
-      <p:pic>
-        <p:nvPicPr>
-          <p:cNvPr id="16" name="Image 2" descr="assets/icon_balance.png">    </p:cNvPr>
+          <p:cNvPr id="6" name="Image 0" descr="assets/icon_search.png"/>
           <p:cNvPicPr>
             <a:picLocks noChangeAspect="1"/>
           </p:cNvPicPr>
@@ -5929,7 +5689,7 @@
         </p:blipFill>
         <p:spPr>
           <a:xfrm>
-            <a:off x="4871923" y="2659075"/>
+            <a:off x="738835" y="2659075"/>
             <a:ext cx="351130" cy="351130"/>
           </a:xfrm>
           <a:prstGeom prst="rect">
@@ -5939,13 +5699,13 @@
       </p:pic>
       <p:sp>
         <p:nvSpPr>
-          <p:cNvPr id="17" name="Text 12"/>
-          <p:cNvSpPr/>
-          <p:nvPr/>
-        </p:nvSpPr>
-        <p:spPr>
-          <a:xfrm>
-            <a:off x="4681728" y="2148840"/>
+          <p:cNvPr id="7" name="Text 4"/>
+          <p:cNvSpPr/>
+          <p:nvPr/>
+        </p:nvSpPr>
+        <p:spPr>
+          <a:xfrm>
+            <a:off x="548640" y="2148840"/>
             <a:ext cx="731520" cy="274320"/>
           </a:xfrm>
           <a:prstGeom prst="rect">
@@ -5958,7 +5718,7 @@
           <a:bodyPr wrap="square" lIns="0" tIns="0" rIns="0" bIns="0" rtlCol="0" anchor="ctr"/>
           <a:lstStyle/>
           <a:p>
-            <a:pPr algn="ctr" indent="0" marL="0">
+            <a:pPr marL="0" indent="0" algn="ctr">
               <a:buNone/>
             </a:pPr>
             <a:r>
@@ -5970,7 +5730,7 @@
                 <a:ea typeface="Calibri" pitchFamily="34" charset="-122"/>
                 <a:cs typeface="Calibri" pitchFamily="34" charset="-120"/>
               </a:rPr>
-              <a:t>3</a:t>
+              <a:t>1</a:t>
             </a:r>
             <a:endParaRPr lang="en-US" sz="1100" dirty="0"/>
           </a:p>
@@ -5978,13 +5738,13 @@
       </p:sp>
       <p:sp>
         <p:nvSpPr>
-          <p:cNvPr id="18" name="Text 13"/>
-          <p:cNvSpPr/>
-          <p:nvPr/>
-        </p:nvSpPr>
-        <p:spPr>
-          <a:xfrm>
-            <a:off x="4178808" y="3337560"/>
+          <p:cNvPr id="8" name="Text 5"/>
+          <p:cNvSpPr/>
+          <p:nvPr/>
+        </p:nvSpPr>
+        <p:spPr>
+          <a:xfrm>
+            <a:off x="45720" y="3337560"/>
             <a:ext cx="1737360" cy="320040"/>
           </a:xfrm>
           <a:prstGeom prst="rect">
@@ -5997,7 +5757,7 @@
           <a:bodyPr wrap="square" lIns="0" tIns="0" rIns="0" bIns="0" rtlCol="0" anchor="ctr"/>
           <a:lstStyle/>
           <a:p>
-            <a:pPr algn="ctr" indent="0" marL="0">
+            <a:pPr marL="0" indent="0" algn="ctr">
               <a:buNone/>
             </a:pPr>
             <a:r>
@@ -6009,7 +5769,7 @@
                 <a:ea typeface="Calibri" pitchFamily="34" charset="-122"/>
                 <a:cs typeface="Calibri" pitchFamily="34" charset="-120"/>
               </a:rPr>
-              <a:t>Testes</a:t>
+              <a:t>Limpeza</a:t>
             </a:r>
             <a:endParaRPr lang="en-US" sz="1300" dirty="0"/>
           </a:p>
@@ -6017,13 +5777,13 @@
       </p:sp>
       <p:sp>
         <p:nvSpPr>
-          <p:cNvPr id="19" name="Text 14"/>
-          <p:cNvSpPr/>
-          <p:nvPr/>
-        </p:nvSpPr>
-        <p:spPr>
-          <a:xfrm>
-            <a:off x="4178808" y="3675888"/>
+          <p:cNvPr id="9" name="Text 6"/>
+          <p:cNvSpPr/>
+          <p:nvPr/>
+        </p:nvSpPr>
+        <p:spPr>
+          <a:xfrm>
+            <a:off x="45720" y="3675888"/>
             <a:ext cx="1737360" cy="868680"/>
           </a:xfrm>
           <a:prstGeom prst="rect">
@@ -6036,7 +5796,7 @@
           <a:bodyPr wrap="square" lIns="0" tIns="0" rIns="0" bIns="0" rtlCol="0" anchor="ctr"/>
           <a:lstStyle/>
           <a:p>
-            <a:pPr algn="ctr" indent="0" marL="0">
+            <a:pPr marL="0" indent="0" algn="ctr">
               <a:lnSpc>
                 <a:spcPct val="110000"/>
               </a:lnSpc>
@@ -6051,7 +5811,7 @@
                 <a:ea typeface="Calibri" pitchFamily="34" charset="-122"/>
                 <a:cs typeface="Calibri" pitchFamily="34" charset="-120"/>
               </a:rPr>
-              <a:t>Kolmogorov-Smirnov e Shapiro-Wilk</a:t>
+              <a:t>Conversão monetária e remoção de nulos/zeros</a:t>
             </a:r>
             <a:endParaRPr lang="en-US" sz="1000" dirty="0"/>
           </a:p>
@@ -6059,27 +5819,27 @@
       </p:sp>
       <p:sp>
         <p:nvSpPr>
-          <p:cNvPr id="20" name="Shape 15"/>
-          <p:cNvSpPr/>
-          <p:nvPr/>
-        </p:nvSpPr>
-        <p:spPr>
-          <a:xfrm>
-            <a:off x="6748272" y="2468880"/>
+          <p:cNvPr id="10" name="Shape 7"/>
+          <p:cNvSpPr/>
+          <p:nvPr/>
+        </p:nvSpPr>
+        <p:spPr>
+          <a:xfrm>
+            <a:off x="2615184" y="2468880"/>
             <a:ext cx="731520" cy="731520"/>
           </a:xfrm>
           <a:prstGeom prst="ellipse">
             <a:avLst/>
           </a:prstGeom>
           <a:solidFill>
-            <a:srgbClr val="D4AF37"/>
+            <a:srgbClr val="1E2761"/>
           </a:solidFill>
           <a:ln/>
         </p:spPr>
       </p:sp>
       <p:pic>
         <p:nvPicPr>
-          <p:cNvPr id="21" name="Image 3" descr="assets/icon_calc.png">    </p:cNvPr>
+          <p:cNvPr id="11" name="Image 1" descr="assets/icon_chart.png"/>
           <p:cNvPicPr>
             <a:picLocks noChangeAspect="1"/>
           </p:cNvPicPr>
@@ -6093,7 +5853,7 @@
         </p:blipFill>
         <p:spPr>
           <a:xfrm>
-            <a:off x="6938467" y="2659075"/>
+            <a:off x="2805379" y="2659075"/>
             <a:ext cx="351130" cy="351130"/>
           </a:xfrm>
           <a:prstGeom prst="rect">
@@ -6103,13 +5863,13 @@
       </p:pic>
       <p:sp>
         <p:nvSpPr>
-          <p:cNvPr id="22" name="Text 16"/>
-          <p:cNvSpPr/>
-          <p:nvPr/>
-        </p:nvSpPr>
-        <p:spPr>
-          <a:xfrm>
-            <a:off x="6748272" y="2148840"/>
+          <p:cNvPr id="12" name="Text 8"/>
+          <p:cNvSpPr/>
+          <p:nvPr/>
+        </p:nvSpPr>
+        <p:spPr>
+          <a:xfrm>
+            <a:off x="2615184" y="2148840"/>
             <a:ext cx="731520" cy="274320"/>
           </a:xfrm>
           <a:prstGeom prst="rect">
@@ -6122,7 +5882,7 @@
           <a:bodyPr wrap="square" lIns="0" tIns="0" rIns="0" bIns="0" rtlCol="0" anchor="ctr"/>
           <a:lstStyle/>
           <a:p>
-            <a:pPr algn="ctr" indent="0" marL="0">
+            <a:pPr marL="0" indent="0" algn="ctr">
               <a:buNone/>
             </a:pPr>
             <a:r>
@@ -6134,7 +5894,7 @@
                 <a:ea typeface="Calibri" pitchFamily="34" charset="-122"/>
                 <a:cs typeface="Calibri" pitchFamily="34" charset="-120"/>
               </a:rPr>
-              <a:t>4</a:t>
+              <a:t>2</a:t>
             </a:r>
             <a:endParaRPr lang="en-US" sz="1100" dirty="0"/>
           </a:p>
@@ -6142,13 +5902,13 @@
       </p:sp>
       <p:sp>
         <p:nvSpPr>
-          <p:cNvPr id="23" name="Text 17"/>
-          <p:cNvSpPr/>
-          <p:nvPr/>
-        </p:nvSpPr>
-        <p:spPr>
-          <a:xfrm>
-            <a:off x="6245352" y="3337560"/>
+          <p:cNvPr id="13" name="Text 9"/>
+          <p:cNvSpPr/>
+          <p:nvPr/>
+        </p:nvSpPr>
+        <p:spPr>
+          <a:xfrm>
+            <a:off x="2112264" y="3337560"/>
             <a:ext cx="1737360" cy="320040"/>
           </a:xfrm>
           <a:prstGeom prst="rect">
@@ -6161,19 +5921,19 @@
           <a:bodyPr wrap="square" lIns="0" tIns="0" rIns="0" bIns="0" rtlCol="0" anchor="ctr"/>
           <a:lstStyle/>
           <a:p>
-            <a:pPr algn="ctr" indent="0" marL="0">
+            <a:pPr marL="0" indent="0" algn="ctr">
               <a:buNone/>
             </a:pPr>
             <a:r>
               <a:rPr lang="en-US" sz="1300" b="1" dirty="0">
                 <a:solidFill>
-                  <a:srgbClr val="D4AF37"/>
-                </a:solidFill>
-                <a:latin typeface="Calibri" pitchFamily="34" charset="0"/>
-                <a:ea typeface="Calibri" pitchFamily="34" charset="-122"/>
-                <a:cs typeface="Calibri" pitchFamily="34" charset="-120"/>
-              </a:rPr>
-              <a:t>Normalização</a:t>
+                  <a:srgbClr val="1E2761"/>
+                </a:solidFill>
+                <a:latin typeface="Calibri" pitchFamily="34" charset="0"/>
+                <a:ea typeface="Calibri" pitchFamily="34" charset="-122"/>
+                <a:cs typeface="Calibri" pitchFamily="34" charset="-120"/>
+              </a:rPr>
+              <a:t>Exploração</a:t>
             </a:r>
             <a:endParaRPr lang="en-US" sz="1300" dirty="0"/>
           </a:p>
@@ -6181,13 +5941,13 @@
       </p:sp>
       <p:sp>
         <p:nvSpPr>
-          <p:cNvPr id="24" name="Text 18"/>
-          <p:cNvSpPr/>
-          <p:nvPr/>
-        </p:nvSpPr>
-        <p:spPr>
-          <a:xfrm>
-            <a:off x="6245352" y="3675888"/>
+          <p:cNvPr id="14" name="Text 10"/>
+          <p:cNvSpPr/>
+          <p:nvPr/>
+        </p:nvSpPr>
+        <p:spPr>
+          <a:xfrm>
+            <a:off x="2112264" y="3675888"/>
             <a:ext cx="1737360" cy="868680"/>
           </a:xfrm>
           <a:prstGeom prst="rect">
@@ -6200,7 +5960,7 @@
           <a:bodyPr wrap="square" lIns="0" tIns="0" rIns="0" bIns="0" rtlCol="0" anchor="ctr"/>
           <a:lstStyle/>
           <a:p>
-            <a:pPr algn="ctr" indent="0" marL="0">
+            <a:pPr marL="0" indent="0" algn="ctr">
               <a:lnSpc>
                 <a:spcPct val="110000"/>
               </a:lnSpc>
@@ -6215,7 +5975,7 @@
                 <a:ea typeface="Calibri" pitchFamily="34" charset="-122"/>
                 <a:cs typeface="Calibri" pitchFamily="34" charset="-120"/>
               </a:rPr>
-              <a:t>Transformação Box-Cox</a:t>
+              <a:t>Curva de Gauss, média, desvio-padrão</a:t>
             </a:r>
             <a:endParaRPr lang="en-US" sz="1000" dirty="0"/>
           </a:p>
@@ -6223,13 +5983,13 @@
       </p:sp>
       <p:sp>
         <p:nvSpPr>
-          <p:cNvPr id="25" name="Shape 19"/>
-          <p:cNvSpPr/>
-          <p:nvPr/>
-        </p:nvSpPr>
-        <p:spPr>
-          <a:xfrm>
-            <a:off x="8814816" y="2468880"/>
+          <p:cNvPr id="15" name="Shape 11"/>
+          <p:cNvSpPr/>
+          <p:nvPr/>
+        </p:nvSpPr>
+        <p:spPr>
+          <a:xfrm>
+            <a:off x="4681728" y="2468880"/>
             <a:ext cx="731520" cy="731520"/>
           </a:xfrm>
           <a:prstGeom prst="ellipse">
@@ -6243,7 +6003,7 @@
       </p:sp>
       <p:pic>
         <p:nvPicPr>
-          <p:cNvPr id="26" name="Image 4" descr="assets/icon_project.png">    </p:cNvPr>
+          <p:cNvPr id="16" name="Image 2" descr="assets/icon_balance.png"/>
           <p:cNvPicPr>
             <a:picLocks noChangeAspect="1"/>
           </p:cNvPicPr>
@@ -6257,7 +6017,7 @@
         </p:blipFill>
         <p:spPr>
           <a:xfrm>
-            <a:off x="9005011" y="2659075"/>
+            <a:off x="4871923" y="2659075"/>
             <a:ext cx="351130" cy="351130"/>
           </a:xfrm>
           <a:prstGeom prst="rect">
@@ -6267,13 +6027,13 @@
       </p:pic>
       <p:sp>
         <p:nvSpPr>
-          <p:cNvPr id="27" name="Text 20"/>
-          <p:cNvSpPr/>
-          <p:nvPr/>
-        </p:nvSpPr>
-        <p:spPr>
-          <a:xfrm>
-            <a:off x="8814816" y="2148840"/>
+          <p:cNvPr id="17" name="Text 12"/>
+          <p:cNvSpPr/>
+          <p:nvPr/>
+        </p:nvSpPr>
+        <p:spPr>
+          <a:xfrm>
+            <a:off x="4681728" y="2148840"/>
             <a:ext cx="731520" cy="274320"/>
           </a:xfrm>
           <a:prstGeom prst="rect">
@@ -6286,7 +6046,7 @@
           <a:bodyPr wrap="square" lIns="0" tIns="0" rIns="0" bIns="0" rtlCol="0" anchor="ctr"/>
           <a:lstStyle/>
           <a:p>
-            <a:pPr algn="ctr" indent="0" marL="0">
+            <a:pPr marL="0" indent="0" algn="ctr">
               <a:buNone/>
             </a:pPr>
             <a:r>
@@ -6298,7 +6058,7 @@
                 <a:ea typeface="Calibri" pitchFamily="34" charset="-122"/>
                 <a:cs typeface="Calibri" pitchFamily="34" charset="-120"/>
               </a:rPr>
-              <a:t>5</a:t>
+              <a:t>3</a:t>
             </a:r>
             <a:endParaRPr lang="en-US" sz="1100" dirty="0"/>
           </a:p>
@@ -6306,13 +6066,13 @@
       </p:sp>
       <p:sp>
         <p:nvSpPr>
-          <p:cNvPr id="28" name="Text 21"/>
-          <p:cNvSpPr/>
-          <p:nvPr/>
-        </p:nvSpPr>
-        <p:spPr>
-          <a:xfrm>
-            <a:off x="8311896" y="3337560"/>
+          <p:cNvPr id="18" name="Text 13"/>
+          <p:cNvSpPr/>
+          <p:nvPr/>
+        </p:nvSpPr>
+        <p:spPr>
+          <a:xfrm>
+            <a:off x="4178808" y="3337560"/>
             <a:ext cx="1737360" cy="320040"/>
           </a:xfrm>
           <a:prstGeom prst="rect">
@@ -6325,7 +6085,7 @@
           <a:bodyPr wrap="square" lIns="0" tIns="0" rIns="0" bIns="0" rtlCol="0" anchor="ctr"/>
           <a:lstStyle/>
           <a:p>
-            <a:pPr algn="ctr" indent="0" marL="0">
+            <a:pPr marL="0" indent="0" algn="ctr">
               <a:buNone/>
             </a:pPr>
             <a:r>
@@ -6337,7 +6097,7 @@
                 <a:ea typeface="Calibri" pitchFamily="34" charset="-122"/>
                 <a:cs typeface="Calibri" pitchFamily="34" charset="-120"/>
               </a:rPr>
-              <a:t>Modelagem</a:t>
+              <a:t>Testes</a:t>
             </a:r>
             <a:endParaRPr lang="en-US" sz="1300" dirty="0"/>
           </a:p>
@@ -6345,13 +6105,13 @@
       </p:sp>
       <p:sp>
         <p:nvSpPr>
-          <p:cNvPr id="29" name="Text 22"/>
-          <p:cNvSpPr/>
-          <p:nvPr/>
-        </p:nvSpPr>
-        <p:spPr>
-          <a:xfrm>
-            <a:off x="8311896" y="3675888"/>
+          <p:cNvPr id="19" name="Text 14"/>
+          <p:cNvSpPr/>
+          <p:nvPr/>
+        </p:nvSpPr>
+        <p:spPr>
+          <a:xfrm>
+            <a:off x="4178808" y="3675888"/>
             <a:ext cx="1737360" cy="868680"/>
           </a:xfrm>
           <a:prstGeom prst="rect">
@@ -6364,7 +6124,7 @@
           <a:bodyPr wrap="square" lIns="0" tIns="0" rIns="0" bIns="0" rtlCol="0" anchor="ctr"/>
           <a:lstStyle/>
           <a:p>
-            <a:pPr algn="ctr" indent="0" marL="0">
+            <a:pPr marL="0" indent="0" algn="ctr">
               <a:lnSpc>
                 <a:spcPct val="110000"/>
               </a:lnSpc>
@@ -6379,7 +6139,7 @@
                 <a:ea typeface="Calibri" pitchFamily="34" charset="-122"/>
                 <a:cs typeface="Calibri" pitchFamily="34" charset="-120"/>
               </a:rPr>
-              <a:t>CatBoost para prever remuneração</a:t>
+              <a:t>Kolmogorov-Smirnov e Shapiro-Wilk</a:t>
             </a:r>
             <a:endParaRPr lang="en-US" sz="1000" dirty="0"/>
           </a:p>
@@ -6387,27 +6147,27 @@
       </p:sp>
       <p:sp>
         <p:nvSpPr>
-          <p:cNvPr id="30" name="Shape 23"/>
-          <p:cNvSpPr/>
-          <p:nvPr/>
-        </p:nvSpPr>
-        <p:spPr>
-          <a:xfrm>
-            <a:off x="10881360" y="2468880"/>
+          <p:cNvPr id="20" name="Shape 15"/>
+          <p:cNvSpPr/>
+          <p:nvPr/>
+        </p:nvSpPr>
+        <p:spPr>
+          <a:xfrm>
+            <a:off x="6748272" y="2468880"/>
             <a:ext cx="731520" cy="731520"/>
           </a:xfrm>
           <a:prstGeom prst="ellipse">
             <a:avLst/>
           </a:prstGeom>
           <a:solidFill>
-            <a:srgbClr val="1E2761"/>
+            <a:srgbClr val="D4AF37"/>
           </a:solidFill>
           <a:ln/>
         </p:spPr>
       </p:sp>
       <p:pic>
         <p:nvPicPr>
-          <p:cNvPr id="31" name="Image 5" descr="assets/icon_bulb.png">    </p:cNvPr>
+          <p:cNvPr id="21" name="Image 3" descr="assets/icon_calc.png"/>
           <p:cNvPicPr>
             <a:picLocks noChangeAspect="1"/>
           </p:cNvPicPr>
@@ -6421,6 +6181,334 @@
         </p:blipFill>
         <p:spPr>
           <a:xfrm>
+            <a:off x="6938467" y="2659075"/>
+            <a:ext cx="351130" cy="351130"/>
+          </a:xfrm>
+          <a:prstGeom prst="rect">
+            <a:avLst/>
+          </a:prstGeom>
+        </p:spPr>
+      </p:pic>
+      <p:sp>
+        <p:nvSpPr>
+          <p:cNvPr id="22" name="Text 16"/>
+          <p:cNvSpPr/>
+          <p:nvPr/>
+        </p:nvSpPr>
+        <p:spPr>
+          <a:xfrm>
+            <a:off x="6748272" y="2148840"/>
+            <a:ext cx="731520" cy="274320"/>
+          </a:xfrm>
+          <a:prstGeom prst="rect">
+            <a:avLst/>
+          </a:prstGeom>
+          <a:noFill/>
+          <a:ln/>
+        </p:spPr>
+        <p:txBody>
+          <a:bodyPr wrap="square" lIns="0" tIns="0" rIns="0" bIns="0" rtlCol="0" anchor="ctr"/>
+          <a:lstStyle/>
+          <a:p>
+            <a:pPr marL="0" indent="0" algn="ctr">
+              <a:buNone/>
+            </a:pPr>
+            <a:r>
+              <a:rPr lang="en-US" sz="1100" b="1" dirty="0">
+                <a:solidFill>
+                  <a:srgbClr val="64748B"/>
+                </a:solidFill>
+                <a:latin typeface="Calibri" pitchFamily="34" charset="0"/>
+                <a:ea typeface="Calibri" pitchFamily="34" charset="-122"/>
+                <a:cs typeface="Calibri" pitchFamily="34" charset="-120"/>
+              </a:rPr>
+              <a:t>4</a:t>
+            </a:r>
+            <a:endParaRPr lang="en-US" sz="1100" dirty="0"/>
+          </a:p>
+        </p:txBody>
+      </p:sp>
+      <p:sp>
+        <p:nvSpPr>
+          <p:cNvPr id="23" name="Text 17"/>
+          <p:cNvSpPr/>
+          <p:nvPr/>
+        </p:nvSpPr>
+        <p:spPr>
+          <a:xfrm>
+            <a:off x="6245352" y="3337560"/>
+            <a:ext cx="1737360" cy="320040"/>
+          </a:xfrm>
+          <a:prstGeom prst="rect">
+            <a:avLst/>
+          </a:prstGeom>
+          <a:noFill/>
+          <a:ln/>
+        </p:spPr>
+        <p:txBody>
+          <a:bodyPr wrap="square" lIns="0" tIns="0" rIns="0" bIns="0" rtlCol="0" anchor="ctr"/>
+          <a:lstStyle/>
+          <a:p>
+            <a:pPr marL="0" indent="0" algn="ctr">
+              <a:buNone/>
+            </a:pPr>
+            <a:r>
+              <a:rPr lang="en-US" sz="1300" b="1" dirty="0">
+                <a:solidFill>
+                  <a:srgbClr val="D4AF37"/>
+                </a:solidFill>
+                <a:latin typeface="Calibri" pitchFamily="34" charset="0"/>
+                <a:ea typeface="Calibri" pitchFamily="34" charset="-122"/>
+                <a:cs typeface="Calibri" pitchFamily="34" charset="-120"/>
+              </a:rPr>
+              <a:t>Normalização</a:t>
+            </a:r>
+            <a:endParaRPr lang="en-US" sz="1300" dirty="0"/>
+          </a:p>
+        </p:txBody>
+      </p:sp>
+      <p:sp>
+        <p:nvSpPr>
+          <p:cNvPr id="24" name="Text 18"/>
+          <p:cNvSpPr/>
+          <p:nvPr/>
+        </p:nvSpPr>
+        <p:spPr>
+          <a:xfrm>
+            <a:off x="6245352" y="3675888"/>
+            <a:ext cx="1737360" cy="868680"/>
+          </a:xfrm>
+          <a:prstGeom prst="rect">
+            <a:avLst/>
+          </a:prstGeom>
+          <a:noFill/>
+          <a:ln/>
+        </p:spPr>
+        <p:txBody>
+          <a:bodyPr wrap="square" lIns="0" tIns="0" rIns="0" bIns="0" rtlCol="0" anchor="ctr"/>
+          <a:lstStyle/>
+          <a:p>
+            <a:pPr marL="0" indent="0" algn="ctr">
+              <a:lnSpc>
+                <a:spcPct val="110000"/>
+              </a:lnSpc>
+              <a:buNone/>
+            </a:pPr>
+            <a:r>
+              <a:rPr lang="en-US" sz="1000" dirty="0">
+                <a:solidFill>
+                  <a:srgbClr val="64748B"/>
+                </a:solidFill>
+                <a:latin typeface="Calibri" pitchFamily="34" charset="0"/>
+                <a:ea typeface="Calibri" pitchFamily="34" charset="-122"/>
+                <a:cs typeface="Calibri" pitchFamily="34" charset="-120"/>
+              </a:rPr>
+              <a:t>Transformação Box-Cox</a:t>
+            </a:r>
+            <a:endParaRPr lang="en-US" sz="1000" dirty="0"/>
+          </a:p>
+        </p:txBody>
+      </p:sp>
+      <p:sp>
+        <p:nvSpPr>
+          <p:cNvPr id="25" name="Shape 19"/>
+          <p:cNvSpPr/>
+          <p:nvPr/>
+        </p:nvSpPr>
+        <p:spPr>
+          <a:xfrm>
+            <a:off x="8814816" y="2468880"/>
+            <a:ext cx="731520" cy="731520"/>
+          </a:xfrm>
+          <a:prstGeom prst="ellipse">
+            <a:avLst/>
+          </a:prstGeom>
+          <a:solidFill>
+            <a:srgbClr val="1E2761"/>
+          </a:solidFill>
+          <a:ln/>
+        </p:spPr>
+      </p:sp>
+      <p:pic>
+        <p:nvPicPr>
+          <p:cNvPr id="26" name="Image 4" descr="assets/icon_project.png"/>
+          <p:cNvPicPr>
+            <a:picLocks noChangeAspect="1"/>
+          </p:cNvPicPr>
+          <p:nvPr/>
+        </p:nvPicPr>
+        <p:blipFill>
+          <a:blip r:embed="rId7"/>
+          <a:stretch>
+            <a:fillRect/>
+          </a:stretch>
+        </p:blipFill>
+        <p:spPr>
+          <a:xfrm>
+            <a:off x="9005011" y="2659075"/>
+            <a:ext cx="351130" cy="351130"/>
+          </a:xfrm>
+          <a:prstGeom prst="rect">
+            <a:avLst/>
+          </a:prstGeom>
+        </p:spPr>
+      </p:pic>
+      <p:sp>
+        <p:nvSpPr>
+          <p:cNvPr id="27" name="Text 20"/>
+          <p:cNvSpPr/>
+          <p:nvPr/>
+        </p:nvSpPr>
+        <p:spPr>
+          <a:xfrm>
+            <a:off x="8814816" y="2148840"/>
+            <a:ext cx="731520" cy="274320"/>
+          </a:xfrm>
+          <a:prstGeom prst="rect">
+            <a:avLst/>
+          </a:prstGeom>
+          <a:noFill/>
+          <a:ln/>
+        </p:spPr>
+        <p:txBody>
+          <a:bodyPr wrap="square" lIns="0" tIns="0" rIns="0" bIns="0" rtlCol="0" anchor="ctr"/>
+          <a:lstStyle/>
+          <a:p>
+            <a:pPr marL="0" indent="0" algn="ctr">
+              <a:buNone/>
+            </a:pPr>
+            <a:r>
+              <a:rPr lang="en-US" sz="1100" b="1" dirty="0">
+                <a:solidFill>
+                  <a:srgbClr val="64748B"/>
+                </a:solidFill>
+                <a:latin typeface="Calibri" pitchFamily="34" charset="0"/>
+                <a:ea typeface="Calibri" pitchFamily="34" charset="-122"/>
+                <a:cs typeface="Calibri" pitchFamily="34" charset="-120"/>
+              </a:rPr>
+              <a:t>5</a:t>
+            </a:r>
+            <a:endParaRPr lang="en-US" sz="1100" dirty="0"/>
+          </a:p>
+        </p:txBody>
+      </p:sp>
+      <p:sp>
+        <p:nvSpPr>
+          <p:cNvPr id="28" name="Text 21"/>
+          <p:cNvSpPr/>
+          <p:nvPr/>
+        </p:nvSpPr>
+        <p:spPr>
+          <a:xfrm>
+            <a:off x="8311896" y="3337560"/>
+            <a:ext cx="1737360" cy="320040"/>
+          </a:xfrm>
+          <a:prstGeom prst="rect">
+            <a:avLst/>
+          </a:prstGeom>
+          <a:noFill/>
+          <a:ln/>
+        </p:spPr>
+        <p:txBody>
+          <a:bodyPr wrap="square" lIns="0" tIns="0" rIns="0" bIns="0" rtlCol="0" anchor="ctr"/>
+          <a:lstStyle/>
+          <a:p>
+            <a:pPr marL="0" indent="0" algn="ctr">
+              <a:buNone/>
+            </a:pPr>
+            <a:r>
+              <a:rPr lang="en-US" sz="1300" b="1" dirty="0">
+                <a:solidFill>
+                  <a:srgbClr val="1E2761"/>
+                </a:solidFill>
+                <a:latin typeface="Calibri" pitchFamily="34" charset="0"/>
+                <a:ea typeface="Calibri" pitchFamily="34" charset="-122"/>
+                <a:cs typeface="Calibri" pitchFamily="34" charset="-120"/>
+              </a:rPr>
+              <a:t>Modelagem</a:t>
+            </a:r>
+            <a:endParaRPr lang="en-US" sz="1300" dirty="0"/>
+          </a:p>
+        </p:txBody>
+      </p:sp>
+      <p:sp>
+        <p:nvSpPr>
+          <p:cNvPr id="29" name="Text 22"/>
+          <p:cNvSpPr/>
+          <p:nvPr/>
+        </p:nvSpPr>
+        <p:spPr>
+          <a:xfrm>
+            <a:off x="8311896" y="3675888"/>
+            <a:ext cx="1737360" cy="868680"/>
+          </a:xfrm>
+          <a:prstGeom prst="rect">
+            <a:avLst/>
+          </a:prstGeom>
+          <a:noFill/>
+          <a:ln/>
+        </p:spPr>
+        <p:txBody>
+          <a:bodyPr wrap="square" lIns="0" tIns="0" rIns="0" bIns="0" rtlCol="0" anchor="ctr"/>
+          <a:lstStyle/>
+          <a:p>
+            <a:pPr marL="0" indent="0" algn="ctr">
+              <a:lnSpc>
+                <a:spcPct val="110000"/>
+              </a:lnSpc>
+              <a:buNone/>
+            </a:pPr>
+            <a:r>
+              <a:rPr lang="en-US" sz="1000" dirty="0">
+                <a:solidFill>
+                  <a:srgbClr val="64748B"/>
+                </a:solidFill>
+                <a:latin typeface="Calibri" pitchFamily="34" charset="0"/>
+                <a:ea typeface="Calibri" pitchFamily="34" charset="-122"/>
+                <a:cs typeface="Calibri" pitchFamily="34" charset="-120"/>
+              </a:rPr>
+              <a:t>CatBoost para prever remuneração</a:t>
+            </a:r>
+            <a:endParaRPr lang="en-US" sz="1000" dirty="0"/>
+          </a:p>
+        </p:txBody>
+      </p:sp>
+      <p:sp>
+        <p:nvSpPr>
+          <p:cNvPr id="30" name="Shape 23"/>
+          <p:cNvSpPr/>
+          <p:nvPr/>
+        </p:nvSpPr>
+        <p:spPr>
+          <a:xfrm>
+            <a:off x="10881360" y="2468880"/>
+            <a:ext cx="731520" cy="731520"/>
+          </a:xfrm>
+          <a:prstGeom prst="ellipse">
+            <a:avLst/>
+          </a:prstGeom>
+          <a:solidFill>
+            <a:srgbClr val="1E2761"/>
+          </a:solidFill>
+          <a:ln/>
+        </p:spPr>
+      </p:sp>
+      <p:pic>
+        <p:nvPicPr>
+          <p:cNvPr id="31" name="Image 5" descr="assets/icon_bulb.png"/>
+          <p:cNvPicPr>
+            <a:picLocks noChangeAspect="1"/>
+          </p:cNvPicPr>
+          <p:nvPr/>
+        </p:nvPicPr>
+        <p:blipFill>
+          <a:blip r:embed="rId8"/>
+          <a:stretch>
+            <a:fillRect/>
+          </a:stretch>
+        </p:blipFill>
+        <p:spPr>
+          <a:xfrm>
             <a:off x="11071555" y="2659075"/>
             <a:ext cx="351130" cy="351130"/>
           </a:xfrm>
@@ -6450,7 +6538,7 @@
           <a:bodyPr wrap="square" lIns="0" tIns="0" rIns="0" bIns="0" rtlCol="0" anchor="ctr"/>
           <a:lstStyle/>
           <a:p>
-            <a:pPr algn="ctr" indent="0" marL="0">
+            <a:pPr marL="0" indent="0" algn="ctr">
               <a:buNone/>
             </a:pPr>
             <a:r>
@@ -6489,7 +6577,7 @@
           <a:bodyPr wrap="square" lIns="0" tIns="0" rIns="0" bIns="0" rtlCol="0" anchor="ctr"/>
           <a:lstStyle/>
           <a:p>
-            <a:pPr algn="ctr" indent="0" marL="0">
+            <a:pPr marL="0" indent="0" algn="ctr">
               <a:buNone/>
             </a:pPr>
             <a:r>
@@ -6528,7 +6616,7 @@
           <a:bodyPr wrap="square" lIns="0" tIns="0" rIns="0" bIns="0" rtlCol="0" anchor="ctr"/>
           <a:lstStyle/>
           <a:p>
-            <a:pPr algn="ctr" indent="0" marL="0">
+            <a:pPr marL="0" indent="0" algn="ctr">
               <a:lnSpc>
                 <a:spcPct val="110000"/>
               </a:lnSpc>
@@ -6592,7 +6680,7 @@
           <a:bodyPr wrap="square" lIns="0" tIns="0" rIns="0" bIns="0" rtlCol="0" anchor="ctr"/>
           <a:lstStyle/>
           <a:p>
-            <a:pPr indent="0" marL="0">
+            <a:pPr marL="0" indent="0">
               <a:lnSpc>
                 <a:spcPct val="115000"/>
               </a:lnSpc>
@@ -6609,12 +6697,6 @@
               </a:rPr>
               <a:t>Decisão metodológica: </a:t>
             </a:r>
-            <a:pPr indent="0" marL="0">
-              <a:lnSpc>
-                <a:spcPct val="115000"/>
-              </a:lnSpc>
-              <a:buNone/>
-            </a:pPr>
             <a:r>
               <a:rPr lang="en-US" sz="1250" dirty="0">
                 <a:solidFill>
@@ -6651,7 +6733,7 @@
           <a:bodyPr wrap="square" lIns="0" tIns="0" rIns="0" bIns="0" rtlCol="0" anchor="ctr"/>
           <a:lstStyle/>
           <a:p>
-            <a:pPr algn="l" indent="0" marL="0">
+            <a:pPr marL="0" indent="0" algn="l">
               <a:buNone/>
             </a:pPr>
             <a:r>
@@ -6690,7 +6772,7 @@
           <a:bodyPr wrap="square" lIns="0" tIns="0" rIns="0" bIns="0" rtlCol="0" anchor="ctr"/>
           <a:lstStyle/>
           <a:p>
-            <a:pPr algn="r" indent="0" marL="0">
+            <a:pPr marL="0" indent="0" algn="r">
               <a:buNone/>
             </a:pPr>
             <a:r>
@@ -6724,6 +6806,7 @@
         <a:solidFill>
           <a:srgbClr val="FFFFFF"/>
         </a:solidFill>
+        <a:effectLst/>
       </p:bgPr>
     </p:bg>
     <p:spTree>
@@ -6761,11 +6844,11 @@
           <a:bodyPr wrap="square" lIns="0" tIns="0" rIns="0" bIns="0" rtlCol="0" anchor="ctr"/>
           <a:lstStyle/>
           <a:p>
-            <a:pPr indent="0" marL="0">
-              <a:buNone/>
-            </a:pPr>
-            <a:r>
-              <a:rPr lang="en-US" sz="1300" b="1" spc="200" kern="0" dirty="0">
+            <a:pPr marL="0" indent="0">
+              <a:buNone/>
+            </a:pPr>
+            <a:r>
+              <a:rPr lang="en-US" sz="1300" b="1" kern="0" spc="200" dirty="0">
                 <a:solidFill>
                   <a:srgbClr val="1E2761"/>
                 </a:solidFill>
@@ -6800,7 +6883,7 @@
           <a:bodyPr wrap="square" lIns="0" tIns="0" rIns="0" bIns="0" rtlCol="0" anchor="ctr"/>
           <a:lstStyle/>
           <a:p>
-            <a:pPr indent="0" marL="0">
+            <a:pPr marL="0" indent="0">
               <a:buNone/>
             </a:pPr>
             <a:r>
@@ -6820,7 +6903,7 @@
       </p:sp>
       <p:graphicFrame>
         <p:nvGraphicFramePr>
-          <p:cNvPr id="4" name="Chart 0" descr=""/>
+          <p:cNvPr id="4" name="Chart 0"/>
           <p:cNvGraphicFramePr/>
           <p:nvPr/>
         </p:nvGraphicFramePr>
@@ -6828,9 +6911,9 @@
           <a:off x="457200" y="1463040"/>
           <a:ext cx="6949440" cy="4480560"/>
         </p:xfrm>
-        <a:graphic xmlns:a="http://schemas.openxmlformats.org/drawingml/2006/main">
+        <a:graphic>
           <a:graphicData uri="http://schemas.openxmlformats.org/drawingml/2006/chart">
-            <c:chart xmlns:c="http://schemas.openxmlformats.org/drawingml/2006/chart" r:id="rId1"/>
+            <c:chart xmlns:c="http://schemas.openxmlformats.org/drawingml/2006/chart" xmlns:r="http://schemas.openxmlformats.org/officeDocument/2006/relationships" r:id="rId3"/>
           </a:graphicData>
         </a:graphic>
       </p:graphicFrame>
@@ -6855,7 +6938,7 @@
           </a:solidFill>
           <a:ln/>
           <a:effectLst>
-            <a:outerShdw sx="100000" sy="100000" kx="0" ky="0" algn="bl" rotWithShape="0" blurRad="101600" dist="38100" dir="5400000">
+            <a:outerShdw blurRad="101600" dist="38100" dir="5400000" algn="bl" rotWithShape="0">
               <a:srgbClr val="000000">
                 <a:alpha val="12000"/>
               </a:srgbClr>
@@ -6884,11 +6967,11 @@
           <a:bodyPr wrap="square" lIns="0" tIns="0" rIns="0" bIns="0" rtlCol="0" anchor="ctr"/>
           <a:lstStyle/>
           <a:p>
-            <a:pPr indent="0" marL="0">
-              <a:buNone/>
-            </a:pPr>
-            <a:r>
-              <a:rPr lang="en-US" sz="1100" b="1" spc="100" kern="0" dirty="0">
+            <a:pPr marL="0" indent="0">
+              <a:buNone/>
+            </a:pPr>
+            <a:r>
+              <a:rPr lang="en-US" sz="1100" b="1" kern="0" spc="100" dirty="0">
                 <a:solidFill>
                   <a:srgbClr val="CADCFC"/>
                 </a:solidFill>
@@ -6923,7 +7006,7 @@
           <a:bodyPr wrap="square" lIns="0" tIns="0" rIns="0" bIns="0" rtlCol="0" anchor="ctr"/>
           <a:lstStyle/>
           <a:p>
-            <a:pPr indent="0" marL="0">
+            <a:pPr marL="0" indent="0">
               <a:buNone/>
             </a:pPr>
             <a:r>
@@ -6962,7 +7045,7 @@
           <a:bodyPr wrap="square" lIns="0" tIns="0" rIns="0" bIns="0" rtlCol="0" anchor="ctr"/>
           <a:lstStyle/>
           <a:p>
-            <a:pPr indent="0" marL="0">
+            <a:pPr marL="0" indent="0">
               <a:lnSpc>
                 <a:spcPct val="115000"/>
               </a:lnSpc>
@@ -7026,11 +7109,11 @@
           <a:bodyPr wrap="square" lIns="0" tIns="0" rIns="0" bIns="0" rtlCol="0" anchor="ctr"/>
           <a:lstStyle/>
           <a:p>
-            <a:pPr indent="0" marL="0">
-              <a:buNone/>
-            </a:pPr>
-            <a:r>
-              <a:rPr lang="en-US" sz="1100" b="1" spc="100" kern="0" dirty="0">
+            <a:pPr marL="0" indent="0">
+              <a:buNone/>
+            </a:pPr>
+            <a:r>
+              <a:rPr lang="en-US" sz="1100" b="1" kern="0" spc="100" dirty="0">
                 <a:solidFill>
                   <a:srgbClr val="1E2761"/>
                 </a:solidFill>
@@ -7065,7 +7148,7 @@
           <a:bodyPr wrap="square" lIns="0" tIns="0" rIns="0" bIns="0" rtlCol="0" anchor="t"/>
           <a:lstStyle/>
           <a:p>
-            <a:pPr indent="0" marL="0">
+            <a:pPr marL="0" indent="0">
               <a:lnSpc>
                 <a:spcPct val="120000"/>
               </a:lnSpc>
@@ -7082,12 +7165,6 @@
               </a:rPr>
               <a:t>Agentes Políticos </a:t>
             </a:r>
-            <a:pPr indent="0" marL="0">
-              <a:lnSpc>
-                <a:spcPct val="120000"/>
-              </a:lnSpc>
-              <a:buNone/>
-            </a:pPr>
             <a:r>
               <a:rPr lang="en-US" sz="1200" dirty="0">
                 <a:solidFill>
@@ -7099,12 +7176,6 @@
               </a:rPr>
               <a:t>recebem em média R$ 18.864, contra </a:t>
             </a:r>
-            <a:pPr indent="0" marL="0">
-              <a:lnSpc>
-                <a:spcPct val="120000"/>
-              </a:lnSpc>
-              <a:buNone/>
-            </a:pPr>
             <a:r>
               <a:rPr lang="en-US" sz="1200" b="1" dirty="0">
                 <a:solidFill>
@@ -7116,12 +7187,6 @@
               </a:rPr>
               <a:t>R$ 725 </a:t>
             </a:r>
-            <a:pPr indent="0" marL="0">
-              <a:lnSpc>
-                <a:spcPct val="120000"/>
-              </a:lnSpc>
-              <a:buNone/>
-            </a:pPr>
             <a:r>
               <a:rPr lang="en-US" sz="1200" dirty="0">
                 <a:solidFill>
@@ -7158,7 +7223,7 @@
           <a:bodyPr wrap="square" lIns="0" tIns="0" rIns="0" bIns="0" rtlCol="0" anchor="ctr"/>
           <a:lstStyle/>
           <a:p>
-            <a:pPr algn="l" indent="0" marL="0">
+            <a:pPr marL="0" indent="0" algn="l">
               <a:buNone/>
             </a:pPr>
             <a:r>
@@ -7197,7 +7262,7 @@
           <a:bodyPr wrap="square" lIns="0" tIns="0" rIns="0" bIns="0" rtlCol="0" anchor="ctr"/>
           <a:lstStyle/>
           <a:p>
-            <a:pPr algn="r" indent="0" marL="0">
+            <a:pPr marL="0" indent="0" algn="r">
               <a:buNone/>
             </a:pPr>
             <a:r>
@@ -7231,6 +7296,7 @@
         <a:solidFill>
           <a:srgbClr val="FFFFFF"/>
         </a:solidFill>
+        <a:effectLst/>
       </p:bgPr>
     </p:bg>
     <p:spTree>
@@ -7268,11 +7334,11 @@
           <a:bodyPr wrap="square" lIns="0" tIns="0" rIns="0" bIns="0" rtlCol="0" anchor="ctr"/>
           <a:lstStyle/>
           <a:p>
-            <a:pPr indent="0" marL="0">
-              <a:buNone/>
-            </a:pPr>
-            <a:r>
-              <a:rPr lang="en-US" sz="1300" b="1" spc="200" kern="0" dirty="0">
+            <a:pPr marL="0" indent="0">
+              <a:buNone/>
+            </a:pPr>
+            <a:r>
+              <a:rPr lang="en-US" sz="1300" b="1" kern="0" spc="200" dirty="0">
                 <a:solidFill>
                   <a:srgbClr val="1E2761"/>
                 </a:solidFill>
@@ -7307,7 +7373,7 @@
           <a:bodyPr wrap="square" lIns="0" tIns="0" rIns="0" bIns="0" rtlCol="0" anchor="ctr"/>
           <a:lstStyle/>
           <a:p>
-            <a:pPr indent="0" marL="0">
+            <a:pPr marL="0" indent="0">
               <a:buNone/>
             </a:pPr>
             <a:r>
@@ -7327,14 +7393,14 @@
       </p:sp>
       <p:pic>
         <p:nvPicPr>
-          <p:cNvPr id="4" name="Image 0" descr="assets/hist_antes.png">    </p:cNvPr>
+          <p:cNvPr id="4" name="Image 0" descr="assets/hist_antes.png"/>
           <p:cNvPicPr>
             <a:picLocks noChangeAspect="1"/>
           </p:cNvPicPr>
           <p:nvPr/>
         </p:nvPicPr>
         <p:blipFill>
-          <a:blip r:embed="rId1"/>
+          <a:blip r:embed="rId3"/>
           <a:stretch>
             <a:fillRect/>
           </a:stretch>
@@ -7392,11 +7458,11 @@
           <a:bodyPr wrap="square" lIns="0" tIns="0" rIns="0" bIns="0" rtlCol="0" anchor="ctr"/>
           <a:lstStyle/>
           <a:p>
-            <a:pPr indent="0" marL="0">
-              <a:buNone/>
-            </a:pPr>
-            <a:r>
-              <a:rPr lang="en-US" sz="1000" b="1" spc="50" kern="0" dirty="0">
+            <a:pPr marL="0" indent="0">
+              <a:buNone/>
+            </a:pPr>
+            <a:r>
+              <a:rPr lang="en-US" sz="1000" b="1" kern="0" spc="50" dirty="0">
                 <a:solidFill>
                   <a:srgbClr val="64748B"/>
                 </a:solidFill>
@@ -7431,7 +7497,7 @@
           <a:bodyPr wrap="square" lIns="0" tIns="0" rIns="0" bIns="0" rtlCol="0" anchor="ctr"/>
           <a:lstStyle/>
           <a:p>
-            <a:pPr indent="0" marL="0">
+            <a:pPr marL="0" indent="0">
               <a:buNone/>
             </a:pPr>
             <a:r>
@@ -7470,7 +7536,7 @@
           <a:bodyPr wrap="square" lIns="0" tIns="0" rIns="0" bIns="0" rtlCol="0" anchor="ctr"/>
           <a:lstStyle/>
           <a:p>
-            <a:pPr indent="0" marL="0">
+            <a:pPr marL="0" indent="0">
               <a:buNone/>
             </a:pPr>
             <a:r>
@@ -7531,11 +7597,11 @@
           <a:bodyPr wrap="square" lIns="0" tIns="0" rIns="0" bIns="0" rtlCol="0" anchor="ctr"/>
           <a:lstStyle/>
           <a:p>
-            <a:pPr indent="0" marL="0">
-              <a:buNone/>
-            </a:pPr>
-            <a:r>
-              <a:rPr lang="en-US" sz="1000" b="1" spc="50" kern="0" dirty="0">
+            <a:pPr marL="0" indent="0">
+              <a:buNone/>
+            </a:pPr>
+            <a:r>
+              <a:rPr lang="en-US" sz="1000" b="1" kern="0" spc="50" dirty="0">
                 <a:solidFill>
                   <a:srgbClr val="64748B"/>
                 </a:solidFill>
@@ -7570,7 +7636,7 @@
           <a:bodyPr wrap="square" lIns="0" tIns="0" rIns="0" bIns="0" rtlCol="0" anchor="ctr"/>
           <a:lstStyle/>
           <a:p>
-            <a:pPr indent="0" marL="0">
+            <a:pPr marL="0" indent="0">
               <a:buNone/>
             </a:pPr>
             <a:r>
@@ -7609,7 +7675,7 @@
           <a:bodyPr wrap="square" lIns="0" tIns="0" rIns="0" bIns="0" rtlCol="0" anchor="ctr"/>
           <a:lstStyle/>
           <a:p>
-            <a:pPr indent="0" marL="0">
+            <a:pPr marL="0" indent="0">
               <a:buNone/>
             </a:pPr>
             <a:r>
@@ -7670,11 +7736,11 @@
           <a:bodyPr wrap="square" lIns="0" tIns="0" rIns="0" bIns="0" rtlCol="0" anchor="ctr"/>
           <a:lstStyle/>
           <a:p>
-            <a:pPr indent="0" marL="0">
-              <a:buNone/>
-            </a:pPr>
-            <a:r>
-              <a:rPr lang="en-US" sz="1000" b="1" spc="50" kern="0" dirty="0">
+            <a:pPr marL="0" indent="0">
+              <a:buNone/>
+            </a:pPr>
+            <a:r>
+              <a:rPr lang="en-US" sz="1000" b="1" kern="0" spc="50" dirty="0">
                 <a:solidFill>
                   <a:srgbClr val="64748B"/>
                 </a:solidFill>
@@ -7709,7 +7775,7 @@
           <a:bodyPr wrap="square" lIns="0" tIns="0" rIns="0" bIns="0" rtlCol="0" anchor="ctr"/>
           <a:lstStyle/>
           <a:p>
-            <a:pPr indent="0" marL="0">
+            <a:pPr marL="0" indent="0">
               <a:buNone/>
             </a:pPr>
             <a:r>
@@ -7748,7 +7814,7 @@
           <a:bodyPr wrap="square" lIns="0" tIns="0" rIns="0" bIns="0" rtlCol="0" anchor="ctr"/>
           <a:lstStyle/>
           <a:p>
-            <a:pPr indent="0" marL="0">
+            <a:pPr marL="0" indent="0">
               <a:buNone/>
             </a:pPr>
             <a:r>
@@ -7810,14 +7876,14 @@
       </p:sp>
       <p:pic>
         <p:nvPicPr>
-          <p:cNvPr id="19" name="Image 1" descr="assets/icon_warning.png">    </p:cNvPr>
+          <p:cNvPr id="19" name="Image 1" descr="assets/icon_warning.png"/>
           <p:cNvPicPr>
             <a:picLocks noChangeAspect="1"/>
           </p:cNvPicPr>
           <p:nvPr/>
         </p:nvPicPr>
         <p:blipFill>
-          <a:blip r:embed="rId2"/>
+          <a:blip r:embed="rId4"/>
           <a:stretch>
             <a:fillRect/>
           </a:stretch>
@@ -7853,7 +7919,7 @@
           <a:bodyPr wrap="square" lIns="0" tIns="0" rIns="0" bIns="0" rtlCol="0" anchor="ctr"/>
           <a:lstStyle/>
           <a:p>
-            <a:pPr indent="0" marL="0">
+            <a:pPr marL="0" indent="0">
               <a:lnSpc>
                 <a:spcPct val="115000"/>
               </a:lnSpc>
@@ -7870,12 +7936,6 @@
               </a:rPr>
               <a:t>KS e Shapiro-Wilk: </a:t>
             </a:r>
-            <a:pPr indent="0" marL="0">
-              <a:lnSpc>
-                <a:spcPct val="115000"/>
-              </a:lnSpc>
-              <a:buNone/>
-            </a:pPr>
             <a:r>
               <a:rPr lang="en-US" sz="1150" dirty="0">
                 <a:solidFill>
@@ -7912,7 +7972,7 @@
           <a:bodyPr wrap="square" lIns="0" tIns="0" rIns="0" bIns="0" rtlCol="0" anchor="ctr"/>
           <a:lstStyle/>
           <a:p>
-            <a:pPr algn="l" indent="0" marL="0">
+            <a:pPr marL="0" indent="0" algn="l">
               <a:buNone/>
             </a:pPr>
             <a:r>
@@ -7951,7 +8011,7 @@
           <a:bodyPr wrap="square" lIns="0" tIns="0" rIns="0" bIns="0" rtlCol="0" anchor="ctr"/>
           <a:lstStyle/>
           <a:p>
-            <a:pPr algn="r" indent="0" marL="0">
+            <a:pPr marL="0" indent="0" algn="r">
               <a:buNone/>
             </a:pPr>
             <a:r>
@@ -7985,6 +8045,7 @@
         <a:solidFill>
           <a:srgbClr val="FFFFFF"/>
         </a:solidFill>
+        <a:effectLst/>
       </p:bgPr>
     </p:bg>
     <p:spTree>
@@ -8022,11 +8083,11 @@
           <a:bodyPr wrap="square" lIns="0" tIns="0" rIns="0" bIns="0" rtlCol="0" anchor="ctr"/>
           <a:lstStyle/>
           <a:p>
-            <a:pPr indent="0" marL="0">
-              <a:buNone/>
-            </a:pPr>
-            <a:r>
-              <a:rPr lang="en-US" sz="1300" b="1" spc="200" kern="0" dirty="0">
+            <a:pPr marL="0" indent="0">
+              <a:buNone/>
+            </a:pPr>
+            <a:r>
+              <a:rPr lang="en-US" sz="1300" b="1" kern="0" spc="200" dirty="0">
                 <a:solidFill>
                   <a:srgbClr val="1E2761"/>
                 </a:solidFill>
@@ -8061,7 +8122,7 @@
           <a:bodyPr wrap="square" lIns="0" tIns="0" rIns="0" bIns="0" rtlCol="0" anchor="ctr"/>
           <a:lstStyle/>
           <a:p>
-            <a:pPr indent="0" marL="0">
+            <a:pPr marL="0" indent="0">
               <a:buNone/>
             </a:pPr>
             <a:r>
@@ -8081,14 +8142,14 @@
       </p:sp>
       <p:pic>
         <p:nvPicPr>
-          <p:cNvPr id="4" name="Image 0" descr="assets/hist_depois.png">    </p:cNvPr>
+          <p:cNvPr id="4" name="Image 0" descr="assets/hist_depois.png"/>
           <p:cNvPicPr>
             <a:picLocks noChangeAspect="1"/>
           </p:cNvPicPr>
           <p:nvPr/>
         </p:nvPicPr>
         <p:blipFill>
-          <a:blip r:embed="rId1"/>
+          <a:blip r:embed="rId3"/>
           <a:stretch>
             <a:fillRect/>
           </a:stretch>
@@ -8124,7 +8185,7 @@
           <a:bodyPr wrap="square" lIns="0" tIns="0" rIns="0" bIns="0" rtlCol="0" anchor="ctr"/>
           <a:lstStyle/>
           <a:p>
-            <a:pPr indent="0" marL="0">
+            <a:pPr marL="0" indent="0">
               <a:buNone/>
             </a:pPr>
             <a:r>
@@ -8185,11 +8246,11 @@
           <a:bodyPr wrap="square" lIns="0" tIns="0" rIns="0" bIns="0" rtlCol="0" anchor="ctr"/>
           <a:lstStyle/>
           <a:p>
-            <a:pPr indent="0" marL="0">
-              <a:buNone/>
-            </a:pPr>
-            <a:r>
-              <a:rPr lang="en-US" sz="1000" b="1" spc="50" kern="0" dirty="0">
+            <a:pPr marL="0" indent="0">
+              <a:buNone/>
+            </a:pPr>
+            <a:r>
+              <a:rPr lang="en-US" sz="1000" b="1" kern="0" spc="50" dirty="0">
                 <a:solidFill>
                   <a:srgbClr val="64748B"/>
                 </a:solidFill>
@@ -8224,7 +8285,7 @@
           <a:bodyPr wrap="square" lIns="0" tIns="0" rIns="0" bIns="0" rtlCol="0" anchor="ctr"/>
           <a:lstStyle/>
           <a:p>
-            <a:pPr indent="0" marL="0">
+            <a:pPr marL="0" indent="0">
               <a:buNone/>
             </a:pPr>
             <a:r>
@@ -8238,9 +8299,6 @@
               </a:rPr>
               <a:t>4.07</a:t>
             </a:r>
-            <a:pPr indent="0" marL="0">
-              <a:buNone/>
-            </a:pPr>
             <a:r>
               <a:rPr lang="en-US" sz="2200" dirty="0">
                 <a:solidFill>
@@ -8252,9 +8310,6 @@
               </a:rPr>
               <a:t>   →   </a:t>
             </a:r>
-            <a:pPr indent="0" marL="0">
-              <a:buNone/>
-            </a:pPr>
             <a:r>
               <a:rPr lang="en-US" sz="3000" b="1" dirty="0">
                 <a:solidFill>
@@ -8314,14 +8369,14 @@
       </p:sp>
       <p:pic>
         <p:nvPicPr>
-          <p:cNvPr id="11" name="Image 1" descr="assets/icon_check_navy.png">    </p:cNvPr>
+          <p:cNvPr id="11" name="Image 1" descr="assets/icon_check_navy.png"/>
           <p:cNvPicPr>
             <a:picLocks noChangeAspect="1"/>
           </p:cNvPicPr>
           <p:nvPr/>
         </p:nvPicPr>
         <p:blipFill>
-          <a:blip r:embed="rId2"/>
+          <a:blip r:embed="rId4"/>
           <a:stretch>
             <a:fillRect/>
           </a:stretch>
@@ -8357,7 +8412,7 @@
           <a:bodyPr wrap="square" lIns="0" tIns="0" rIns="0" bIns="0" rtlCol="0" anchor="ctr"/>
           <a:lstStyle/>
           <a:p>
-            <a:pPr indent="0" marL="0">
+            <a:pPr marL="0" indent="0">
               <a:buNone/>
             </a:pPr>
             <a:r>
@@ -8396,7 +8451,7 @@
           <a:bodyPr wrap="square" lIns="0" tIns="0" rIns="0" bIns="0" rtlCol="0" anchor="ctr"/>
           <a:lstStyle/>
           <a:p>
-            <a:pPr indent="0" marL="0">
+            <a:pPr marL="0" indent="0">
               <a:lnSpc>
                 <a:spcPct val="120000"/>
               </a:lnSpc>
@@ -8460,11 +8515,11 @@
           <a:bodyPr wrap="square" lIns="0" tIns="0" rIns="0" bIns="0" rtlCol="0" anchor="ctr"/>
           <a:lstStyle/>
           <a:p>
-            <a:pPr indent="0" marL="0">
-              <a:buNone/>
-            </a:pPr>
-            <a:r>
-              <a:rPr lang="en-US" sz="1050" b="1" spc="50" kern="0" dirty="0">
+            <a:pPr marL="0" indent="0">
+              <a:buNone/>
+            </a:pPr>
+            <a:r>
+              <a:rPr lang="en-US" sz="1050" b="1" kern="0" spc="50" dirty="0">
                 <a:solidFill>
                   <a:srgbClr val="D4AF37"/>
                 </a:solidFill>
@@ -8499,7 +8554,7 @@
           <a:bodyPr wrap="square" lIns="0" tIns="0" rIns="0" bIns="0" rtlCol="0" anchor="t"/>
           <a:lstStyle/>
           <a:p>
-            <a:pPr indent="0" marL="0">
+            <a:pPr marL="0" indent="0">
               <a:lnSpc>
                 <a:spcPct val="118000"/>
               </a:lnSpc>
@@ -8516,12 +8571,6 @@
               </a:rPr>
               <a:t>Com N = 17.604, </a:t>
             </a:r>
-            <a:pPr indent="0" marL="0">
-              <a:lnSpc>
-                <a:spcPct val="118000"/>
-              </a:lnSpc>
-              <a:buNone/>
-            </a:pPr>
             <a:r>
               <a:rPr lang="en-US" sz="1200" b="1" dirty="0">
                 <a:solidFill>
@@ -8533,12 +8582,6 @@
               </a:rPr>
               <a:t>KS e Shapiro-Wilk se tornam hipersensíveis</a:t>
             </a:r>
-            <a:pPr indent="0" marL="0">
-              <a:lnSpc>
-                <a:spcPct val="118000"/>
-              </a:lnSpc>
-              <a:buNone/>
-            </a:pPr>
             <a:r>
               <a:rPr lang="en-US" sz="1200" dirty="0">
                 <a:solidFill>
@@ -8575,7 +8618,7 @@
           <a:bodyPr wrap="square" lIns="0" tIns="0" rIns="0" bIns="0" rtlCol="0" anchor="ctr"/>
           <a:lstStyle/>
           <a:p>
-            <a:pPr algn="l" indent="0" marL="0">
+            <a:pPr marL="0" indent="0" algn="l">
               <a:buNone/>
             </a:pPr>
             <a:r>
@@ -8614,7 +8657,7 @@
           <a:bodyPr wrap="square" lIns="0" tIns="0" rIns="0" bIns="0" rtlCol="0" anchor="ctr"/>
           <a:lstStyle/>
           <a:p>
-            <a:pPr algn="r" indent="0" marL="0">
+            <a:pPr marL="0" indent="0" algn="r">
               <a:buNone/>
             </a:pPr>
             <a:r>
@@ -8648,6 +8691,7 @@
         <a:solidFill>
           <a:srgbClr val="FFFFFF"/>
         </a:solidFill>
+        <a:effectLst/>
       </p:bgPr>
     </p:bg>
     <p:spTree>
@@ -8685,11 +8729,11 @@
           <a:bodyPr wrap="square" lIns="0" tIns="0" rIns="0" bIns="0" rtlCol="0" anchor="ctr"/>
           <a:lstStyle/>
           <a:p>
-            <a:pPr indent="0" marL="0">
-              <a:buNone/>
-            </a:pPr>
-            <a:r>
-              <a:rPr lang="en-US" sz="1300" b="1" spc="200" kern="0" dirty="0">
+            <a:pPr marL="0" indent="0">
+              <a:buNone/>
+            </a:pPr>
+            <a:r>
+              <a:rPr lang="en-US" sz="1300" b="1" kern="0" spc="200" dirty="0">
                 <a:solidFill>
                   <a:srgbClr val="1E2761"/>
                 </a:solidFill>
@@ -8724,7 +8768,7 @@
           <a:bodyPr wrap="square" lIns="0" tIns="0" rIns="0" bIns="0" rtlCol="0" anchor="ctr"/>
           <a:lstStyle/>
           <a:p>
-            <a:pPr indent="0" marL="0">
+            <a:pPr marL="0" indent="0">
               <a:buNone/>
             </a:pPr>
             <a:r>
@@ -8758,17 +8802,41 @@
         </p:nvGraphicFramePr>
         <p:xfrm>
           <a:off x="548640" y="1554480"/>
-          <a:ext cx="10972800" cy="1737360"/>
+          <a:ext cx="10972800" cy="1719072"/>
         </p:xfrm>
         <a:graphic>
           <a:graphicData uri="http://schemas.openxmlformats.org/drawingml/2006/table">
             <a:tbl>
               <a:tblPr/>
               <a:tblGrid>
-                <a:gridCol w="3017520"/>
-                <a:gridCol w="2743200"/>
-                <a:gridCol w="2606040"/>
-                <a:gridCol w="2606040"/>
+                <a:gridCol w="3017520">
+                  <a:extLst>
+                    <a:ext uri="{9D8B030D-6E8A-4147-A177-3AD203B41FA5}">
+                      <a16:colId xmlns:a16="http://schemas.microsoft.com/office/drawing/2014/main" val="20000"/>
+                    </a:ext>
+                  </a:extLst>
+                </a:gridCol>
+                <a:gridCol w="2743200">
+                  <a:extLst>
+                    <a:ext uri="{9D8B030D-6E8A-4147-A177-3AD203B41FA5}">
+                      <a16:colId xmlns:a16="http://schemas.microsoft.com/office/drawing/2014/main" val="20001"/>
+                    </a:ext>
+                  </a:extLst>
+                </a:gridCol>
+                <a:gridCol w="2606040">
+                  <a:extLst>
+                    <a:ext uri="{9D8B030D-6E8A-4147-A177-3AD203B41FA5}">
+                      <a16:colId xmlns:a16="http://schemas.microsoft.com/office/drawing/2014/main" val="20002"/>
+                    </a:ext>
+                  </a:extLst>
+                </a:gridCol>
+                <a:gridCol w="2606040">
+                  <a:extLst>
+                    <a:ext uri="{9D8B030D-6E8A-4147-A177-3AD203B41FA5}">
+                      <a16:colId xmlns:a16="http://schemas.microsoft.com/office/drawing/2014/main" val="20003"/>
+                    </a:ext>
+                  </a:extLst>
+                </a:gridCol>
               </a:tblGrid>
               <a:tr h="429768">
                 <a:tc>
@@ -8776,7 +8844,7 @@
                     <a:bodyPr/>
                     <a:lstStyle/>
                     <a:p>
-                      <a:pPr algn="l" indent="0" marL="0">
+                      <a:pPr marL="0" indent="0" algn="l">
                         <a:buNone/>
                       </a:pPr>
                       <a:r>
@@ -8797,7 +8865,7 @@
                       </a:endParaRPr>
                     </a:p>
                   </a:txBody>
-                  <a:tcPr marL="91440" marR="91440" marT="45720" marB="45720" anchor="ctr">
+                  <a:tcPr anchor="ctr">
                     <a:lnL w="9525" cap="flat" cmpd="sng" algn="ctr">
                       <a:solidFill>
                         <a:srgbClr val="E2E8F0"/>
@@ -8844,7 +8912,7 @@
                     <a:bodyPr/>
                     <a:lstStyle/>
                     <a:p>
-                      <a:pPr algn="l" indent="0" marL="0">
+                      <a:pPr marL="0" indent="0" algn="l">
                         <a:buNone/>
                       </a:pPr>
                       <a:r>
@@ -8865,7 +8933,7 @@
                       </a:endParaRPr>
                     </a:p>
                   </a:txBody>
-                  <a:tcPr marL="91440" marR="91440" marT="45720" marB="45720" anchor="ctr">
+                  <a:tcPr anchor="ctr">
                     <a:lnL w="9525" cap="flat" cmpd="sng" algn="ctr">
                       <a:solidFill>
                         <a:srgbClr val="E2E8F0"/>
@@ -8912,7 +8980,7 @@
                     <a:bodyPr/>
                     <a:lstStyle/>
                     <a:p>
-                      <a:pPr algn="l" indent="0" marL="0">
+                      <a:pPr marL="0" indent="0" algn="l">
                         <a:buNone/>
                       </a:pPr>
                       <a:r>
@@ -8933,7 +9001,7 @@
                       </a:endParaRPr>
                     </a:p>
                   </a:txBody>
-                  <a:tcPr marL="91440" marR="91440" marT="45720" marB="45720" anchor="ctr">
+                  <a:tcPr anchor="ctr">
                     <a:lnL w="9525" cap="flat" cmpd="sng" algn="ctr">
                       <a:solidFill>
                         <a:srgbClr val="E2E8F0"/>
@@ -8980,7 +9048,7 @@
                     <a:bodyPr/>
                     <a:lstStyle/>
                     <a:p>
-                      <a:pPr algn="l" indent="0" marL="0">
+                      <a:pPr marL="0" indent="0" algn="l">
                         <a:buNone/>
                       </a:pPr>
                       <a:r>
@@ -9001,7 +9069,7 @@
                       </a:endParaRPr>
                     </a:p>
                   </a:txBody>
-                  <a:tcPr marL="91440" marR="91440" marT="45720" marB="45720" anchor="ctr">
+                  <a:tcPr anchor="ctr">
                     <a:lnL w="9525" cap="flat" cmpd="sng" algn="ctr">
                       <a:solidFill>
                         <a:srgbClr val="E2E8F0"/>
@@ -9043,6 +9111,11 @@
                     </a:solidFill>
                   </a:tcPr>
                 </a:tc>
+                <a:extLst>
+                  <a:ext uri="{0D108BD9-81ED-4DB2-BD59-A6C34878D82A}">
+                    <a16:rowId xmlns:a16="http://schemas.microsoft.com/office/drawing/2014/main" val="10000"/>
+                  </a:ext>
+                </a:extLst>
               </a:tr>
               <a:tr h="429768">
                 <a:tc>
@@ -9050,7 +9123,7 @@
                     <a:bodyPr/>
                     <a:lstStyle/>
                     <a:p>
-                      <a:pPr algn="l" indent="0" marL="0">
+                      <a:pPr marL="0" indent="0" algn="l">
                         <a:buNone/>
                       </a:pPr>
                       <a:r>
@@ -9071,7 +9144,7 @@
                       </a:endParaRPr>
                     </a:p>
                   </a:txBody>
-                  <a:tcPr marL="91440" marR="91440" marT="45720" marB="45720" anchor="ctr">
+                  <a:tcPr anchor="ctr">
                     <a:lnL w="9525" cap="flat" cmpd="sng" algn="ctr">
                       <a:solidFill>
                         <a:srgbClr val="E2E8F0"/>
@@ -9115,7 +9188,7 @@
                     <a:bodyPr/>
                     <a:lstStyle/>
                     <a:p>
-                      <a:pPr algn="l" indent="0" marL="0">
+                      <a:pPr marL="0" indent="0" algn="l">
                         <a:buNone/>
                       </a:pPr>
                       <a:r>
@@ -9136,7 +9209,7 @@
                       </a:endParaRPr>
                     </a:p>
                   </a:txBody>
-                  <a:tcPr marL="91440" marR="91440" marT="45720" marB="45720" anchor="ctr">
+                  <a:tcPr anchor="ctr">
                     <a:lnL w="9525" cap="flat" cmpd="sng" algn="ctr">
                       <a:solidFill>
                         <a:srgbClr val="E2E8F0"/>
@@ -9180,7 +9253,7 @@
                     <a:bodyPr/>
                     <a:lstStyle/>
                     <a:p>
-                      <a:pPr algn="l" indent="0" marL="0">
+                      <a:pPr marL="0" indent="0" algn="l">
                         <a:buNone/>
                       </a:pPr>
                       <a:r>
@@ -9201,7 +9274,7 @@
                       </a:endParaRPr>
                     </a:p>
                   </a:txBody>
-                  <a:tcPr marL="91440" marR="91440" marT="45720" marB="45720" anchor="ctr">
+                  <a:tcPr anchor="ctr">
                     <a:lnL w="9525" cap="flat" cmpd="sng" algn="ctr">
                       <a:solidFill>
                         <a:srgbClr val="E2E8F0"/>
@@ -9245,7 +9318,7 @@
                     <a:bodyPr/>
                     <a:lstStyle/>
                     <a:p>
-                      <a:pPr algn="l" indent="0" marL="0">
+                      <a:pPr marL="0" indent="0" algn="l">
                         <a:buNone/>
                       </a:pPr>
                       <a:r>
@@ -9266,7 +9339,7 @@
                       </a:endParaRPr>
                     </a:p>
                   </a:txBody>
-                  <a:tcPr marL="91440" marR="91440" marT="45720" marB="45720" anchor="ctr">
+                  <a:tcPr anchor="ctr">
                     <a:lnL w="9525" cap="flat" cmpd="sng" algn="ctr">
                       <a:solidFill>
                         <a:srgbClr val="E2E8F0"/>
@@ -9305,6 +9378,11 @@
                     </a:lnB>
                   </a:tcPr>
                 </a:tc>
+                <a:extLst>
+                  <a:ext uri="{0D108BD9-81ED-4DB2-BD59-A6C34878D82A}">
+                    <a16:rowId xmlns:a16="http://schemas.microsoft.com/office/drawing/2014/main" val="10001"/>
+                  </a:ext>
+                </a:extLst>
               </a:tr>
               <a:tr h="429768">
                 <a:tc>
@@ -9312,7 +9390,7 @@
                     <a:bodyPr/>
                     <a:lstStyle/>
                     <a:p>
-                      <a:pPr algn="l" indent="0" marL="0">
+                      <a:pPr marL="0" indent="0" algn="l">
                         <a:buNone/>
                       </a:pPr>
                       <a:r>
@@ -9333,7 +9411,7 @@
                       </a:endParaRPr>
                     </a:p>
                   </a:txBody>
-                  <a:tcPr marL="91440" marR="91440" marT="45720" marB="45720" anchor="ctr">
+                  <a:tcPr anchor="ctr">
                     <a:lnL w="9525" cap="flat" cmpd="sng" algn="ctr">
                       <a:solidFill>
                         <a:srgbClr val="E2E8F0"/>
@@ -9377,7 +9455,7 @@
                     <a:bodyPr/>
                     <a:lstStyle/>
                     <a:p>
-                      <a:pPr algn="l" indent="0" marL="0">
+                      <a:pPr marL="0" indent="0" algn="l">
                         <a:buNone/>
                       </a:pPr>
                       <a:r>
@@ -9398,7 +9476,7 @@
                       </a:endParaRPr>
                     </a:p>
                   </a:txBody>
-                  <a:tcPr marL="91440" marR="91440" marT="45720" marB="45720" anchor="ctr">
+                  <a:tcPr anchor="ctr">
                     <a:lnL w="9525" cap="flat" cmpd="sng" algn="ctr">
                       <a:solidFill>
                         <a:srgbClr val="E2E8F0"/>
@@ -9442,7 +9520,7 @@
                     <a:bodyPr/>
                     <a:lstStyle/>
                     <a:p>
-                      <a:pPr algn="l" indent="0" marL="0">
+                      <a:pPr marL="0" indent="0" algn="l">
                         <a:buNone/>
                       </a:pPr>
                       <a:r>
@@ -9463,7 +9541,7 @@
                       </a:endParaRPr>
                     </a:p>
                   </a:txBody>
-                  <a:tcPr marL="91440" marR="91440" marT="45720" marB="45720" anchor="ctr">
+                  <a:tcPr anchor="ctr">
                     <a:lnL w="9525" cap="flat" cmpd="sng" algn="ctr">
                       <a:solidFill>
                         <a:srgbClr val="E2E8F0"/>
@@ -9507,7 +9585,7 @@
                     <a:bodyPr/>
                     <a:lstStyle/>
                     <a:p>
-                      <a:pPr algn="l" indent="0" marL="0">
+                      <a:pPr marL="0" indent="0" algn="l">
                         <a:buNone/>
                       </a:pPr>
                       <a:r>
@@ -9528,7 +9606,7 @@
                       </a:endParaRPr>
                     </a:p>
                   </a:txBody>
-                  <a:tcPr marL="91440" marR="91440" marT="45720" marB="45720" anchor="ctr">
+                  <a:tcPr anchor="ctr">
                     <a:lnL w="9525" cap="flat" cmpd="sng" algn="ctr">
                       <a:solidFill>
                         <a:srgbClr val="E2E8F0"/>
@@ -9567,6 +9645,11 @@
                     </a:lnB>
                   </a:tcPr>
                 </a:tc>
+                <a:extLst>
+                  <a:ext uri="{0D108BD9-81ED-4DB2-BD59-A6C34878D82A}">
+                    <a16:rowId xmlns:a16="http://schemas.microsoft.com/office/drawing/2014/main" val="10002"/>
+                  </a:ext>
+                </a:extLst>
               </a:tr>
               <a:tr h="429768">
                 <a:tc>
@@ -9574,7 +9657,7 @@
                     <a:bodyPr/>
                     <a:lstStyle/>
                     <a:p>
-                      <a:pPr algn="l" indent="0" marL="0">
+                      <a:pPr marL="0" indent="0" algn="l">
                         <a:buNone/>
                       </a:pPr>
                       <a:r>
@@ -9595,7 +9678,7 @@
                       </a:endParaRPr>
                     </a:p>
                   </a:txBody>
-                  <a:tcPr marL="91440" marR="91440" marT="45720" marB="45720" anchor="ctr">
+                  <a:tcPr anchor="ctr">
                     <a:lnL w="9525" cap="flat" cmpd="sng" algn="ctr">
                       <a:solidFill>
                         <a:srgbClr val="E2E8F0"/>
@@ -9639,7 +9722,7 @@
                     <a:bodyPr/>
                     <a:lstStyle/>
                     <a:p>
-                      <a:pPr algn="l" indent="0" marL="0">
+                      <a:pPr marL="0" indent="0" algn="l">
                         <a:buNone/>
                       </a:pPr>
                       <a:r>
@@ -9660,7 +9743,7 @@
                       </a:endParaRPr>
                     </a:p>
                   </a:txBody>
-                  <a:tcPr marL="91440" marR="91440" marT="45720" marB="45720" anchor="ctr">
+                  <a:tcPr anchor="ctr">
                     <a:lnL w="9525" cap="flat" cmpd="sng" algn="ctr">
                       <a:solidFill>
                         <a:srgbClr val="E2E8F0"/>
@@ -9704,7 +9787,7 @@
                     <a:bodyPr/>
                     <a:lstStyle/>
                     <a:p>
-                      <a:pPr algn="l" indent="0" marL="0">
+                      <a:pPr marL="0" indent="0" algn="l">
                         <a:buNone/>
                       </a:pPr>
                       <a:r>
@@ -9725,7 +9808,7 @@
                       </a:endParaRPr>
                     </a:p>
                   </a:txBody>
-                  <a:tcPr marL="91440" marR="91440" marT="45720" marB="45720" anchor="ctr">
+                  <a:tcPr anchor="ctr">
                     <a:lnL w="9525" cap="flat" cmpd="sng" algn="ctr">
                       <a:solidFill>
                         <a:srgbClr val="E2E8F0"/>
@@ -9769,7 +9852,7 @@
                     <a:bodyPr/>
                     <a:lstStyle/>
                     <a:p>
-                      <a:pPr algn="l" indent="0" marL="0">
+                      <a:pPr marL="0" indent="0" algn="l">
                         <a:buNone/>
                       </a:pPr>
                       <a:r>
@@ -9790,7 +9873,7 @@
                       </a:endParaRPr>
                     </a:p>
                   </a:txBody>
-                  <a:tcPr marL="91440" marR="91440" marT="45720" marB="45720" anchor="ctr">
+                  <a:tcPr anchor="ctr">
                     <a:lnL w="9525" cap="flat" cmpd="sng" algn="ctr">
                       <a:solidFill>
                         <a:srgbClr val="E2E8F0"/>
@@ -9829,6 +9912,11 @@
                     </a:lnB>
                   </a:tcPr>
                 </a:tc>
+                <a:extLst>
+                  <a:ext uri="{0D108BD9-81ED-4DB2-BD59-A6C34878D82A}">
+                    <a16:rowId xmlns:a16="http://schemas.microsoft.com/office/drawing/2014/main" val="10003"/>
+                  </a:ext>
+                </a:extLst>
               </a:tr>
             </a:tbl>
           </a:graphicData>
@@ -9877,11 +9965,11 @@
           <a:bodyPr wrap="square" lIns="0" tIns="0" rIns="0" bIns="0" rtlCol="0" anchor="ctr"/>
           <a:lstStyle/>
           <a:p>
-            <a:pPr indent="0" marL="0">
-              <a:buNone/>
-            </a:pPr>
-            <a:r>
-              <a:rPr lang="en-US" sz="1300" b="1" spc="100" kern="0" dirty="0">
+            <a:pPr marL="0" indent="0">
+              <a:buNone/>
+            </a:pPr>
+            <a:r>
+              <a:rPr lang="en-US" sz="1300" b="1" kern="0" spc="100" dirty="0">
                 <a:solidFill>
                   <a:srgbClr val="1E2761"/>
                 </a:solidFill>
@@ -9916,7 +10004,7 @@
           <a:bodyPr wrap="square" lIns="0" tIns="0" rIns="0" bIns="0" rtlCol="0" anchor="t"/>
           <a:lstStyle/>
           <a:p>
-            <a:pPr indent="0" marL="0">
+            <a:pPr marL="0" indent="0">
               <a:lnSpc>
                 <a:spcPct val="130000"/>
               </a:lnSpc>
@@ -9933,12 +10021,6 @@
               </a:rPr>
               <a:t>Mesmo respeitando rigorosamente a regra de amostra do Shapiro-Wilk (até 2.000 registros), o p-value permanece abaixo de 0,05. </a:t>
             </a:r>
-            <a:pPr indent="0" marL="0">
-              <a:lnSpc>
-                <a:spcPct val="130000"/>
-              </a:lnSpc>
-              <a:buNone/>
-            </a:pPr>
             <a:r>
               <a:rPr lang="en-US" sz="1350" b="1" dirty="0">
                 <a:solidFill>
@@ -9950,12 +10032,6 @@
               </a:rPr>
               <a:t>Isso confirma que a não-normalidade não é um erro metodológico, mas uma característica real da estrutura salarial pública</a:t>
             </a:r>
-            <a:pPr indent="0" marL="0">
-              <a:lnSpc>
-                <a:spcPct val="130000"/>
-              </a:lnSpc>
-              <a:buNone/>
-            </a:pPr>
             <a:r>
               <a:rPr lang="en-US" sz="1350" dirty="0">
                 <a:solidFill>
@@ -9973,7 +10049,7 @@
       </p:sp>
       <p:sp>
         <p:nvSpPr>
-          <p:cNvPr id="8" name="Text 5"/>
+          <p:cNvPr id="4" name="Text 5"/>
           <p:cNvSpPr/>
           <p:nvPr/>
         </p:nvSpPr>
@@ -9992,7 +10068,7 @@
           <a:bodyPr wrap="square" lIns="0" tIns="0" rIns="0" bIns="0" rtlCol="0" anchor="ctr"/>
           <a:lstStyle/>
           <a:p>
-            <a:pPr algn="l" indent="0" marL="0">
+            <a:pPr marL="0" indent="0" algn="l">
               <a:buNone/>
             </a:pPr>
             <a:r>
@@ -10031,7 +10107,7 @@
           <a:bodyPr wrap="square" lIns="0" tIns="0" rIns="0" bIns="0" rtlCol="0" anchor="ctr"/>
           <a:lstStyle/>
           <a:p>
-            <a:pPr algn="r" indent="0" marL="0">
+            <a:pPr marL="0" indent="0" algn="r">
               <a:buNone/>
             </a:pPr>
             <a:r>
@@ -10065,6 +10141,7 @@
         <a:solidFill>
           <a:srgbClr val="FFFFFF"/>
         </a:solidFill>
+        <a:effectLst/>
       </p:bgPr>
     </p:bg>
     <p:spTree>
@@ -10102,11 +10179,11 @@
           <a:bodyPr wrap="square" lIns="0" tIns="0" rIns="0" bIns="0" rtlCol="0" anchor="ctr"/>
           <a:lstStyle/>
           <a:p>
-            <a:pPr indent="0" marL="0">
-              <a:buNone/>
-            </a:pPr>
-            <a:r>
-              <a:rPr lang="en-US" sz="1300" b="1" spc="200" kern="0" dirty="0">
+            <a:pPr marL="0" indent="0">
+              <a:buNone/>
+            </a:pPr>
+            <a:r>
+              <a:rPr lang="en-US" sz="1300" b="1" kern="0" spc="200" dirty="0">
                 <a:solidFill>
                   <a:srgbClr val="1E2761"/>
                 </a:solidFill>
@@ -10141,7 +10218,7 @@
           <a:bodyPr wrap="square" lIns="0" tIns="0" rIns="0" bIns="0" rtlCol="0" anchor="ctr"/>
           <a:lstStyle/>
           <a:p>
-            <a:pPr indent="0" marL="0">
+            <a:pPr marL="0" indent="0">
               <a:buNone/>
             </a:pPr>
             <a:r>
@@ -10161,14 +10238,14 @@
       </p:sp>
       <p:pic>
         <p:nvPicPr>
-          <p:cNvPr id="4" name="Image 0" descr="assets/scatter_catboost.png">    </p:cNvPr>
+          <p:cNvPr id="4" name="Image 0" descr="assets/scatter_catboost.png"/>
           <p:cNvPicPr>
             <a:picLocks noChangeAspect="1"/>
           </p:cNvPicPr>
           <p:nvPr/>
         </p:nvPicPr>
         <p:blipFill>
-          <a:blip r:embed="rId1"/>
+          <a:blip r:embed="rId3"/>
           <a:stretch>
             <a:fillRect/>
           </a:stretch>
@@ -10204,7 +10281,7 @@
           </a:solidFill>
           <a:ln/>
           <a:effectLst>
-            <a:outerShdw sx="100000" sy="100000" kx="0" ky="0" algn="bl" rotWithShape="0" blurRad="101600" dist="38100" dir="5400000">
+            <a:outerShdw blurRad="101600" dist="38100" dir="5400000" algn="bl" rotWithShape="0">
               <a:srgbClr val="000000">
                 <a:alpha val="12000"/>
               </a:srgbClr>
@@ -10233,11 +10310,11 @@
           <a:bodyPr wrap="square" lIns="0" tIns="0" rIns="0" bIns="0" rtlCol="0" anchor="ctr"/>
           <a:lstStyle/>
           <a:p>
-            <a:pPr indent="0" marL="0">
-              <a:buNone/>
-            </a:pPr>
-            <a:r>
-              <a:rPr lang="en-US" sz="1100" b="1" spc="100" kern="0" dirty="0">
+            <a:pPr marL="0" indent="0">
+              <a:buNone/>
+            </a:pPr>
+            <a:r>
+              <a:rPr lang="en-US" sz="1100" b="1" kern="0" spc="100" dirty="0">
                 <a:solidFill>
                   <a:srgbClr val="CADCFC"/>
                 </a:solidFill>
@@ -10272,7 +10349,7 @@
           <a:bodyPr wrap="square" lIns="0" tIns="0" rIns="0" bIns="0" rtlCol="0" anchor="ctr"/>
           <a:lstStyle/>
           <a:p>
-            <a:pPr indent="0" marL="0">
+            <a:pPr marL="0" indent="0">
               <a:buNone/>
             </a:pPr>
             <a:r>
@@ -10311,7 +10388,7 @@
           <a:bodyPr wrap="square" lIns="0" tIns="0" rIns="0" bIns="0" rtlCol="0" anchor="ctr"/>
           <a:lstStyle/>
           <a:p>
-            <a:pPr indent="0" marL="0">
+            <a:pPr marL="0" indent="0">
               <a:lnSpc>
                 <a:spcPct val="115000"/>
               </a:lnSpc>
@@ -10375,7 +10452,7 @@
           <a:bodyPr wrap="square" lIns="0" tIns="0" rIns="0" bIns="0" rtlCol="0" anchor="ctr"/>
           <a:lstStyle/>
           <a:p>
-            <a:pPr indent="0" marL="0">
+            <a:pPr marL="0" indent="0">
               <a:buNone/>
             </a:pPr>
             <a:r>
@@ -10414,7 +10491,7 @@
           <a:bodyPr wrap="square" lIns="0" tIns="0" rIns="0" bIns="0" rtlCol="0" anchor="ctr"/>
           <a:lstStyle/>
           <a:p>
-            <a:pPr indent="0" marL="0">
+            <a:pPr marL="0" indent="0">
               <a:buNone/>
             </a:pPr>
             <a:r>
@@ -10475,7 +10552,7 @@
           <a:bodyPr wrap="square" lIns="0" tIns="0" rIns="0" bIns="0" rtlCol="0" anchor="ctr"/>
           <a:lstStyle/>
           <a:p>
-            <a:pPr indent="0" marL="0">
+            <a:pPr marL="0" indent="0">
               <a:buNone/>
             </a:pPr>
             <a:r>
@@ -10514,7 +10591,7 @@
           <a:bodyPr wrap="square" lIns="0" tIns="0" rIns="0" bIns="0" rtlCol="0" anchor="ctr"/>
           <a:lstStyle/>
           <a:p>
-            <a:pPr indent="0" marL="0">
+            <a:pPr marL="0" indent="0">
               <a:lnSpc>
                 <a:spcPct val="125000"/>
               </a:lnSpc>
@@ -10531,12 +10608,6 @@
               </a:rPr>
               <a:t>Algoritmo: </a:t>
             </a:r>
-            <a:pPr indent="0" marL="0">
-              <a:lnSpc>
-                <a:spcPct val="125000"/>
-              </a:lnSpc>
-              <a:buNone/>
-            </a:pPr>
             <a:r>
               <a:rPr lang="en-US" sz="1100" dirty="0">
                 <a:solidFill>
@@ -10548,12 +10619,6 @@
               </a:rPr>
               <a:t>CatBoost Regressor</a:t>
             </a:r>
-            <a:pPr indent="0" marL="0">
-              <a:lnSpc>
-                <a:spcPct val="125000"/>
-              </a:lnSpc>
-              <a:buNone/>
-            </a:pPr>
             <a:r>
               <a:rPr lang="en-US" sz="1100" b="1" dirty="0">
                 <a:solidFill>
@@ -10565,12 +10630,6 @@
               </a:rPr>
               <a:t>   ·   Variável-alvo: </a:t>
             </a:r>
-            <a:pPr indent="0" marL="0">
-              <a:lnSpc>
-                <a:spcPct val="125000"/>
-              </a:lnSpc>
-              <a:buNone/>
-            </a:pPr>
             <a:r>
               <a:rPr lang="en-US" sz="1100" dirty="0">
                 <a:solidFill>
@@ -10583,12 +10642,6 @@
               <a:t>remuneração (Box-Cox)
 </a:t>
             </a:r>
-            <a:pPr indent="0" marL="0">
-              <a:lnSpc>
-                <a:spcPct val="125000"/>
-              </a:lnSpc>
-              <a:buNone/>
-            </a:pPr>
             <a:r>
               <a:rPr lang="en-US" sz="1100" b="1" dirty="0">
                 <a:solidFill>
@@ -10600,12 +10653,6 @@
               </a:rPr>
               <a:t>Feature: </a:t>
             </a:r>
-            <a:pPr indent="0" marL="0">
-              <a:lnSpc>
-                <a:spcPct val="125000"/>
-              </a:lnSpc>
-              <a:buNone/>
-            </a:pPr>
             <a:r>
               <a:rPr lang="en-US" sz="1100" dirty="0">
                 <a:solidFill>
@@ -10617,12 +10664,6 @@
               </a:rPr>
               <a:t>vínculo empregatício   </a:t>
             </a:r>
-            <a:pPr indent="0" marL="0">
-              <a:lnSpc>
-                <a:spcPct val="125000"/>
-              </a:lnSpc>
-              <a:buNone/>
-            </a:pPr>
             <a:r>
               <a:rPr lang="en-US" sz="1100" b="1" dirty="0">
                 <a:solidFill>
@@ -10634,12 +10675,6 @@
               </a:rPr>
               <a:t>·   Split: </a:t>
             </a:r>
-            <a:pPr indent="0" marL="0">
-              <a:lnSpc>
-                <a:spcPct val="125000"/>
-              </a:lnSpc>
-              <a:buNone/>
-            </a:pPr>
             <a:r>
               <a:rPr lang="en-US" sz="1100" dirty="0">
                 <a:solidFill>
@@ -10676,7 +10711,7 @@
           <a:bodyPr wrap="square" lIns="0" tIns="0" rIns="0" bIns="0" rtlCol="0" anchor="ctr"/>
           <a:lstStyle/>
           <a:p>
-            <a:pPr algn="l" indent="0" marL="0">
+            <a:pPr marL="0" indent="0" algn="l">
               <a:buNone/>
             </a:pPr>
             <a:r>
@@ -10715,7 +10750,7 @@
           <a:bodyPr wrap="square" lIns="0" tIns="0" rIns="0" bIns="0" rtlCol="0" anchor="ctr"/>
           <a:lstStyle/>
           <a:p>
-            <a:pPr algn="r" indent="0" marL="0">
+            <a:pPr marL="0" indent="0" algn="r">
               <a:buNone/>
             </a:pPr>
             <a:r>
@@ -10749,6 +10784,7 @@
         <a:solidFill>
           <a:srgbClr val="FFFFFF"/>
         </a:solidFill>
+        <a:effectLst/>
       </p:bgPr>
     </p:bg>
     <p:spTree>
@@ -10786,11 +10822,11 @@
           <a:bodyPr wrap="square" lIns="0" tIns="0" rIns="0" bIns="0" rtlCol="0" anchor="ctr"/>
           <a:lstStyle/>
           <a:p>
-            <a:pPr indent="0" marL="0">
-              <a:buNone/>
-            </a:pPr>
-            <a:r>
-              <a:rPr lang="en-US" sz="1300" b="1" spc="200" kern="0" dirty="0">
+            <a:pPr marL="0" indent="0">
+              <a:buNone/>
+            </a:pPr>
+            <a:r>
+              <a:rPr lang="en-US" sz="1300" b="1" kern="0" spc="200" dirty="0">
                 <a:solidFill>
                   <a:srgbClr val="1E2761"/>
                 </a:solidFill>
@@ -10825,7 +10861,7 @@
           <a:bodyPr wrap="square" lIns="0" tIns="0" rIns="0" bIns="0" rtlCol="0" anchor="ctr"/>
           <a:lstStyle/>
           <a:p>
-            <a:pPr indent="0" marL="0">
+            <a:pPr marL="0" indent="0">
               <a:buNone/>
             </a:pPr>
             <a:r>
@@ -10845,7 +10881,7 @@
       </p:sp>
       <p:graphicFrame>
         <p:nvGraphicFramePr>
-          <p:cNvPr id="4" name="Chart 0" descr=""/>
+          <p:cNvPr id="4" name="Chart 0"/>
           <p:cNvGraphicFramePr/>
           <p:nvPr/>
         </p:nvGraphicFramePr>
@@ -10853,9 +10889,9 @@
           <a:off x="457200" y="1463040"/>
           <a:ext cx="6858000" cy="3246120"/>
         </p:xfrm>
-        <a:graphic xmlns:a="http://schemas.openxmlformats.org/drawingml/2006/main">
+        <a:graphic>
           <a:graphicData uri="http://schemas.openxmlformats.org/drawingml/2006/chart">
-            <c:chart xmlns:c="http://schemas.openxmlformats.org/drawingml/2006/chart" r:id="rId1"/>
+            <c:chart xmlns:c="http://schemas.openxmlformats.org/drawingml/2006/chart" xmlns:r="http://schemas.openxmlformats.org/officeDocument/2006/relationships" r:id="rId3"/>
           </a:graphicData>
         </a:graphic>
       </p:graphicFrame>
@@ -10880,7 +10916,7 @@
           <a:bodyPr wrap="square" lIns="0" tIns="0" rIns="0" bIns="0" rtlCol="0" anchor="ctr"/>
           <a:lstStyle/>
           <a:p>
-            <a:pPr indent="0" marL="0">
+            <a:pPr marL="0" indent="0">
               <a:buNone/>
             </a:pPr>
             <a:r>
@@ -10941,11 +10977,11 @@
           <a:bodyPr wrap="square" lIns="0" tIns="0" rIns="0" bIns="0" rtlCol="0" anchor="ctr"/>
           <a:lstStyle/>
           <a:p>
-            <a:pPr indent="0" marL="0">
-              <a:buNone/>
-            </a:pPr>
-            <a:r>
-              <a:rPr lang="en-US" sz="1050" b="1" spc="50" kern="0" dirty="0">
+            <a:pPr marL="0" indent="0">
+              <a:buNone/>
+            </a:pPr>
+            <a:r>
+              <a:rPr lang="en-US" sz="1050" b="1" kern="0" spc="50" dirty="0">
                 <a:solidFill>
                   <a:srgbClr val="64748B"/>
                 </a:solidFill>
@@ -10980,7 +11016,7 @@
           <a:bodyPr wrap="square" lIns="0" tIns="0" rIns="0" bIns="0" rtlCol="0" anchor="ctr"/>
           <a:lstStyle/>
           <a:p>
-            <a:pPr indent="0" marL="0">
+            <a:pPr marL="0" indent="0">
               <a:buNone/>
             </a:pPr>
             <a:r>
@@ -11019,7 +11055,7 @@
           <a:bodyPr wrap="square" lIns="0" tIns="0" rIns="0" bIns="0" rtlCol="0" anchor="ctr"/>
           <a:lstStyle/>
           <a:p>
-            <a:pPr indent="0" marL="0">
+            <a:pPr marL="0" indent="0">
               <a:lnSpc>
                 <a:spcPct val="120000"/>
               </a:lnSpc>
@@ -11039,7 +11075,7 @@
             <a:endParaRPr lang="en-US" sz="1100" dirty="0"/>
           </a:p>
           <a:p>
-            <a:pPr indent="0" marL="0">
+            <a:pPr marL="0" indent="0">
               <a:lnSpc>
                 <a:spcPct val="120000"/>
               </a:lnSpc>
@@ -11104,14 +11140,14 @@
       </p:sp>
       <p:pic>
         <p:nvPicPr>
-          <p:cNvPr id="12" name="Image 0" descr="assets/icon_chartline.png">    </p:cNvPr>
+          <p:cNvPr id="12" name="Image 0" descr="assets/icon_chartline.png"/>
           <p:cNvPicPr>
             <a:picLocks noChangeAspect="1"/>
           </p:cNvPicPr>
           <p:nvPr/>
         </p:nvPicPr>
         <p:blipFill>
-          <a:blip r:embed="rId2"/>
+          <a:blip r:embed="rId4"/>
           <a:stretch>
             <a:fillRect/>
           </a:stretch>
@@ -11147,7 +11183,7 @@
           <a:bodyPr wrap="square" lIns="0" tIns="0" rIns="0" bIns="0" rtlCol="0" anchor="ctr"/>
           <a:lstStyle/>
           <a:p>
-            <a:pPr indent="0" marL="0">
+            <a:pPr marL="0" indent="0">
               <a:buNone/>
             </a:pPr>
             <a:r>
@@ -11186,7 +11222,7 @@
           <a:bodyPr wrap="square" lIns="0" tIns="0" rIns="0" bIns="0" rtlCol="0" anchor="ctr"/>
           <a:lstStyle/>
           <a:p>
-            <a:pPr indent="0" marL="0">
+            <a:pPr marL="0" indent="0">
               <a:lnSpc>
                 <a:spcPct val="120000"/>
               </a:lnSpc>
@@ -11250,7 +11286,7 @@
           <a:bodyPr wrap="square" lIns="0" tIns="0" rIns="0" bIns="0" rtlCol="0" anchor="ctr"/>
           <a:lstStyle/>
           <a:p>
-            <a:pPr indent="0" marL="0">
+            <a:pPr marL="0" indent="0">
               <a:lnSpc>
                 <a:spcPct val="120000"/>
               </a:lnSpc>
@@ -11267,12 +11303,6 @@
               </a:rPr>
               <a:t>Em 2026, a folha já soma R$ 2.286.710 </a:t>
             </a:r>
-            <a:pPr indent="0" marL="0">
-              <a:lnSpc>
-                <a:spcPct val="120000"/>
-              </a:lnSpc>
-              <a:buNone/>
-            </a:pPr>
             <a:r>
               <a:rPr lang="en-US" sz="1150" dirty="0">
                 <a:solidFill>
@@ -11309,7 +11339,7 @@
           <a:bodyPr wrap="square" lIns="0" tIns="0" rIns="0" bIns="0" rtlCol="0" anchor="ctr"/>
           <a:lstStyle/>
           <a:p>
-            <a:pPr algn="l" indent="0" marL="0">
+            <a:pPr marL="0" indent="0" algn="l">
               <a:buNone/>
             </a:pPr>
             <a:r>
@@ -11348,7 +11378,7 @@
           <a:bodyPr wrap="square" lIns="0" tIns="0" rIns="0" bIns="0" rtlCol="0" anchor="ctr"/>
           <a:lstStyle/>
           <a:p>
-            <a:pPr algn="r" indent="0" marL="0">
+            <a:pPr marL="0" indent="0" algn="r">
               <a:buNone/>
             </a:pPr>
             <a:r>
@@ -11667,4 +11697,299 @@
     </a:ext>
   </a:extLst>
 </a:theme>
+</file>
+
+<file path=ppt/theme/theme2.xml><?xml version="1.0" encoding="utf-8"?>
+<a:theme xmlns:a="http://schemas.openxmlformats.org/drawingml/2006/main" name="Tema do Office">
+  <a:themeElements>
+    <a:clrScheme name="Office">
+      <a:dk1>
+        <a:sysClr val="windowText" lastClr="000000"/>
+      </a:dk1>
+      <a:lt1>
+        <a:sysClr val="window" lastClr="FFFFFF"/>
+      </a:lt1>
+      <a:dk2>
+        <a:srgbClr val="44546A"/>
+      </a:dk2>
+      <a:lt2>
+        <a:srgbClr val="E7E6E6"/>
+      </a:lt2>
+      <a:accent1>
+        <a:srgbClr val="4472C4"/>
+      </a:accent1>
+      <a:accent2>
+        <a:srgbClr val="ED7D31"/>
+      </a:accent2>
+      <a:accent3>
+        <a:srgbClr val="A5A5A5"/>
+      </a:accent3>
+      <a:accent4>
+        <a:srgbClr val="FFC000"/>
+      </a:accent4>
+      <a:accent5>
+        <a:srgbClr val="5B9BD5"/>
+      </a:accent5>
+      <a:accent6>
+        <a:srgbClr val="70AD47"/>
+      </a:accent6>
+      <a:hlink>
+        <a:srgbClr val="0563C1"/>
+      </a:hlink>
+      <a:folHlink>
+        <a:srgbClr val="954F72"/>
+      </a:folHlink>
+    </a:clrScheme>
+    <a:fontScheme name="Office">
+      <a:majorFont>
+        <a:latin typeface="Calibri Light" panose="020F0302020204030204"/>
+        <a:ea typeface=""/>
+        <a:cs typeface=""/>
+        <a:font script="Jpan" typeface="游ゴシック Light"/>
+        <a:font script="Hang" typeface="맑은 고딕"/>
+        <a:font script="Hans" typeface="等线 Light"/>
+        <a:font script="Hant" typeface="新細明體"/>
+        <a:font script="Arab" typeface="Times New Roman"/>
+        <a:font script="Hebr" typeface="Times New Roman"/>
+        <a:font script="Thai" typeface="Angsana New"/>
+        <a:font script="Ethi" typeface="Nyala"/>
+        <a:font script="Beng" typeface="Vrinda"/>
+        <a:font script="Gujr" typeface="Shruti"/>
+        <a:font script="Khmr" typeface="MoolBoran"/>
+        <a:font script="Knda" typeface="Tunga"/>
+        <a:font script="Guru" typeface="Raavi"/>
+        <a:font script="Cans" typeface="Euphemia"/>
+        <a:font script="Cher" typeface="Plantagenet Cherokee"/>
+        <a:font script="Yiii" typeface="Microsoft Yi Baiti"/>
+        <a:font script="Tibt" typeface="Microsoft Himalaya"/>
+        <a:font script="Thaa" typeface="MV Boli"/>
+        <a:font script="Deva" typeface="Mangal"/>
+        <a:font script="Telu" typeface="Gautami"/>
+        <a:font script="Taml" typeface="Latha"/>
+        <a:font script="Syrc" typeface="Estrangelo Edessa"/>
+        <a:font script="Orya" typeface="Kalinga"/>
+        <a:font script="Mlym" typeface="Kartika"/>
+        <a:font script="Laoo" typeface="DokChampa"/>
+        <a:font script="Sinh" typeface="Iskoola Pota"/>
+        <a:font script="Mong" typeface="Mongolian Baiti"/>
+        <a:font script="Viet" typeface="Times New Roman"/>
+        <a:font script="Uigh" typeface="Microsoft Uighur"/>
+        <a:font script="Geor" typeface="Sylfaen"/>
+        <a:font script="Armn" typeface="Arial"/>
+        <a:font script="Bugi" typeface="Leelawadee UI"/>
+        <a:font script="Bopo" typeface="Microsoft JhengHei"/>
+        <a:font script="Java" typeface="Javanese Text"/>
+        <a:font script="Lisu" typeface="Segoe UI"/>
+        <a:font script="Mymr" typeface="Myanmar Text"/>
+        <a:font script="Nkoo" typeface="Ebrima"/>
+        <a:font script="Olck" typeface="Nirmala UI"/>
+        <a:font script="Osma" typeface="Ebrima"/>
+        <a:font script="Phag" typeface="Phagspa"/>
+        <a:font script="Syrn" typeface="Estrangelo Edessa"/>
+        <a:font script="Syrj" typeface="Estrangelo Edessa"/>
+        <a:font script="Syre" typeface="Estrangelo Edessa"/>
+        <a:font script="Sora" typeface="Nirmala UI"/>
+        <a:font script="Tale" typeface="Microsoft Tai Le"/>
+        <a:font script="Talu" typeface="Microsoft New Tai Lue"/>
+        <a:font script="Tfng" typeface="Ebrima"/>
+      </a:majorFont>
+      <a:minorFont>
+        <a:latin typeface="Calibri" panose="020F0502020204030204"/>
+        <a:ea typeface=""/>
+        <a:cs typeface=""/>
+        <a:font script="Jpan" typeface="游ゴシック"/>
+        <a:font script="Hang" typeface="맑은 고딕"/>
+        <a:font script="Hans" typeface="等线"/>
+        <a:font script="Hant" typeface="新細明體"/>
+        <a:font script="Arab" typeface="Arial"/>
+        <a:font script="Hebr" typeface="Arial"/>
+        <a:font script="Thai" typeface="Cordia New"/>
+        <a:font script="Ethi" typeface="Nyala"/>
+        <a:font script="Beng" typeface="Vrinda"/>
+        <a:font script="Gujr" typeface="Shruti"/>
+        <a:font script="Khmr" typeface="DaunPenh"/>
+        <a:font script="Knda" typeface="Tunga"/>
+        <a:font script="Guru" typeface="Raavi"/>
+        <a:font script="Cans" typeface="Euphemia"/>
+        <a:font script="Cher" typeface="Plantagenet Cherokee"/>
+        <a:font script="Yiii" typeface="Microsoft Yi Baiti"/>
+        <a:font script="Tibt" typeface="Microsoft Himalaya"/>
+        <a:font script="Thaa" typeface="MV Boli"/>
+        <a:font script="Deva" typeface="Mangal"/>
+        <a:font script="Telu" typeface="Gautami"/>
+        <a:font script="Taml" typeface="Latha"/>
+        <a:font script="Syrc" typeface="Estrangelo Edessa"/>
+        <a:font script="Orya" typeface="Kalinga"/>
+        <a:font script="Mlym" typeface="Kartika"/>
+        <a:font script="Laoo" typeface="DokChampa"/>
+        <a:font script="Sinh" typeface="Iskoola Pota"/>
+        <a:font script="Mong" typeface="Mongolian Baiti"/>
+        <a:font script="Viet" typeface="Arial"/>
+        <a:font script="Uigh" typeface="Microsoft Uighur"/>
+        <a:font script="Geor" typeface="Sylfaen"/>
+        <a:font script="Armn" typeface="Arial"/>
+        <a:font script="Bugi" typeface="Leelawadee UI"/>
+        <a:font script="Bopo" typeface="Microsoft JhengHei"/>
+        <a:font script="Java" typeface="Javanese Text"/>
+        <a:font script="Lisu" typeface="Segoe UI"/>
+        <a:font script="Mymr" typeface="Myanmar Text"/>
+        <a:font script="Nkoo" typeface="Ebrima"/>
+        <a:font script="Olck" typeface="Nirmala UI"/>
+        <a:font script="Osma" typeface="Ebrima"/>
+        <a:font script="Phag" typeface="Phagspa"/>
+        <a:font script="Syrn" typeface="Estrangelo Edessa"/>
+        <a:font script="Syrj" typeface="Estrangelo Edessa"/>
+        <a:font script="Syre" typeface="Estrangelo Edessa"/>
+        <a:font script="Sora" typeface="Nirmala UI"/>
+        <a:font script="Tale" typeface="Microsoft Tai Le"/>
+        <a:font script="Talu" typeface="Microsoft New Tai Lue"/>
+        <a:font script="Tfng" typeface="Ebrima"/>
+      </a:minorFont>
+    </a:fontScheme>
+    <a:fmtScheme name="Office">
+      <a:fillStyleLst>
+        <a:solidFill>
+          <a:schemeClr val="phClr"/>
+        </a:solidFill>
+        <a:gradFill rotWithShape="1">
+          <a:gsLst>
+            <a:gs pos="0">
+              <a:schemeClr val="phClr">
+                <a:lumMod val="110000"/>
+                <a:satMod val="105000"/>
+                <a:tint val="67000"/>
+              </a:schemeClr>
+            </a:gs>
+            <a:gs pos="50000">
+              <a:schemeClr val="phClr">
+                <a:lumMod val="105000"/>
+                <a:satMod val="103000"/>
+                <a:tint val="73000"/>
+              </a:schemeClr>
+            </a:gs>
+            <a:gs pos="100000">
+              <a:schemeClr val="phClr">
+                <a:lumMod val="105000"/>
+                <a:satMod val="109000"/>
+                <a:tint val="81000"/>
+              </a:schemeClr>
+            </a:gs>
+          </a:gsLst>
+          <a:lin ang="5400000" scaled="0"/>
+        </a:gradFill>
+        <a:gradFill rotWithShape="1">
+          <a:gsLst>
+            <a:gs pos="0">
+              <a:schemeClr val="phClr">
+                <a:satMod val="103000"/>
+                <a:lumMod val="102000"/>
+                <a:tint val="94000"/>
+              </a:schemeClr>
+            </a:gs>
+            <a:gs pos="50000">
+              <a:schemeClr val="phClr">
+                <a:satMod val="110000"/>
+                <a:lumMod val="100000"/>
+                <a:shade val="100000"/>
+              </a:schemeClr>
+            </a:gs>
+            <a:gs pos="100000">
+              <a:schemeClr val="phClr">
+                <a:lumMod val="99000"/>
+                <a:satMod val="120000"/>
+                <a:shade val="78000"/>
+              </a:schemeClr>
+            </a:gs>
+          </a:gsLst>
+          <a:lin ang="5400000" scaled="0"/>
+        </a:gradFill>
+      </a:fillStyleLst>
+      <a:lnStyleLst>
+        <a:ln w="6350" cap="flat" cmpd="sng" algn="ctr">
+          <a:solidFill>
+            <a:schemeClr val="phClr"/>
+          </a:solidFill>
+          <a:prstDash val="solid"/>
+          <a:miter lim="800000"/>
+        </a:ln>
+        <a:ln w="12700" cap="flat" cmpd="sng" algn="ctr">
+          <a:solidFill>
+            <a:schemeClr val="phClr"/>
+          </a:solidFill>
+          <a:prstDash val="solid"/>
+          <a:miter lim="800000"/>
+        </a:ln>
+        <a:ln w="19050" cap="flat" cmpd="sng" algn="ctr">
+          <a:solidFill>
+            <a:schemeClr val="phClr"/>
+          </a:solidFill>
+          <a:prstDash val="solid"/>
+          <a:miter lim="800000"/>
+        </a:ln>
+      </a:lnStyleLst>
+      <a:effectStyleLst>
+        <a:effectStyle>
+          <a:effectLst/>
+        </a:effectStyle>
+        <a:effectStyle>
+          <a:effectLst/>
+        </a:effectStyle>
+        <a:effectStyle>
+          <a:effectLst>
+            <a:outerShdw blurRad="57150" dist="19050" dir="5400000" algn="ctr" rotWithShape="0">
+              <a:srgbClr val="000000">
+                <a:alpha val="63000"/>
+              </a:srgbClr>
+            </a:outerShdw>
+          </a:effectLst>
+        </a:effectStyle>
+      </a:effectStyleLst>
+      <a:bgFillStyleLst>
+        <a:solidFill>
+          <a:schemeClr val="phClr"/>
+        </a:solidFill>
+        <a:solidFill>
+          <a:schemeClr val="phClr">
+            <a:tint val="95000"/>
+            <a:satMod val="170000"/>
+          </a:schemeClr>
+        </a:solidFill>
+        <a:gradFill rotWithShape="1">
+          <a:gsLst>
+            <a:gs pos="0">
+              <a:schemeClr val="phClr">
+                <a:tint val="93000"/>
+                <a:satMod val="150000"/>
+                <a:shade val="98000"/>
+                <a:lumMod val="102000"/>
+              </a:schemeClr>
+            </a:gs>
+            <a:gs pos="50000">
+              <a:schemeClr val="phClr">
+                <a:tint val="98000"/>
+                <a:satMod val="130000"/>
+                <a:shade val="90000"/>
+                <a:lumMod val="103000"/>
+              </a:schemeClr>
+            </a:gs>
+            <a:gs pos="100000">
+              <a:schemeClr val="phClr">
+                <a:shade val="63000"/>
+                <a:satMod val="120000"/>
+              </a:schemeClr>
+            </a:gs>
+          </a:gsLst>
+          <a:lin ang="5400000" scaled="0"/>
+        </a:gradFill>
+      </a:bgFillStyleLst>
+    </a:fmtScheme>
+  </a:themeElements>
+  <a:objectDefaults/>
+  <a:extraClrSchemeLst/>
+  <a:extLst>
+    <a:ext uri="{05A4C25C-085E-4340-85A3-A5531E510DB2}">
+      <thm15:themeFamily xmlns:thm15="http://schemas.microsoft.com/office/thememl/2012/main" name="Office Theme" id="{62F939B6-93AF-4DB8-9C6B-D6C7DFDC589F}" vid="{4A3C46E8-61CC-4603-A589-7422A47A8E4A}"/>
+    </a:ext>
+  </a:extLst>
+</a:theme>
 </file>